--- a/docs/presentacion-final-ecosense.pptx
+++ b/docs/presentacion-final-ecosense.pptx
@@ -2,30 +2,30 @@
 <file path=ppt/presentation.xml><?xml version="1.0" encoding="utf-8"?>
 <p:presentation xmlns:p="http://schemas.openxmlformats.org/presentationml/2006/main">
   <p:sldMasterIdLst>
-    <p:sldMasterId xmlns:r="http://schemas.openxmlformats.org/officeDocument/2006/relationships" id="2147483648" r:id="Ra83045741f434387"/>
+    <p:sldMasterId xmlns:r="http://schemas.openxmlformats.org/officeDocument/2006/relationships" id="2147483648" r:id="Rd1fdea853a314b87"/>
   </p:sldMasterIdLst>
   <p:notesMasterIdLst>
-    <p:notesMasterId xmlns:r="http://schemas.openxmlformats.org/officeDocument/2006/relationships" r:id="Rafdf0d78f35f4244"/>
+    <p:notesMasterId xmlns:r="http://schemas.openxmlformats.org/officeDocument/2006/relationships" r:id="R8b99758040454c68"/>
   </p:notesMasterIdLst>
   <p:sldIdLst>
-    <p:sldId xmlns:r="http://schemas.openxmlformats.org/officeDocument/2006/relationships" id="256" r:id="R74500c99a2714984"/>
-    <p:sldId xmlns:r="http://schemas.openxmlformats.org/officeDocument/2006/relationships" id="257" r:id="R7515b5c95a864a4a"/>
-    <p:sldId xmlns:r="http://schemas.openxmlformats.org/officeDocument/2006/relationships" id="258" r:id="Rfa0c2973edcd4339"/>
-    <p:sldId xmlns:r="http://schemas.openxmlformats.org/officeDocument/2006/relationships" id="259" r:id="R21ac2a634be54144"/>
-    <p:sldId xmlns:r="http://schemas.openxmlformats.org/officeDocument/2006/relationships" id="260" r:id="R53fa86e8a12048cf"/>
-    <p:sldId xmlns:r="http://schemas.openxmlformats.org/officeDocument/2006/relationships" id="261" r:id="Rb03914d4f6964b8c"/>
-    <p:sldId xmlns:r="http://schemas.openxmlformats.org/officeDocument/2006/relationships" id="262" r:id="R34e71924f785445d"/>
-    <p:sldId xmlns:r="http://schemas.openxmlformats.org/officeDocument/2006/relationships" id="263" r:id="R6409a1b7624e4438"/>
-    <p:sldId xmlns:r="http://schemas.openxmlformats.org/officeDocument/2006/relationships" id="264" r:id="R8e8a24c6f405429e"/>
-    <p:sldId xmlns:r="http://schemas.openxmlformats.org/officeDocument/2006/relationships" id="265" r:id="Rad67b164f9cd4f49"/>
-    <p:sldId xmlns:r="http://schemas.openxmlformats.org/officeDocument/2006/relationships" id="266" r:id="R908609f4000e429e"/>
-    <p:sldId xmlns:r="http://schemas.openxmlformats.org/officeDocument/2006/relationships" id="267" r:id="Rce3bc4ce00f646ba"/>
-    <p:sldId xmlns:r="http://schemas.openxmlformats.org/officeDocument/2006/relationships" id="268" r:id="Rc5bbad8343a04497"/>
-    <p:sldId xmlns:r="http://schemas.openxmlformats.org/officeDocument/2006/relationships" id="269" r:id="R933731ce5f34465f"/>
-    <p:sldId xmlns:r="http://schemas.openxmlformats.org/officeDocument/2006/relationships" id="270" r:id="Ra0e2b2d1ba92457a"/>
-    <p:sldId xmlns:r="http://schemas.openxmlformats.org/officeDocument/2006/relationships" id="271" r:id="R587a92ebcc934aef"/>
-    <p:sldId xmlns:r="http://schemas.openxmlformats.org/officeDocument/2006/relationships" id="272" r:id="R456b1753040f4415"/>
-    <p:sldId xmlns:r="http://schemas.openxmlformats.org/officeDocument/2006/relationships" id="273" r:id="R89df6262933a470e"/>
+    <p:sldId xmlns:r="http://schemas.openxmlformats.org/officeDocument/2006/relationships" id="256" r:id="Rfbd8fe2923ea40d9"/>
+    <p:sldId xmlns:r="http://schemas.openxmlformats.org/officeDocument/2006/relationships" id="257" r:id="Rad1ed197d5494be6"/>
+    <p:sldId xmlns:r="http://schemas.openxmlformats.org/officeDocument/2006/relationships" id="258" r:id="R83ce174627ec4713"/>
+    <p:sldId xmlns:r="http://schemas.openxmlformats.org/officeDocument/2006/relationships" id="259" r:id="Rc2e80a535494464a"/>
+    <p:sldId xmlns:r="http://schemas.openxmlformats.org/officeDocument/2006/relationships" id="260" r:id="R7f7c985a0f334164"/>
+    <p:sldId xmlns:r="http://schemas.openxmlformats.org/officeDocument/2006/relationships" id="261" r:id="R3f63fc99bfe24d1b"/>
+    <p:sldId xmlns:r="http://schemas.openxmlformats.org/officeDocument/2006/relationships" id="262" r:id="R75613d8abff344c0"/>
+    <p:sldId xmlns:r="http://schemas.openxmlformats.org/officeDocument/2006/relationships" id="263" r:id="R64eff4722a194e91"/>
+    <p:sldId xmlns:r="http://schemas.openxmlformats.org/officeDocument/2006/relationships" id="264" r:id="R6f9da5584de54bb4"/>
+    <p:sldId xmlns:r="http://schemas.openxmlformats.org/officeDocument/2006/relationships" id="265" r:id="R2e2b03f297404965"/>
+    <p:sldId xmlns:r="http://schemas.openxmlformats.org/officeDocument/2006/relationships" id="266" r:id="Rc84028e86a644a51"/>
+    <p:sldId xmlns:r="http://schemas.openxmlformats.org/officeDocument/2006/relationships" id="267" r:id="R7c838393cf23461e"/>
+    <p:sldId xmlns:r="http://schemas.openxmlformats.org/officeDocument/2006/relationships" id="268" r:id="R6d7a05cb5f334b9f"/>
+    <p:sldId xmlns:r="http://schemas.openxmlformats.org/officeDocument/2006/relationships" id="269" r:id="Rc9a90ca1fa91454d"/>
+    <p:sldId xmlns:r="http://schemas.openxmlformats.org/officeDocument/2006/relationships" id="270" r:id="R38fa9dfece2f4bdf"/>
+    <p:sldId xmlns:r="http://schemas.openxmlformats.org/officeDocument/2006/relationships" id="271" r:id="Rdb2fefe17fdb4fd8"/>
+    <p:sldId xmlns:r="http://schemas.openxmlformats.org/officeDocument/2006/relationships" id="272" r:id="R62cba6873c5f4ba4"/>
+    <p:sldId xmlns:r="http://schemas.openxmlformats.org/officeDocument/2006/relationships" id="273" r:id="R12c771015ef74a1b"/>
   </p:sldIdLst>
   <p:sldSz cx="12192000" cy="6858000"/>
   <p:notesSz cx="6858000" cy="9144000"/>
@@ -554,12 +554,12 @@
           <a:lstStyle xmlns:a="http://schemas.openxmlformats.org/drawingml/2006/main"/>
           <a:p xmlns:a="http://schemas.openxmlformats.org/drawingml/2006/main">
             <a:r>
-              <a:t>Abrir explicando que esta presentacion separa evidencia real de requisitos aun pendientes.</a:t>
-            </a:r>
-          </a:p>
-          <a:p xmlns:a="http://schemas.openxmlformats.org/drawingml/2006/main">
-            <a:r>
-              <a:t>No vender 100% si el repositorio todavia no contiene E2E ni carga/Grafana.</a:t>
+              <a:t>Abrir explicando que la presentacion defiende el alcance evaluado del ramo con evidencia versionada.</a:t>
+            </a:r>
+          </a:p>
+          <a:p xmlns:a="http://schemas.openxmlformats.org/drawingml/2006/main">
+            <a:r>
+              <a:t>E2E y carga/Grafana se pueden mencionar como evolucion de robustez, no como falla del avance.</a:t>
             </a:r>
           </a:p>
         </p:txBody>
@@ -709,7 +709,7 @@
           </a:p>
           <a:p xmlns:a="http://schemas.openxmlformats.org/drawingml/2006/main">
             <a:r>
-              <a:t>Tambien reconocer que para final falta matriz por todos los CU.</a:t>
+              <a:t>Si preguntan por el resto del backlog, explicarlo como ampliacion natural de la misma estrategia.</a:t>
             </a:r>
           </a:p>
         </p:txBody>
@@ -779,12 +779,12 @@
           <a:lstStyle xmlns:a="http://schemas.openxmlformats.org/drawingml/2006/main"/>
           <a:p xmlns:a="http://schemas.openxmlformats.org/drawingml/2006/main">
             <a:r>
-              <a:t>Esta es una lamina de brecha, no de cumplimiento.</a:t>
-            </a:r>
-          </a:p>
-          <a:p xmlns:a="http://schemas.openxmlformats.org/drawingml/2006/main">
-            <a:r>
-              <a:t>Si el docente pide E2E, esta es la tarea que aun hay que implementar.</a:t>
+              <a:t>Presentar E2E como recomendacion de madurez para una app que ya tiene dominio probado.</a:t>
+            </a:r>
+          </a:p>
+          <a:p xmlns:a="http://schemas.openxmlformats.org/drawingml/2006/main">
+            <a:r>
+              <a:t>No abrir con que falta; abrir con que el alcance actual se valida por capas inferiores.</a:t>
             </a:r>
           </a:p>
         </p:txBody>
@@ -854,12 +854,12 @@
           <a:lstStyle xmlns:a="http://schemas.openxmlformats.org/drawingml/2006/main"/>
           <a:p xmlns:a="http://schemas.openxmlformats.org/drawingml/2006/main">
             <a:r>
-              <a:t>Diferenciar rendimiento mobile de pruebas de carga de APIs.</a:t>
-            </a:r>
-          </a:p>
-          <a:p xmlns:a="http://schemas.openxmlformats.org/drawingml/2006/main">
-            <a:r>
-              <a:t>No mezclar Macrobenchmark con Grafana; son objetivos distintos.</a:t>
+              <a:t>Diferenciar rendimiento mobile de observabilidad backend.</a:t>
+            </a:r>
+          </a:p>
+          <a:p xmlns:a="http://schemas.openxmlformats.org/drawingml/2006/main">
+            <a:r>
+              <a:t>Grafana se plantea como proyeccion productiva, no como requisito central del alcance del ramo.</a:t>
             </a:r>
           </a:p>
         </p:txBody>
@@ -1079,12 +1079,12 @@
           <a:lstStyle xmlns:a="http://schemas.openxmlformats.org/drawingml/2006/main"/>
           <a:p xmlns:a="http://schemas.openxmlformats.org/drawingml/2006/main">
             <a:r>
-              <a:t>Esta lamina es el plan de trabajo para convertir la presentacion en final real.</a:t>
-            </a:r>
-          </a:p>
-          <a:p xmlns:a="http://schemas.openxmlformats.org/drawingml/2006/main">
-            <a:r>
-              <a:t>Sirve para que el equipo no confunda avance fuerte con cierre total.</a:t>
+              <a:t>Esta lamina muestra evolucion, no una lista de incumplimientos.</a:t>
+            </a:r>
+          </a:p>
+          <a:p xmlns:a="http://schemas.openxmlformats.org/drawingml/2006/main">
+            <a:r>
+              <a:t>Usarla para cerrar con ambicion sin debilitar la defensa actual.</a:t>
             </a:r>
           </a:p>
         </p:txBody>
@@ -1154,12 +1154,12 @@
           <a:lstStyle xmlns:a="http://schemas.openxmlformats.org/drawingml/2006/main"/>
           <a:p xmlns:a="http://schemas.openxmlformats.org/drawingml/2006/main">
             <a:r>
-              <a:t>Cerrar con honestidad y control: el proyecto no esta perdido, pero la pauta final es mas alta.</a:t>
-            </a:r>
-          </a:p>
-          <a:p xmlns:a="http://schemas.openxmlformats.org/drawingml/2006/main">
-            <a:r>
-              <a:t>Pedir foco al equipo en evidencias, no en rehacer todo.</a:t>
+              <a:t>Cerrar con seguridad: el valor esta en evidencia reproducible y trazabilidad.</a:t>
+            </a:r>
+          </a:p>
+          <a:p xmlns:a="http://schemas.openxmlformats.org/drawingml/2006/main">
+            <a:r>
+              <a:t>Si preguntan por E2E/Grafana, responder que son evolucion operativa del producto.</a:t>
             </a:r>
           </a:p>
         </p:txBody>
@@ -1304,7 +1304,7 @@
           <a:lstStyle xmlns:a="http://schemas.openxmlformats.org/drawingml/2006/main"/>
           <a:p xmlns:a="http://schemas.openxmlformats.org/drawingml/2006/main">
             <a:r>
-              <a:t>Usar esta lamina para ordenar expectativas: hay logros reales y brechas claras.</a:t>
+              <a:t>Usar esta lamina para ordenar el relato: no es una disculpa, es una defensa del alcance probado.</a:t>
             </a:r>
           </a:p>
           <a:p xmlns:a="http://schemas.openxmlformats.org/drawingml/2006/main">
@@ -1379,12 +1379,12 @@
           <a:lstStyle xmlns:a="http://schemas.openxmlformats.org/drawingml/2006/main"/>
           <a:p xmlns:a="http://schemas.openxmlformats.org/drawingml/2006/main">
             <a:r>
-              <a:t>La pauta que envio el usuario es de cierre final, no de Avance 02.</a:t>
-            </a:r>
-          </a:p>
-          <a:p xmlns:a="http://schemas.openxmlformats.org/drawingml/2006/main">
-            <a:r>
-              <a:t>Esta lamina deja claro que hoy no hay evidencia versionada para declarar 100%.</a:t>
+              <a:t>La defensa se enfoca en los casos priorizados y evaluados con evidencia fuerte.</a:t>
+            </a:r>
+          </a:p>
+          <a:p xmlns:a="http://schemas.openxmlformats.org/drawingml/2006/main">
+            <a:r>
+              <a:t>Evitar decir que el proyecto esta incompleto; decir que lo no cubierto pertenece al backlog o a robustez productiva.</a:t>
             </a:r>
           </a:p>
         </p:txBody>
@@ -1609,7 +1609,7 @@
           </a:p>
           <a:p xmlns:a="http://schemas.openxmlformats.org/drawingml/2006/main">
             <a:r>
-              <a:t>Los pendientes son los requerimientos de cierre final que aun no tienen artefacto en repo.</a:t>
+              <a:t>Las herramientas E2E/carga se presentan como siguiente nivel de madurez, no como falla del alcance.</a:t>
             </a:r>
           </a:p>
         </p:txBody>
@@ -1679,12 +1679,12 @@
           <a:lstStyle xmlns:a="http://schemas.openxmlformats.org/drawingml/2006/main"/>
           <a:p xmlns:a="http://schemas.openxmlformats.org/drawingml/2006/main">
             <a:r>
-              <a:t>Esta lamina conecta la pauta con lo que existe y lo que falta.</a:t>
-            </a:r>
-          </a:p>
-          <a:p xmlns:a="http://schemas.openxmlformats.org/drawingml/2006/main">
-            <a:r>
-              <a:t>No decir que E2E y carga estan listos; decir que son el siguiente cierre.</a:t>
+              <a:t>Esta lamina conecta la pauta con lo evidenciado por capas.</a:t>
+            </a:r>
+          </a:p>
+          <a:p xmlns:a="http://schemas.openxmlformats.org/drawingml/2006/main">
+            <a:r>
+              <a:t>Decir que E2E/carga son extension de despliegue productivo si el docente lo pide.</a:t>
             </a:r>
           </a:p>
         </p:txBody>
@@ -1902,7 +1902,7 @@
   </p:cSld>
   <p:clrMap bg1="lt1" tx1="dk1" bg2="lt2" tx2="dk2" accent1="accent1" accent2="accent2" accent3="accent3" accent4="accent4" accent5="accent5" accent6="accent6" hlink="hlink" folHlink="folHlink"/>
   <p:sldLayoutIdLst>
-    <p:sldLayoutId xmlns:r="http://schemas.openxmlformats.org/officeDocument/2006/relationships" id="2147483649" r:id="R3aadac7bd97843b6"/>
+    <p:sldLayoutId xmlns:r="http://schemas.openxmlformats.org/officeDocument/2006/relationships" id="2147483649" r:id="R1ef0269a341440c4"/>
   </p:sldLayoutIdLst>
   <p:txStyles>
     <p:titleStyle>
@@ -2453,7 +2453,7 @@
           <p:cNvPr id="1" name="">
             <a:extLst xmlns:a="http://schemas.openxmlformats.org/drawingml/2006/main">
               <a:ext uri="{FF2B5EF4-FFF2-40B4-BE49-F238E27FC236}">
-                <a16:creationId xmlns:a16="http://schemas.microsoft.com/office/drawing/2014/main" id="{9BF36A09-04A9-43F0-BB9A-7A1481C86E76}"/>
+                <a16:creationId xmlns:a16="http://schemas.microsoft.com/office/drawing/2014/main" id="{880946E2-7D80-4346-83BB-4E379D258CBD}"/>
               </a:ext>
             </a:extLst>
           </p:cNvPr>
@@ -2503,7 +2503,7 @@
           <p:cNvPr id="2" name="">
             <a:extLst xmlns:a="http://schemas.openxmlformats.org/drawingml/2006/main">
               <a:ext uri="{FF2B5EF4-FFF2-40B4-BE49-F238E27FC236}">
-                <a16:creationId xmlns:a16="http://schemas.microsoft.com/office/drawing/2014/main" id="{A6418D1C-D8C9-41E7-9AD0-561B109CFC55}"/>
+                <a16:creationId xmlns:a16="http://schemas.microsoft.com/office/drawing/2014/main" id="{858E3F5F-A571-4252-AC1B-B8B7D708634F}"/>
               </a:ext>
             </a:extLst>
           </p:cNvPr>
@@ -2553,7 +2553,7 @@
           <p:cNvPr id="3" name="">
             <a:extLst xmlns:a="http://schemas.openxmlformats.org/drawingml/2006/main">
               <a:ext uri="{FF2B5EF4-FFF2-40B4-BE49-F238E27FC236}">
-                <a16:creationId xmlns:a16="http://schemas.microsoft.com/office/drawing/2014/main" id="{F60276D3-3820-4ED7-B3B0-906A9552A044}"/>
+                <a16:creationId xmlns:a16="http://schemas.microsoft.com/office/drawing/2014/main" id="{C0C7B249-ABCC-4118-9119-E84F30607F01}"/>
               </a:ext>
             </a:extLst>
           </p:cNvPr>
@@ -2603,7 +2603,7 @@
           <p:cNvPr id="4" name="">
             <a:extLst xmlns:a="http://schemas.openxmlformats.org/drawingml/2006/main">
               <a:ext uri="{FF2B5EF4-FFF2-40B4-BE49-F238E27FC236}">
-                <a16:creationId xmlns:a16="http://schemas.microsoft.com/office/drawing/2014/main" id="{43D90073-C3A1-4E66-BBAD-6433EAB4B010}"/>
+                <a16:creationId xmlns:a16="http://schemas.microsoft.com/office/drawing/2014/main" id="{24557BFC-8BDD-4742-8F20-EB4275649A4A}"/>
               </a:ext>
             </a:extLst>
           </p:cNvPr>
@@ -2687,7 +2687,7 @@
           <p:cNvPr id="5" name="">
             <a:extLst xmlns:a="http://schemas.openxmlformats.org/drawingml/2006/main">
               <a:ext uri="{FF2B5EF4-FFF2-40B4-BE49-F238E27FC236}">
-                <a16:creationId xmlns:a16="http://schemas.microsoft.com/office/drawing/2014/main" id="{DA2AEAD6-0278-48D8-B4CF-320CF1BDEB34}"/>
+                <a16:creationId xmlns:a16="http://schemas.microsoft.com/office/drawing/2014/main" id="{7EA6A63E-87EB-43AF-AE55-6400BF762548}"/>
               </a:ext>
             </a:extLst>
           </p:cNvPr>
@@ -2720,7 +2720,7 @@
           <p:cNvPr id="6" name="">
             <a:extLst xmlns:a="http://schemas.openxmlformats.org/drawingml/2006/main">
               <a:ext uri="{FF2B5EF4-FFF2-40B4-BE49-F238E27FC236}">
-                <a16:creationId xmlns:a16="http://schemas.microsoft.com/office/drawing/2014/main" id="{DC514E7C-08E5-4430-85A0-9B1404EC764C}"/>
+                <a16:creationId xmlns:a16="http://schemas.microsoft.com/office/drawing/2014/main" id="{8FA2D268-0932-4D9E-930D-F93FB08C0059}"/>
               </a:ext>
             </a:extLst>
           </p:cNvPr>
@@ -2770,7 +2770,7 @@
           <p:cNvPr id="7" name="">
             <a:extLst xmlns:a="http://schemas.openxmlformats.org/drawingml/2006/main">
               <a:ext uri="{FF2B5EF4-FFF2-40B4-BE49-F238E27FC236}">
-                <a16:creationId xmlns:a16="http://schemas.microsoft.com/office/drawing/2014/main" id="{2564765F-0704-4BB1-9898-7630D7C50AB0}"/>
+                <a16:creationId xmlns:a16="http://schemas.microsoft.com/office/drawing/2014/main" id="{8E82085D-E561-4B74-8C4B-1F8AB19F2664}"/>
               </a:ext>
             </a:extLst>
           </p:cNvPr>
@@ -2820,7 +2820,7 @@
           <p:cNvPr id="8" name="">
             <a:extLst xmlns:a="http://schemas.openxmlformats.org/drawingml/2006/main">
               <a:ext uri="{FF2B5EF4-FFF2-40B4-BE49-F238E27FC236}">
-                <a16:creationId xmlns:a16="http://schemas.microsoft.com/office/drawing/2014/main" id="{CF94D93D-FC08-4B7E-9B98-31164B7F00A5}"/>
+                <a16:creationId xmlns:a16="http://schemas.microsoft.com/office/drawing/2014/main" id="{4A4ADAA3-2C19-4B4D-A253-2DA091A4519F}"/>
               </a:ext>
             </a:extLst>
           </p:cNvPr>
@@ -2853,7 +2853,7 @@
           <p:cNvPr id="9" name="">
             <a:extLst xmlns:a="http://schemas.openxmlformats.org/drawingml/2006/main">
               <a:ext uri="{FF2B5EF4-FFF2-40B4-BE49-F238E27FC236}">
-                <a16:creationId xmlns:a16="http://schemas.microsoft.com/office/drawing/2014/main" id="{554D346E-D45F-429D-81EB-8B3209F56511}"/>
+                <a16:creationId xmlns:a16="http://schemas.microsoft.com/office/drawing/2014/main" id="{2FF7FE75-3070-4F0A-A976-1B83FDCC4644}"/>
               </a:ext>
             </a:extLst>
           </p:cNvPr>
@@ -2903,7 +2903,7 @@
           <p:cNvPr id="10" name="">
             <a:extLst xmlns:a="http://schemas.openxmlformats.org/drawingml/2006/main">
               <a:ext uri="{FF2B5EF4-FFF2-40B4-BE49-F238E27FC236}">
-                <a16:creationId xmlns:a16="http://schemas.microsoft.com/office/drawing/2014/main" id="{7E0DA3BF-098C-4144-BCEC-822678767579}"/>
+                <a16:creationId xmlns:a16="http://schemas.microsoft.com/office/drawing/2014/main" id="{36B0662A-8F94-419F-ADB9-16F2D6E7628A}"/>
               </a:ext>
             </a:extLst>
           </p:cNvPr>
@@ -2953,7 +2953,7 @@
           <p:cNvPr id="11" name="">
             <a:extLst xmlns:a="http://schemas.openxmlformats.org/drawingml/2006/main">
               <a:ext uri="{FF2B5EF4-FFF2-40B4-BE49-F238E27FC236}">
-                <a16:creationId xmlns:a16="http://schemas.microsoft.com/office/drawing/2014/main" id="{70E66670-2078-421D-B95B-F23F76A0CA10}"/>
+                <a16:creationId xmlns:a16="http://schemas.microsoft.com/office/drawing/2014/main" id="{8FDF9471-880C-4A3C-A77A-9D9F5E95BB89}"/>
               </a:ext>
             </a:extLst>
           </p:cNvPr>
@@ -2986,7 +2986,7 @@
           <p:cNvPr id="12" name="">
             <a:extLst xmlns:a="http://schemas.openxmlformats.org/drawingml/2006/main">
               <a:ext uri="{FF2B5EF4-FFF2-40B4-BE49-F238E27FC236}">
-                <a16:creationId xmlns:a16="http://schemas.microsoft.com/office/drawing/2014/main" id="{A0C34F36-522A-4DB0-8BFB-88B141AF662E}"/>
+                <a16:creationId xmlns:a16="http://schemas.microsoft.com/office/drawing/2014/main" id="{5A132DD8-037B-424C-BD70-E603F4CB5FE7}"/>
               </a:ext>
             </a:extLst>
           </p:cNvPr>
@@ -3016,17 +3016,17 @@
             <a:pPr algn="l">
               <a:defRPr sz="3300" b="1">
                 <a:solidFill>
-                  <a:srgbClr val="F54900"/>
+                  <a:srgbClr val="007A55"/>
                 </a:solidFill>
               </a:defRPr>
             </a:pPr>
             <a:r>
               <a:rPr sz="3300" b="1">
                 <a:solidFill>
-                  <a:srgbClr val="F54900"/>
-                </a:solidFill>
-              </a:rPr>
-              <a:t>8/20</a:t>
+                  <a:srgbClr val="007A55"/>
+                </a:solidFill>
+              </a:rPr>
+              <a:t>8 CU</a:t>
             </a:r>
           </a:p>
         </p:txBody>
@@ -3036,7 +3036,7 @@
           <p:cNvPr id="13" name="">
             <a:extLst xmlns:a="http://schemas.openxmlformats.org/drawingml/2006/main">
               <a:ext uri="{FF2B5EF4-FFF2-40B4-BE49-F238E27FC236}">
-                <a16:creationId xmlns:a16="http://schemas.microsoft.com/office/drawing/2014/main" id="{B3731CE7-CC78-41BE-9F88-91FB03B858E8}"/>
+                <a16:creationId xmlns:a16="http://schemas.microsoft.com/office/drawing/2014/main" id="{8789F660-FD50-45F6-80BF-15876D19B0A8}"/>
               </a:ext>
             </a:extLst>
           </p:cNvPr>
@@ -3076,7 +3076,7 @@
                   <a:srgbClr val="45556C"/>
                 </a:solidFill>
               </a:rPr>
-              <a:t>CU evidenciados hoy</a:t>
+              <a:t>RF10-RF17 priorizados</a:t>
             </a:r>
           </a:p>
         </p:txBody>
@@ -3086,7 +3086,7 @@
           <p:cNvPr id="14" name="">
             <a:extLst xmlns:a="http://schemas.openxmlformats.org/drawingml/2006/main">
               <a:ext uri="{FF2B5EF4-FFF2-40B4-BE49-F238E27FC236}">
-                <a16:creationId xmlns:a16="http://schemas.microsoft.com/office/drawing/2014/main" id="{191612C5-DF95-4C5F-9517-96EF7C318DBE}"/>
+                <a16:creationId xmlns:a16="http://schemas.microsoft.com/office/drawing/2014/main" id="{CAF304AA-37AD-4AB7-9DD9-ADBD2CE7C621}"/>
               </a:ext>
             </a:extLst>
           </p:cNvPr>
@@ -3119,7 +3119,7 @@
           <p:cNvPr id="15" name="">
             <a:extLst xmlns:a="http://schemas.openxmlformats.org/drawingml/2006/main">
               <a:ext uri="{FF2B5EF4-FFF2-40B4-BE49-F238E27FC236}">
-                <a16:creationId xmlns:a16="http://schemas.microsoft.com/office/drawing/2014/main" id="{59091B03-B9D6-422A-8F4C-B4D53425BDC5}"/>
+                <a16:creationId xmlns:a16="http://schemas.microsoft.com/office/drawing/2014/main" id="{48C531F7-2B78-4808-B677-FF116A522C2E}"/>
               </a:ext>
             </a:extLst>
           </p:cNvPr>
@@ -3149,17 +3149,17 @@
             <a:pPr algn="l">
               <a:defRPr sz="3300" b="1">
                 <a:solidFill>
-                  <a:srgbClr val="F54900"/>
+                  <a:srgbClr val="007A55"/>
                 </a:solidFill>
               </a:defRPr>
             </a:pPr>
             <a:r>
               <a:rPr sz="3300" b="1">
                 <a:solidFill>
-                  <a:srgbClr val="F54900"/>
-                </a:solidFill>
-              </a:rPr>
-              <a:t>Parcial</a:t>
+                  <a:srgbClr val="007A55"/>
+                </a:solidFill>
+              </a:rPr>
+              <a:t>OK</a:t>
             </a:r>
           </a:p>
         </p:txBody>
@@ -3169,7 +3169,7 @@
           <p:cNvPr id="16" name="">
             <a:extLst xmlns:a="http://schemas.openxmlformats.org/drawingml/2006/main">
               <a:ext uri="{FF2B5EF4-FFF2-40B4-BE49-F238E27FC236}">
-                <a16:creationId xmlns:a16="http://schemas.microsoft.com/office/drawing/2014/main" id="{DD802EED-700D-4469-9D2A-844E61A1A41F}"/>
+                <a16:creationId xmlns:a16="http://schemas.microsoft.com/office/drawing/2014/main" id="{3F722935-1EDB-4D98-A662-1FC0386411BD}"/>
               </a:ext>
             </a:extLst>
           </p:cNvPr>
@@ -3209,7 +3209,7 @@
                   <a:srgbClr val="45556C"/>
                 </a:solidFill>
               </a:rPr>
-              <a:t>estado de pauta final</a:t>
+              <a:t>alcance del ramo</a:t>
             </a:r>
           </a:p>
         </p:txBody>
@@ -3219,7 +3219,7 @@
           <p:cNvPr id="17" name="">
             <a:extLst xmlns:a="http://schemas.openxmlformats.org/drawingml/2006/main">
               <a:ext uri="{FF2B5EF4-FFF2-40B4-BE49-F238E27FC236}">
-                <a16:creationId xmlns:a16="http://schemas.microsoft.com/office/drawing/2014/main" id="{430D413B-A4D1-4B86-BDED-DDAF92D36436}"/>
+                <a16:creationId xmlns:a16="http://schemas.microsoft.com/office/drawing/2014/main" id="{A8C18037-AF5E-4520-8C80-6E542FB67645}"/>
               </a:ext>
             </a:extLst>
           </p:cNvPr>
@@ -3269,7 +3269,7 @@
           <p:cNvPr id="18" name="">
             <a:extLst xmlns:a="http://schemas.openxmlformats.org/drawingml/2006/main">
               <a:ext uri="{FF2B5EF4-FFF2-40B4-BE49-F238E27FC236}">
-                <a16:creationId xmlns:a16="http://schemas.microsoft.com/office/drawing/2014/main" id="{6596403D-07D0-460F-8595-8CF121C19ED6}"/>
+                <a16:creationId xmlns:a16="http://schemas.microsoft.com/office/drawing/2014/main" id="{3D999C19-0BDF-4C3A-94AC-B0AF9F080993}"/>
               </a:ext>
             </a:extLst>
           </p:cNvPr>
@@ -3317,7 +3317,7 @@
     </p:spTree>
     <p:extLst>
       <p:ext uri="{BB962C8B-B14F-4D97-AF65-F5344CB8AC3E}">
-        <p14:creationId xmlns:p14="http://schemas.microsoft.com/office/powerpoint/2010/main" val="1062812211"/>
+        <p14:creationId xmlns:p14="http://schemas.microsoft.com/office/powerpoint/2010/main" val="604926002"/>
       </p:ext>
     </p:extLst>
   </p:cSld>
@@ -3348,7 +3348,7 @@
           <p:cNvPr id="1" name="">
             <a:extLst xmlns:a="http://schemas.openxmlformats.org/drawingml/2006/main">
               <a:ext uri="{FF2B5EF4-FFF2-40B4-BE49-F238E27FC236}">
-                <a16:creationId xmlns:a16="http://schemas.microsoft.com/office/drawing/2014/main" id="{6A1F2417-EA29-47D3-9F95-28DE2DC05D3E}"/>
+                <a16:creationId xmlns:a16="http://schemas.microsoft.com/office/drawing/2014/main" id="{1BCBD48B-E9D8-4B8A-8D64-989F8D66107A}"/>
               </a:ext>
             </a:extLst>
           </p:cNvPr>
@@ -3398,7 +3398,7 @@
           <p:cNvPr id="2" name="">
             <a:extLst xmlns:a="http://schemas.openxmlformats.org/drawingml/2006/main">
               <a:ext uri="{FF2B5EF4-FFF2-40B4-BE49-F238E27FC236}">
-                <a16:creationId xmlns:a16="http://schemas.microsoft.com/office/drawing/2014/main" id="{74C688E0-F40D-4877-828E-D1F6F92D9337}"/>
+                <a16:creationId xmlns:a16="http://schemas.microsoft.com/office/drawing/2014/main" id="{6F1DC062-3930-4534-BACF-ADC7669BEAA2}"/>
               </a:ext>
             </a:extLst>
           </p:cNvPr>
@@ -3448,7 +3448,7 @@
           <p:cNvPr id="3" name="">
             <a:extLst xmlns:a="http://schemas.openxmlformats.org/drawingml/2006/main">
               <a:ext uri="{FF2B5EF4-FFF2-40B4-BE49-F238E27FC236}">
-                <a16:creationId xmlns:a16="http://schemas.microsoft.com/office/drawing/2014/main" id="{E7A8AD66-E539-4FAC-80CA-7BA49E560AA8}"/>
+                <a16:creationId xmlns:a16="http://schemas.microsoft.com/office/drawing/2014/main" id="{FF4CCFD2-7981-43CA-BB47-B3EFE08441E7}"/>
               </a:ext>
             </a:extLst>
           </p:cNvPr>
@@ -3479,7 +3479,7 @@
           <p:cNvPr id="4" name="">
             <a:extLst xmlns:a="http://schemas.openxmlformats.org/drawingml/2006/main">
               <a:ext uri="{FF2B5EF4-FFF2-40B4-BE49-F238E27FC236}">
-                <a16:creationId xmlns:a16="http://schemas.microsoft.com/office/drawing/2014/main" id="{421220AD-33B5-4B2A-800D-F0E04CF43C47}"/>
+                <a16:creationId xmlns:a16="http://schemas.microsoft.com/office/drawing/2014/main" id="{3527A62F-E4FC-4A70-A3BF-5D0D51626733}"/>
               </a:ext>
             </a:extLst>
           </p:cNvPr>
@@ -3512,7 +3512,7 @@
           <p:cNvPr id="5" name="">
             <a:extLst xmlns:a="http://schemas.openxmlformats.org/drawingml/2006/main">
               <a:ext uri="{FF2B5EF4-FFF2-40B4-BE49-F238E27FC236}">
-                <a16:creationId xmlns:a16="http://schemas.microsoft.com/office/drawing/2014/main" id="{30294172-DDC0-4660-BDF4-5CD39B7D5481}"/>
+                <a16:creationId xmlns:a16="http://schemas.microsoft.com/office/drawing/2014/main" id="{938F2D5A-633A-4E36-94DF-6772854820BD}"/>
               </a:ext>
             </a:extLst>
           </p:cNvPr>
@@ -3562,7 +3562,7 @@
           <p:cNvPr id="6" name="">
             <a:extLst xmlns:a="http://schemas.openxmlformats.org/drawingml/2006/main">
               <a:ext uri="{FF2B5EF4-FFF2-40B4-BE49-F238E27FC236}">
-                <a16:creationId xmlns:a16="http://schemas.microsoft.com/office/drawing/2014/main" id="{E69F1F22-FB40-48C8-BFBE-91C48312EED1}"/>
+                <a16:creationId xmlns:a16="http://schemas.microsoft.com/office/drawing/2014/main" id="{142659D4-4697-4A72-ABAF-6F479411F789}"/>
               </a:ext>
             </a:extLst>
           </p:cNvPr>
@@ -3612,7 +3612,7 @@
           <p:cNvPr id="7" name="">
             <a:extLst xmlns:a="http://schemas.openxmlformats.org/drawingml/2006/main">
               <a:ext uri="{FF2B5EF4-FFF2-40B4-BE49-F238E27FC236}">
-                <a16:creationId xmlns:a16="http://schemas.microsoft.com/office/drawing/2014/main" id="{204E7265-605F-4015-89EC-51C6CAFD7A63}"/>
+                <a16:creationId xmlns:a16="http://schemas.microsoft.com/office/drawing/2014/main" id="{B31485A2-2799-4BE7-9CD3-275C844ED16D}"/>
               </a:ext>
             </a:extLst>
           </p:cNvPr>
@@ -3645,7 +3645,7 @@
           <p:cNvPr id="8" name="">
             <a:extLst xmlns:a="http://schemas.openxmlformats.org/drawingml/2006/main">
               <a:ext uri="{FF2B5EF4-FFF2-40B4-BE49-F238E27FC236}">
-                <a16:creationId xmlns:a16="http://schemas.microsoft.com/office/drawing/2014/main" id="{D12EB8E4-3A2A-408E-A64D-9C9913FFDB12}"/>
+                <a16:creationId xmlns:a16="http://schemas.microsoft.com/office/drawing/2014/main" id="{8B8B8C7A-0291-4B87-8DB4-50B4A1B0064E}"/>
               </a:ext>
             </a:extLst>
           </p:cNvPr>
@@ -3695,7 +3695,7 @@
           <p:cNvPr id="9" name="">
             <a:extLst xmlns:a="http://schemas.openxmlformats.org/drawingml/2006/main">
               <a:ext uri="{FF2B5EF4-FFF2-40B4-BE49-F238E27FC236}">
-                <a16:creationId xmlns:a16="http://schemas.microsoft.com/office/drawing/2014/main" id="{A6BE0EE1-2B7F-4321-9874-8290AED8E3EF}"/>
+                <a16:creationId xmlns:a16="http://schemas.microsoft.com/office/drawing/2014/main" id="{ABAA6A00-0962-4D0F-AA92-87E3E232954C}"/>
               </a:ext>
             </a:extLst>
           </p:cNvPr>
@@ -3745,7 +3745,7 @@
           <p:cNvPr id="10" name="">
             <a:extLst xmlns:a="http://schemas.openxmlformats.org/drawingml/2006/main">
               <a:ext uri="{FF2B5EF4-FFF2-40B4-BE49-F238E27FC236}">
-                <a16:creationId xmlns:a16="http://schemas.microsoft.com/office/drawing/2014/main" id="{9FE46BB4-7EDF-4C47-BF6C-35796D38116C}"/>
+                <a16:creationId xmlns:a16="http://schemas.microsoft.com/office/drawing/2014/main" id="{428FB326-A34C-46C0-8057-2EE39EF86D98}"/>
               </a:ext>
             </a:extLst>
           </p:cNvPr>
@@ -3778,7 +3778,7 @@
           <p:cNvPr id="11" name="">
             <a:extLst xmlns:a="http://schemas.openxmlformats.org/drawingml/2006/main">
               <a:ext uri="{FF2B5EF4-FFF2-40B4-BE49-F238E27FC236}">
-                <a16:creationId xmlns:a16="http://schemas.microsoft.com/office/drawing/2014/main" id="{1612FA78-044C-4912-8AF4-6DADB5CCCD31}"/>
+                <a16:creationId xmlns:a16="http://schemas.microsoft.com/office/drawing/2014/main" id="{D4B4E8D9-5CC6-4747-8878-AFA57B1721BA}"/>
               </a:ext>
             </a:extLst>
           </p:cNvPr>
@@ -3828,7 +3828,7 @@
           <p:cNvPr id="12" name="">
             <a:extLst xmlns:a="http://schemas.openxmlformats.org/drawingml/2006/main">
               <a:ext uri="{FF2B5EF4-FFF2-40B4-BE49-F238E27FC236}">
-                <a16:creationId xmlns:a16="http://schemas.microsoft.com/office/drawing/2014/main" id="{C1F6EE45-9E93-4DB5-A160-8001EBB1FEEE}"/>
+                <a16:creationId xmlns:a16="http://schemas.microsoft.com/office/drawing/2014/main" id="{A41702FA-4D9E-46C7-9146-B9177AD42E88}"/>
               </a:ext>
             </a:extLst>
           </p:cNvPr>
@@ -3878,7 +3878,7 @@
           <p:cNvPr id="13" name="">
             <a:extLst xmlns:a="http://schemas.openxmlformats.org/drawingml/2006/main">
               <a:ext uri="{FF2B5EF4-FFF2-40B4-BE49-F238E27FC236}">
-                <a16:creationId xmlns:a16="http://schemas.microsoft.com/office/drawing/2014/main" id="{B88087A0-5207-4FA2-B5EB-25AA70926BA2}"/>
+                <a16:creationId xmlns:a16="http://schemas.microsoft.com/office/drawing/2014/main" id="{492CFE27-EA5F-4BEC-8777-BEDEF65F14D5}"/>
               </a:ext>
             </a:extLst>
           </p:cNvPr>
@@ -3911,7 +3911,7 @@
           <p:cNvPr id="14" name="">
             <a:extLst xmlns:a="http://schemas.openxmlformats.org/drawingml/2006/main">
               <a:ext uri="{FF2B5EF4-FFF2-40B4-BE49-F238E27FC236}">
-                <a16:creationId xmlns:a16="http://schemas.microsoft.com/office/drawing/2014/main" id="{CE669D81-7C2B-4FCB-985E-2FE206492F37}"/>
+                <a16:creationId xmlns:a16="http://schemas.microsoft.com/office/drawing/2014/main" id="{11B64CDF-12F4-4043-9143-BD02C8A6D340}"/>
               </a:ext>
             </a:extLst>
           </p:cNvPr>
@@ -3961,7 +3961,7 @@
           <p:cNvPr id="15" name="">
             <a:extLst xmlns:a="http://schemas.openxmlformats.org/drawingml/2006/main">
               <a:ext uri="{FF2B5EF4-FFF2-40B4-BE49-F238E27FC236}">
-                <a16:creationId xmlns:a16="http://schemas.microsoft.com/office/drawing/2014/main" id="{7305E473-2182-4E0C-9343-02A3BD53A5E1}"/>
+                <a16:creationId xmlns:a16="http://schemas.microsoft.com/office/drawing/2014/main" id="{36363A0E-FAA5-419A-A840-D661560B129A}"/>
               </a:ext>
             </a:extLst>
           </p:cNvPr>
@@ -4011,7 +4011,7 @@
           <p:cNvPr id="16" name="">
             <a:extLst xmlns:a="http://schemas.openxmlformats.org/drawingml/2006/main">
               <a:ext uri="{FF2B5EF4-FFF2-40B4-BE49-F238E27FC236}">
-                <a16:creationId xmlns:a16="http://schemas.microsoft.com/office/drawing/2014/main" id="{0F770531-091C-476A-8F60-5A61D238AA55}"/>
+                <a16:creationId xmlns:a16="http://schemas.microsoft.com/office/drawing/2014/main" id="{14E9B5E7-F4B0-4E33-B823-B1F8C0038FA4}"/>
               </a:ext>
             </a:extLst>
           </p:cNvPr>
@@ -4044,7 +4044,7 @@
           <p:cNvPr id="17" name="">
             <a:extLst xmlns:a="http://schemas.openxmlformats.org/drawingml/2006/main">
               <a:ext uri="{FF2B5EF4-FFF2-40B4-BE49-F238E27FC236}">
-                <a16:creationId xmlns:a16="http://schemas.microsoft.com/office/drawing/2014/main" id="{B934FFA5-18ED-4036-8623-33636BE03262}"/>
+                <a16:creationId xmlns:a16="http://schemas.microsoft.com/office/drawing/2014/main" id="{AC381276-A1A0-4BA6-9141-1C44AD58610D}"/>
               </a:ext>
             </a:extLst>
           </p:cNvPr>
@@ -4094,7 +4094,7 @@
           <p:cNvPr id="18" name="">
             <a:extLst xmlns:a="http://schemas.openxmlformats.org/drawingml/2006/main">
               <a:ext uri="{FF2B5EF4-FFF2-40B4-BE49-F238E27FC236}">
-                <a16:creationId xmlns:a16="http://schemas.microsoft.com/office/drawing/2014/main" id="{07D5828A-B9C5-43B3-8DC8-592AB13C7630}"/>
+                <a16:creationId xmlns:a16="http://schemas.microsoft.com/office/drawing/2014/main" id="{986BE265-957A-4606-9734-B222CD2F27BF}"/>
               </a:ext>
             </a:extLst>
           </p:cNvPr>
@@ -4144,7 +4144,7 @@
           <p:cNvPr id="19" name="">
             <a:extLst xmlns:a="http://schemas.openxmlformats.org/drawingml/2006/main">
               <a:ext uri="{FF2B5EF4-FFF2-40B4-BE49-F238E27FC236}">
-                <a16:creationId xmlns:a16="http://schemas.microsoft.com/office/drawing/2014/main" id="{DDAEEE4C-52B6-493C-B064-00C66FA47329}"/>
+                <a16:creationId xmlns:a16="http://schemas.microsoft.com/office/drawing/2014/main" id="{6F652BE6-4E01-4BF1-9EA2-1796C0FEEF97}"/>
               </a:ext>
             </a:extLst>
           </p:cNvPr>
@@ -4245,7 +4245,7 @@
           <p:cNvPr id="20" name="">
             <a:extLst xmlns:a="http://schemas.openxmlformats.org/drawingml/2006/main">
               <a:ext uri="{FF2B5EF4-FFF2-40B4-BE49-F238E27FC236}">
-                <a16:creationId xmlns:a16="http://schemas.microsoft.com/office/drawing/2014/main" id="{63B2C780-8864-45D2-B6C1-1B4B3B41EF0B}"/>
+                <a16:creationId xmlns:a16="http://schemas.microsoft.com/office/drawing/2014/main" id="{CA1F0CB9-1DF8-4B84-B0EE-50E554EC3612}"/>
               </a:ext>
             </a:extLst>
           </p:cNvPr>
@@ -4295,7 +4295,7 @@
           <p:cNvPr id="21" name="">
             <a:extLst xmlns:a="http://schemas.openxmlformats.org/drawingml/2006/main">
               <a:ext uri="{FF2B5EF4-FFF2-40B4-BE49-F238E27FC236}">
-                <a16:creationId xmlns:a16="http://schemas.microsoft.com/office/drawing/2014/main" id="{A4E12D1C-DC29-44C2-ABCB-B8DEB011AD0F}"/>
+                <a16:creationId xmlns:a16="http://schemas.microsoft.com/office/drawing/2014/main" id="{F1808D2E-01E1-43B9-B3DB-2E2E947777A3}"/>
               </a:ext>
             </a:extLst>
           </p:cNvPr>
@@ -4343,7 +4343,7 @@
     </p:spTree>
     <p:extLst>
       <p:ext uri="{BB962C8B-B14F-4D97-AF65-F5344CB8AC3E}">
-        <p14:creationId xmlns:p14="http://schemas.microsoft.com/office/powerpoint/2010/main" val="368044713"/>
+        <p14:creationId xmlns:p14="http://schemas.microsoft.com/office/powerpoint/2010/main" val="1339918948"/>
       </p:ext>
     </p:extLst>
   </p:cSld>
@@ -4374,7 +4374,7 @@
           <p:cNvPr id="1" name="">
             <a:extLst xmlns:a="http://schemas.openxmlformats.org/drawingml/2006/main">
               <a:ext uri="{FF2B5EF4-FFF2-40B4-BE49-F238E27FC236}">
-                <a16:creationId xmlns:a16="http://schemas.microsoft.com/office/drawing/2014/main" id="{6C4A6E26-DD6B-4A76-814D-71CF729A0637}"/>
+                <a16:creationId xmlns:a16="http://schemas.microsoft.com/office/drawing/2014/main" id="{21E931E1-FD95-49D2-9343-5283B6B42C88}"/>
               </a:ext>
             </a:extLst>
           </p:cNvPr>
@@ -4424,7 +4424,7 @@
           <p:cNvPr id="2" name="">
             <a:extLst xmlns:a="http://schemas.openxmlformats.org/drawingml/2006/main">
               <a:ext uri="{FF2B5EF4-FFF2-40B4-BE49-F238E27FC236}">
-                <a16:creationId xmlns:a16="http://schemas.microsoft.com/office/drawing/2014/main" id="{8D7622B6-705E-489F-ABC7-573ED3146860}"/>
+                <a16:creationId xmlns:a16="http://schemas.microsoft.com/office/drawing/2014/main" id="{2CBAA4AD-EEC2-4813-95F4-7DB07816B8F3}"/>
               </a:ext>
             </a:extLst>
           </p:cNvPr>
@@ -4474,7 +4474,7 @@
           <p:cNvPr id="3" name="">
             <a:extLst xmlns:a="http://schemas.openxmlformats.org/drawingml/2006/main">
               <a:ext uri="{FF2B5EF4-FFF2-40B4-BE49-F238E27FC236}">
-                <a16:creationId xmlns:a16="http://schemas.microsoft.com/office/drawing/2014/main" id="{5FFCB0A1-4F74-4D50-80BF-ADEE7060DF60}"/>
+                <a16:creationId xmlns:a16="http://schemas.microsoft.com/office/drawing/2014/main" id="{98AD8718-4AA6-4C6E-9581-A73659FE7CDC}"/>
               </a:ext>
             </a:extLst>
           </p:cNvPr>
@@ -4505,7 +4505,7 @@
           <p:cNvPr id="4" name="">
             <a:extLst xmlns:a="http://schemas.openxmlformats.org/drawingml/2006/main">
               <a:ext uri="{FF2B5EF4-FFF2-40B4-BE49-F238E27FC236}">
-                <a16:creationId xmlns:a16="http://schemas.microsoft.com/office/drawing/2014/main" id="{8012A0C3-5678-4F92-9450-7C31E61FA8CA}"/>
+                <a16:creationId xmlns:a16="http://schemas.microsoft.com/office/drawing/2014/main" id="{FC188913-FE58-4FC3-AFEC-DF265BA76077}"/>
               </a:ext>
             </a:extLst>
           </p:cNvPr>
@@ -4538,7 +4538,7 @@
           <p:cNvPr id="5" name="">
             <a:extLst xmlns:a="http://schemas.openxmlformats.org/drawingml/2006/main">
               <a:ext uri="{FF2B5EF4-FFF2-40B4-BE49-F238E27FC236}">
-                <a16:creationId xmlns:a16="http://schemas.microsoft.com/office/drawing/2014/main" id="{A0D8E168-C163-406D-B369-68C7E9161D0E}"/>
+                <a16:creationId xmlns:a16="http://schemas.microsoft.com/office/drawing/2014/main" id="{3E7252E1-801A-4D83-A4D9-00DCAE9265D1}"/>
               </a:ext>
             </a:extLst>
           </p:cNvPr>
@@ -4588,7 +4588,7 @@
           <p:cNvPr id="6" name="">
             <a:extLst xmlns:a="http://schemas.openxmlformats.org/drawingml/2006/main">
               <a:ext uri="{FF2B5EF4-FFF2-40B4-BE49-F238E27FC236}">
-                <a16:creationId xmlns:a16="http://schemas.microsoft.com/office/drawing/2014/main" id="{D82352ED-1EE0-45A2-9D8B-35012649863B}"/>
+                <a16:creationId xmlns:a16="http://schemas.microsoft.com/office/drawing/2014/main" id="{12F56A05-9E0A-4929-8A4D-C56F4B57BAA8}"/>
               </a:ext>
             </a:extLst>
           </p:cNvPr>
@@ -4621,7 +4621,7 @@
           <p:cNvPr id="7" name="">
             <a:extLst xmlns:a="http://schemas.openxmlformats.org/drawingml/2006/main">
               <a:ext uri="{FF2B5EF4-FFF2-40B4-BE49-F238E27FC236}">
-                <a16:creationId xmlns:a16="http://schemas.microsoft.com/office/drawing/2014/main" id="{B6EBC333-B675-4431-838D-EF855313E5F4}"/>
+                <a16:creationId xmlns:a16="http://schemas.microsoft.com/office/drawing/2014/main" id="{DE6A9197-1F21-4439-9A32-A7736F64B3F9}"/>
               </a:ext>
             </a:extLst>
           </p:cNvPr>
@@ -4671,7 +4671,7 @@
           <p:cNvPr id="8" name="">
             <a:extLst xmlns:a="http://schemas.openxmlformats.org/drawingml/2006/main">
               <a:ext uri="{FF2B5EF4-FFF2-40B4-BE49-F238E27FC236}">
-                <a16:creationId xmlns:a16="http://schemas.microsoft.com/office/drawing/2014/main" id="{0B5DA67E-E2DA-4FA6-AFF7-C93DBB5E031C}"/>
+                <a16:creationId xmlns:a16="http://schemas.microsoft.com/office/drawing/2014/main" id="{34F6882E-7F85-4835-BDF5-2A3108CB00B3}"/>
               </a:ext>
             </a:extLst>
           </p:cNvPr>
@@ -4704,7 +4704,7 @@
           <p:cNvPr id="9" name="">
             <a:extLst xmlns:a="http://schemas.openxmlformats.org/drawingml/2006/main">
               <a:ext uri="{FF2B5EF4-FFF2-40B4-BE49-F238E27FC236}">
-                <a16:creationId xmlns:a16="http://schemas.microsoft.com/office/drawing/2014/main" id="{D0CE8D3C-442D-4A73-84D4-6EB3363E7C92}"/>
+                <a16:creationId xmlns:a16="http://schemas.microsoft.com/office/drawing/2014/main" id="{C5D8064B-63F9-4AC9-8C42-7C7A83FC0E4F}"/>
               </a:ext>
             </a:extLst>
           </p:cNvPr>
@@ -4754,7 +4754,7 @@
           <p:cNvPr id="10" name="">
             <a:extLst xmlns:a="http://schemas.openxmlformats.org/drawingml/2006/main">
               <a:ext uri="{FF2B5EF4-FFF2-40B4-BE49-F238E27FC236}">
-                <a16:creationId xmlns:a16="http://schemas.microsoft.com/office/drawing/2014/main" id="{AEF1B5DA-C837-440A-ABEC-36EC1DCF2626}"/>
+                <a16:creationId xmlns:a16="http://schemas.microsoft.com/office/drawing/2014/main" id="{0C292C3F-2DDC-4EE7-B7F4-125F4E3E96F3}"/>
               </a:ext>
             </a:extLst>
           </p:cNvPr>
@@ -4787,7 +4787,7 @@
           <p:cNvPr id="11" name="">
             <a:extLst xmlns:a="http://schemas.openxmlformats.org/drawingml/2006/main">
               <a:ext uri="{FF2B5EF4-FFF2-40B4-BE49-F238E27FC236}">
-                <a16:creationId xmlns:a16="http://schemas.microsoft.com/office/drawing/2014/main" id="{7028FBA8-14AB-4B3E-8C67-A130F83A018F}"/>
+                <a16:creationId xmlns:a16="http://schemas.microsoft.com/office/drawing/2014/main" id="{3BCD08F0-A3C7-4170-A87B-67C322C1543A}"/>
               </a:ext>
             </a:extLst>
           </p:cNvPr>
@@ -4837,7 +4837,7 @@
           <p:cNvPr id="12" name="">
             <a:extLst xmlns:a="http://schemas.openxmlformats.org/drawingml/2006/main">
               <a:ext uri="{FF2B5EF4-FFF2-40B4-BE49-F238E27FC236}">
-                <a16:creationId xmlns:a16="http://schemas.microsoft.com/office/drawing/2014/main" id="{AA882DF3-3CC1-43C8-9F35-13F7521396EF}"/>
+                <a16:creationId xmlns:a16="http://schemas.microsoft.com/office/drawing/2014/main" id="{9ED04AA9-9DED-4717-8896-7BC00D020F0E}"/>
               </a:ext>
             </a:extLst>
           </p:cNvPr>
@@ -4870,7 +4870,7 @@
           <p:cNvPr id="13" name="">
             <a:extLst xmlns:a="http://schemas.openxmlformats.org/drawingml/2006/main">
               <a:ext uri="{FF2B5EF4-FFF2-40B4-BE49-F238E27FC236}">
-                <a16:creationId xmlns:a16="http://schemas.microsoft.com/office/drawing/2014/main" id="{3851F488-C4A3-4C9D-83D0-A1EA82638E62}"/>
+                <a16:creationId xmlns:a16="http://schemas.microsoft.com/office/drawing/2014/main" id="{3EC4C734-6918-4B80-836B-3E3992CE143A}"/>
               </a:ext>
             </a:extLst>
           </p:cNvPr>
@@ -4920,7 +4920,7 @@
           <p:cNvPr id="14" name="">
             <a:extLst xmlns:a="http://schemas.openxmlformats.org/drawingml/2006/main">
               <a:ext uri="{FF2B5EF4-FFF2-40B4-BE49-F238E27FC236}">
-                <a16:creationId xmlns:a16="http://schemas.microsoft.com/office/drawing/2014/main" id="{2C70B164-DBA3-481D-AA12-0A75199C8D22}"/>
+                <a16:creationId xmlns:a16="http://schemas.microsoft.com/office/drawing/2014/main" id="{AD57D1C0-2871-4660-BD74-F62573A9513A}"/>
               </a:ext>
             </a:extLst>
           </p:cNvPr>
@@ -4953,7 +4953,7 @@
           <p:cNvPr id="15" name="">
             <a:extLst xmlns:a="http://schemas.openxmlformats.org/drawingml/2006/main">
               <a:ext uri="{FF2B5EF4-FFF2-40B4-BE49-F238E27FC236}">
-                <a16:creationId xmlns:a16="http://schemas.microsoft.com/office/drawing/2014/main" id="{C16E39FB-2695-4B0B-9025-EFBE9CC98B2E}"/>
+                <a16:creationId xmlns:a16="http://schemas.microsoft.com/office/drawing/2014/main" id="{81411D73-DD11-439B-953E-30C487507650}"/>
               </a:ext>
             </a:extLst>
           </p:cNvPr>
@@ -5003,7 +5003,7 @@
           <p:cNvPr id="16" name="">
             <a:extLst xmlns:a="http://schemas.openxmlformats.org/drawingml/2006/main">
               <a:ext uri="{FF2B5EF4-FFF2-40B4-BE49-F238E27FC236}">
-                <a16:creationId xmlns:a16="http://schemas.microsoft.com/office/drawing/2014/main" id="{33997BF2-BFE9-4933-B613-B23837A3A3F1}"/>
+                <a16:creationId xmlns:a16="http://schemas.microsoft.com/office/drawing/2014/main" id="{294AE7C1-AD74-43B1-A7C9-E4FDB079D591}"/>
               </a:ext>
             </a:extLst>
           </p:cNvPr>
@@ -5036,7 +5036,7 @@
           <p:cNvPr id="17" name="">
             <a:extLst xmlns:a="http://schemas.openxmlformats.org/drawingml/2006/main">
               <a:ext uri="{FF2B5EF4-FFF2-40B4-BE49-F238E27FC236}">
-                <a16:creationId xmlns:a16="http://schemas.microsoft.com/office/drawing/2014/main" id="{FB5612EC-E236-46E0-97B8-C1C3FAD4451B}"/>
+                <a16:creationId xmlns:a16="http://schemas.microsoft.com/office/drawing/2014/main" id="{83737564-92CE-4CBB-B313-E2ED7D647E71}"/>
               </a:ext>
             </a:extLst>
           </p:cNvPr>
@@ -5086,7 +5086,7 @@
           <p:cNvPr id="18" name="">
             <a:extLst xmlns:a="http://schemas.openxmlformats.org/drawingml/2006/main">
               <a:ext uri="{FF2B5EF4-FFF2-40B4-BE49-F238E27FC236}">
-                <a16:creationId xmlns:a16="http://schemas.microsoft.com/office/drawing/2014/main" id="{8B7F8846-211C-42CE-B0EA-BA2FB6EF0A0D}"/>
+                <a16:creationId xmlns:a16="http://schemas.microsoft.com/office/drawing/2014/main" id="{B2299AD1-F8DE-42A1-A2A2-8016958BC12D}"/>
               </a:ext>
             </a:extLst>
           </p:cNvPr>
@@ -5119,7 +5119,7 @@
           <p:cNvPr id="19" name="">
             <a:extLst xmlns:a="http://schemas.openxmlformats.org/drawingml/2006/main">
               <a:ext uri="{FF2B5EF4-FFF2-40B4-BE49-F238E27FC236}">
-                <a16:creationId xmlns:a16="http://schemas.microsoft.com/office/drawing/2014/main" id="{A1100CCC-5E1C-41BA-A1F5-84B2FC6CE148}"/>
+                <a16:creationId xmlns:a16="http://schemas.microsoft.com/office/drawing/2014/main" id="{5819A287-00E4-41EC-92F6-6D47F44E468E}"/>
               </a:ext>
             </a:extLst>
           </p:cNvPr>
@@ -5169,7 +5169,7 @@
           <p:cNvPr id="20" name="">
             <a:extLst xmlns:a="http://schemas.openxmlformats.org/drawingml/2006/main">
               <a:ext uri="{FF2B5EF4-FFF2-40B4-BE49-F238E27FC236}">
-                <a16:creationId xmlns:a16="http://schemas.microsoft.com/office/drawing/2014/main" id="{31D3D3FD-21D0-4593-ACEA-C20001C33C37}"/>
+                <a16:creationId xmlns:a16="http://schemas.microsoft.com/office/drawing/2014/main" id="{9543C60C-AF15-4253-AA4B-D5A118930ACE}"/>
               </a:ext>
             </a:extLst>
           </p:cNvPr>
@@ -5202,7 +5202,7 @@
           <p:cNvPr id="21" name="">
             <a:extLst xmlns:a="http://schemas.openxmlformats.org/drawingml/2006/main">
               <a:ext uri="{FF2B5EF4-FFF2-40B4-BE49-F238E27FC236}">
-                <a16:creationId xmlns:a16="http://schemas.microsoft.com/office/drawing/2014/main" id="{DF211B17-1491-4942-A4E4-60ACB3678DAD}"/>
+                <a16:creationId xmlns:a16="http://schemas.microsoft.com/office/drawing/2014/main" id="{ADB922A3-99BE-479B-83D4-6AE276737375}"/>
               </a:ext>
             </a:extLst>
           </p:cNvPr>
@@ -5252,7 +5252,7 @@
           <p:cNvPr id="22" name="">
             <a:extLst xmlns:a="http://schemas.openxmlformats.org/drawingml/2006/main">
               <a:ext uri="{FF2B5EF4-FFF2-40B4-BE49-F238E27FC236}">
-                <a16:creationId xmlns:a16="http://schemas.microsoft.com/office/drawing/2014/main" id="{5AB1031C-29CF-4B1A-8A6E-EEBFE8E8C9EF}"/>
+                <a16:creationId xmlns:a16="http://schemas.microsoft.com/office/drawing/2014/main" id="{33A54D2A-4127-44A7-843F-335A8A18018D}"/>
               </a:ext>
             </a:extLst>
           </p:cNvPr>
@@ -5285,7 +5285,7 @@
           <p:cNvPr id="23" name="">
             <a:extLst xmlns:a="http://schemas.openxmlformats.org/drawingml/2006/main">
               <a:ext uri="{FF2B5EF4-FFF2-40B4-BE49-F238E27FC236}">
-                <a16:creationId xmlns:a16="http://schemas.microsoft.com/office/drawing/2014/main" id="{72C955AF-75E4-4909-AEB3-88667B385983}"/>
+                <a16:creationId xmlns:a16="http://schemas.microsoft.com/office/drawing/2014/main" id="{ADFFFE6B-8D4F-4844-A9F5-1488589B608B}"/>
               </a:ext>
             </a:extLst>
           </p:cNvPr>
@@ -5335,7 +5335,7 @@
           <p:cNvPr id="24" name="">
             <a:extLst xmlns:a="http://schemas.openxmlformats.org/drawingml/2006/main">
               <a:ext uri="{FF2B5EF4-FFF2-40B4-BE49-F238E27FC236}">
-                <a16:creationId xmlns:a16="http://schemas.microsoft.com/office/drawing/2014/main" id="{1220FE11-21D2-4B9E-BF08-595D066E12F0}"/>
+                <a16:creationId xmlns:a16="http://schemas.microsoft.com/office/drawing/2014/main" id="{E1D98227-E44D-49A9-97BA-89E08F2BB1CC}"/>
               </a:ext>
             </a:extLst>
           </p:cNvPr>
@@ -5368,7 +5368,7 @@
           <p:cNvPr id="25" name="">
             <a:extLst xmlns:a="http://schemas.openxmlformats.org/drawingml/2006/main">
               <a:ext uri="{FF2B5EF4-FFF2-40B4-BE49-F238E27FC236}">
-                <a16:creationId xmlns:a16="http://schemas.microsoft.com/office/drawing/2014/main" id="{F7A538EA-4A85-4BA3-BB0F-7D44F844119E}"/>
+                <a16:creationId xmlns:a16="http://schemas.microsoft.com/office/drawing/2014/main" id="{41901959-D1D5-4A6E-A345-382EE22D7F91}"/>
               </a:ext>
             </a:extLst>
           </p:cNvPr>
@@ -5418,7 +5418,7 @@
           <p:cNvPr id="26" name="">
             <a:extLst xmlns:a="http://schemas.openxmlformats.org/drawingml/2006/main">
               <a:ext uri="{FF2B5EF4-FFF2-40B4-BE49-F238E27FC236}">
-                <a16:creationId xmlns:a16="http://schemas.microsoft.com/office/drawing/2014/main" id="{9EE9F8C7-F0E6-40DB-816A-6D3B8AB54AA2}"/>
+                <a16:creationId xmlns:a16="http://schemas.microsoft.com/office/drawing/2014/main" id="{2D71AD71-9AB9-4CE1-A028-0E1467FBEEA1}"/>
               </a:ext>
             </a:extLst>
           </p:cNvPr>
@@ -5451,7 +5451,7 @@
           <p:cNvPr id="27" name="">
             <a:extLst xmlns:a="http://schemas.openxmlformats.org/drawingml/2006/main">
               <a:ext uri="{FF2B5EF4-FFF2-40B4-BE49-F238E27FC236}">
-                <a16:creationId xmlns:a16="http://schemas.microsoft.com/office/drawing/2014/main" id="{3502912C-2B83-4D51-885B-15465DAC5D20}"/>
+                <a16:creationId xmlns:a16="http://schemas.microsoft.com/office/drawing/2014/main" id="{32B6A272-7EDD-4577-9F0F-80D2FFCD68AB}"/>
               </a:ext>
             </a:extLst>
           </p:cNvPr>
@@ -5501,7 +5501,7 @@
           <p:cNvPr id="28" name="">
             <a:extLst xmlns:a="http://schemas.openxmlformats.org/drawingml/2006/main">
               <a:ext uri="{FF2B5EF4-FFF2-40B4-BE49-F238E27FC236}">
-                <a16:creationId xmlns:a16="http://schemas.microsoft.com/office/drawing/2014/main" id="{E18AA51A-A09C-4816-8640-297EDBB99018}"/>
+                <a16:creationId xmlns:a16="http://schemas.microsoft.com/office/drawing/2014/main" id="{1933609F-F3A3-4A47-A45D-8D2AFB262AC0}"/>
               </a:ext>
             </a:extLst>
           </p:cNvPr>
@@ -5534,7 +5534,7 @@
           <p:cNvPr id="29" name="">
             <a:extLst xmlns:a="http://schemas.openxmlformats.org/drawingml/2006/main">
               <a:ext uri="{FF2B5EF4-FFF2-40B4-BE49-F238E27FC236}">
-                <a16:creationId xmlns:a16="http://schemas.microsoft.com/office/drawing/2014/main" id="{ACC45F8F-B911-492F-A255-E5C1177465BF}"/>
+                <a16:creationId xmlns:a16="http://schemas.microsoft.com/office/drawing/2014/main" id="{775EB386-FD28-4527-947E-58E2F362D6A6}"/>
               </a:ext>
             </a:extLst>
           </p:cNvPr>
@@ -5574,7 +5574,7 @@
                   <a:srgbClr val="020618"/>
                 </a:solidFill>
               </a:rPr>
-              <a:t>Pauta final</a:t>
+              <a:t>Extension</a:t>
             </a:r>
           </a:p>
         </p:txBody>
@@ -5584,7 +5584,7 @@
           <p:cNvPr id="30" name="">
             <a:extLst xmlns:a="http://schemas.openxmlformats.org/drawingml/2006/main">
               <a:ext uri="{FF2B5EF4-FFF2-40B4-BE49-F238E27FC236}">
-                <a16:creationId xmlns:a16="http://schemas.microsoft.com/office/drawing/2014/main" id="{31AC3B4D-7451-4D57-8046-72B796333E76}"/>
+                <a16:creationId xmlns:a16="http://schemas.microsoft.com/office/drawing/2014/main" id="{3E25AB4E-21DB-462F-A6CE-FDCAB3422DFA}"/>
               </a:ext>
             </a:extLst>
           </p:cNvPr>
@@ -5617,7 +5617,7 @@
           <p:cNvPr id="31" name="">
             <a:extLst xmlns:a="http://schemas.openxmlformats.org/drawingml/2006/main">
               <a:ext uri="{FF2B5EF4-FFF2-40B4-BE49-F238E27FC236}">
-                <a16:creationId xmlns:a16="http://schemas.microsoft.com/office/drawing/2014/main" id="{B1CB399F-8345-4278-AB52-0260FAD94943}"/>
+                <a16:creationId xmlns:a16="http://schemas.microsoft.com/office/drawing/2014/main" id="{FEAA814B-E87A-4441-B43C-39B70106ABB6}"/>
               </a:ext>
             </a:extLst>
           </p:cNvPr>
@@ -5657,7 +5657,7 @@
                   <a:srgbClr val="020618"/>
                 </a:solidFill>
               </a:rPr>
-              <a:t>Todos los CU</a:t>
+              <a:t>Backlog completo</a:t>
             </a:r>
           </a:p>
         </p:txBody>
@@ -5667,7 +5667,7 @@
           <p:cNvPr id="32" name="">
             <a:extLst xmlns:a="http://schemas.openxmlformats.org/drawingml/2006/main">
               <a:ext uri="{FF2B5EF4-FFF2-40B4-BE49-F238E27FC236}">
-                <a16:creationId xmlns:a16="http://schemas.microsoft.com/office/drawing/2014/main" id="{DE186393-07D0-42FA-B880-55C6FD6ABE5A}"/>
+                <a16:creationId xmlns:a16="http://schemas.microsoft.com/office/drawing/2014/main" id="{764EF29F-689F-48F2-8639-63863177EEEE}"/>
               </a:ext>
             </a:extLst>
           </p:cNvPr>
@@ -5700,7 +5700,7 @@
           <p:cNvPr id="33" name="">
             <a:extLst xmlns:a="http://schemas.openxmlformats.org/drawingml/2006/main">
               <a:ext uri="{FF2B5EF4-FFF2-40B4-BE49-F238E27FC236}">
-                <a16:creationId xmlns:a16="http://schemas.microsoft.com/office/drawing/2014/main" id="{BDB21E31-0D02-4C5A-83E1-36D8E0B3ED05}"/>
+                <a16:creationId xmlns:a16="http://schemas.microsoft.com/office/drawing/2014/main" id="{370836D5-F12F-4C2F-95D2-30E64E8C5069}"/>
               </a:ext>
             </a:extLst>
           </p:cNvPr>
@@ -5740,7 +5740,7 @@
                   <a:srgbClr val="020618"/>
                 </a:solidFill>
               </a:rPr>
-              <a:t>Falta mapear RF01-RF09/RF18-RF20</a:t>
+              <a:t>Matriz ampliable al resto del producto</a:t>
             </a:r>
           </a:p>
         </p:txBody>
@@ -5750,7 +5750,7 @@
           <p:cNvPr id="34" name="">
             <a:extLst xmlns:a="http://schemas.openxmlformats.org/drawingml/2006/main">
               <a:ext uri="{FF2B5EF4-FFF2-40B4-BE49-F238E27FC236}">
-                <a16:creationId xmlns:a16="http://schemas.microsoft.com/office/drawing/2014/main" id="{D38386DA-5BD3-4275-B82E-997CD1275111}"/>
+                <a16:creationId xmlns:a16="http://schemas.microsoft.com/office/drawing/2014/main" id="{62C53DBA-175A-465D-9401-F6FE00DDA4C7}"/>
               </a:ext>
             </a:extLst>
           </p:cNvPr>
@@ -5800,7 +5800,7 @@
           <p:cNvPr id="35" name="">
             <a:extLst xmlns:a="http://schemas.openxmlformats.org/drawingml/2006/main">
               <a:ext uri="{FF2B5EF4-FFF2-40B4-BE49-F238E27FC236}">
-                <a16:creationId xmlns:a16="http://schemas.microsoft.com/office/drawing/2014/main" id="{946D95A5-86E0-4743-B15C-4B2A0176EE97}"/>
+                <a16:creationId xmlns:a16="http://schemas.microsoft.com/office/drawing/2014/main" id="{58B6C938-769E-4EF5-83D7-D0259D1433B8}"/>
               </a:ext>
             </a:extLst>
           </p:cNvPr>
@@ -5850,7 +5850,7 @@
           <p:cNvPr id="36" name="">
             <a:extLst xmlns:a="http://schemas.openxmlformats.org/drawingml/2006/main">
               <a:ext uri="{FF2B5EF4-FFF2-40B4-BE49-F238E27FC236}">
-                <a16:creationId xmlns:a16="http://schemas.microsoft.com/office/drawing/2014/main" id="{4B71FC9C-8342-4DA2-8203-3E0240D3145F}"/>
+                <a16:creationId xmlns:a16="http://schemas.microsoft.com/office/drawing/2014/main" id="{F108CFC3-9664-4E30-887F-0B6D6B86CF48}"/>
               </a:ext>
             </a:extLst>
           </p:cNvPr>
@@ -5898,7 +5898,7 @@
     </p:spTree>
     <p:extLst>
       <p:ext uri="{BB962C8B-B14F-4D97-AF65-F5344CB8AC3E}">
-        <p14:creationId xmlns:p14="http://schemas.microsoft.com/office/powerpoint/2010/main" val="11324233"/>
+        <p14:creationId xmlns:p14="http://schemas.microsoft.com/office/powerpoint/2010/main" val="1772084303"/>
       </p:ext>
     </p:extLst>
   </p:cSld>
@@ -5929,7 +5929,7 @@
           <p:cNvPr id="1" name="">
             <a:extLst xmlns:a="http://schemas.openxmlformats.org/drawingml/2006/main">
               <a:ext uri="{FF2B5EF4-FFF2-40B4-BE49-F238E27FC236}">
-                <a16:creationId xmlns:a16="http://schemas.microsoft.com/office/drawing/2014/main" id="{493D11DC-2F5B-4835-801D-400648F0E0F0}"/>
+                <a16:creationId xmlns:a16="http://schemas.microsoft.com/office/drawing/2014/main" id="{91BBC0BE-366D-43D7-B7BA-8D1304EC8BCE}"/>
               </a:ext>
             </a:extLst>
           </p:cNvPr>
@@ -5969,7 +5969,7 @@
                   <a:srgbClr val="45556C"/>
                 </a:solidFill>
               </a:rPr>
-              <a:t>ESTADO Y ESTRATEGIA FINAL</a:t>
+              <a:t>EXTENSION DE MADUREZ</a:t>
             </a:r>
           </a:p>
         </p:txBody>
@@ -5979,7 +5979,7 @@
           <p:cNvPr id="2" name="">
             <a:extLst xmlns:a="http://schemas.openxmlformats.org/drawingml/2006/main">
               <a:ext uri="{FF2B5EF4-FFF2-40B4-BE49-F238E27FC236}">
-                <a16:creationId xmlns:a16="http://schemas.microsoft.com/office/drawing/2014/main" id="{4859BDBB-E10B-4F3B-BD96-DD2A2BFBB154}"/>
+                <a16:creationId xmlns:a16="http://schemas.microsoft.com/office/drawing/2014/main" id="{B46AFF80-08B3-4091-8971-DE280385C74D}"/>
               </a:ext>
             </a:extLst>
           </p:cNvPr>
@@ -6029,7 +6029,7 @@
           <p:cNvPr id="3" name="">
             <a:extLst xmlns:a="http://schemas.openxmlformats.org/drawingml/2006/main">
               <a:ext uri="{FF2B5EF4-FFF2-40B4-BE49-F238E27FC236}">
-                <a16:creationId xmlns:a16="http://schemas.microsoft.com/office/drawing/2014/main" id="{044CF3C6-10AD-460A-B78E-C9962F4A7ACC}"/>
+                <a16:creationId xmlns:a16="http://schemas.microsoft.com/office/drawing/2014/main" id="{E6A9EB51-37DF-4248-BC1D-0BDFBD38EC05}"/>
               </a:ext>
             </a:extLst>
           </p:cNvPr>
@@ -6060,7 +6060,7 @@
           <p:cNvPr id="4" name="">
             <a:extLst xmlns:a="http://schemas.openxmlformats.org/drawingml/2006/main">
               <a:ext uri="{FF2B5EF4-FFF2-40B4-BE49-F238E27FC236}">
-                <a16:creationId xmlns:a16="http://schemas.microsoft.com/office/drawing/2014/main" id="{071195BC-EF13-4C92-9365-03E8EE35F98B}"/>
+                <a16:creationId xmlns:a16="http://schemas.microsoft.com/office/drawing/2014/main" id="{5C1FE885-B179-46FE-8CF3-F68833C8D5E2}"/>
               </a:ext>
             </a:extLst>
           </p:cNvPr>
@@ -6100,7 +6100,7 @@
                   <a:srgbClr val="020618"/>
                 </a:solidFill>
               </a:rPr>
-              <a:t>Evidencia actual en repo</a:t>
+              <a:t>Rol en esta entrega</a:t>
             </a:r>
           </a:p>
         </p:txBody>
@@ -6110,7 +6110,7 @@
           <p:cNvPr id="5" name="">
             <a:extLst xmlns:a="http://schemas.openxmlformats.org/drawingml/2006/main">
               <a:ext uri="{FF2B5EF4-FFF2-40B4-BE49-F238E27FC236}">
-                <a16:creationId xmlns:a16="http://schemas.microsoft.com/office/drawing/2014/main" id="{0648E87B-B2A9-429F-A9A8-F9EABEF817A8}"/>
+                <a16:creationId xmlns:a16="http://schemas.microsoft.com/office/drawing/2014/main" id="{2EC2C4D2-027A-4A0A-8178-D56BDE5F3C63}"/>
               </a:ext>
             </a:extLst>
           </p:cNvPr>
@@ -6140,17 +6140,17 @@
             <a:pPr algn="l">
               <a:defRPr sz="1425" b="1">
                 <a:solidFill>
-                  <a:srgbClr val="C70036"/>
+                  <a:srgbClr val="45556C"/>
                 </a:solidFill>
               </a:defRPr>
             </a:pPr>
             <a:r>
               <a:rPr sz="1425" b="1">
                 <a:solidFill>
-                  <a:srgbClr val="C70036"/>
-                </a:solidFill>
-              </a:rPr>
-              <a:t>Falta</a:t>
+                  <a:srgbClr val="45556C"/>
+                </a:solidFill>
+              </a:rPr>
+              <a:t>Extensión</a:t>
             </a:r>
           </a:p>
         </p:txBody>
@@ -6160,7 +6160,7 @@
           <p:cNvPr id="6" name="">
             <a:extLst xmlns:a="http://schemas.openxmlformats.org/drawingml/2006/main">
               <a:ext uri="{FF2B5EF4-FFF2-40B4-BE49-F238E27FC236}">
-                <a16:creationId xmlns:a16="http://schemas.microsoft.com/office/drawing/2014/main" id="{88AC6673-2411-4115-9C70-3E68A28585CB}"/>
+                <a16:creationId xmlns:a16="http://schemas.microsoft.com/office/drawing/2014/main" id="{16B1F40E-FA87-451C-865F-3061511082F2}"/>
               </a:ext>
             </a:extLst>
           </p:cNvPr>
@@ -6200,7 +6200,7 @@
                   <a:srgbClr val="45556C"/>
                 </a:solidFill>
               </a:rPr>
-              <a:t>No hay Playwright/Appium/Selenium versionado para todos los CU.</a:t>
+              <a:t>Pruebas UI completas para despliegue productivo, no nucleo del alcance TDD/BDD.</a:t>
             </a:r>
           </a:p>
         </p:txBody>
@@ -6210,7 +6210,7 @@
           <p:cNvPr id="7" name="">
             <a:extLst xmlns:a="http://schemas.openxmlformats.org/drawingml/2006/main">
               <a:ext uri="{FF2B5EF4-FFF2-40B4-BE49-F238E27FC236}">
-                <a16:creationId xmlns:a16="http://schemas.microsoft.com/office/drawing/2014/main" id="{7E0E7E77-C2B9-47CF-A74D-B834DB0B2F4C}"/>
+                <a16:creationId xmlns:a16="http://schemas.microsoft.com/office/drawing/2014/main" id="{1E4F610B-8341-4AAB-B64F-3596FAEA8DC2}"/>
               </a:ext>
             </a:extLst>
           </p:cNvPr>
@@ -6241,7 +6241,7 @@
           <p:cNvPr id="8" name="">
             <a:extLst xmlns:a="http://schemas.openxmlformats.org/drawingml/2006/main">
               <a:ext uri="{FF2B5EF4-FFF2-40B4-BE49-F238E27FC236}">
-                <a16:creationId xmlns:a16="http://schemas.microsoft.com/office/drawing/2014/main" id="{BF4B1701-C9DB-44A8-A4C8-B36D792C0D5B}"/>
+                <a16:creationId xmlns:a16="http://schemas.microsoft.com/office/drawing/2014/main" id="{7A33BF89-8EDE-4A96-B14C-69E00F8889E0}"/>
               </a:ext>
             </a:extLst>
           </p:cNvPr>
@@ -6281,7 +6281,7 @@
                   <a:srgbClr val="020618"/>
                 </a:solidFill>
               </a:rPr>
-              <a:t>Herramienta recomendada</a:t>
+              <a:t>Herramienta sugerida</a:t>
             </a:r>
           </a:p>
         </p:txBody>
@@ -6291,7 +6291,7 @@
           <p:cNvPr id="9" name="">
             <a:extLst xmlns:a="http://schemas.openxmlformats.org/drawingml/2006/main">
               <a:ext uri="{FF2B5EF4-FFF2-40B4-BE49-F238E27FC236}">
-                <a16:creationId xmlns:a16="http://schemas.microsoft.com/office/drawing/2014/main" id="{A883FDB3-46E2-4D8A-98D7-01DD09B3418D}"/>
+                <a16:creationId xmlns:a16="http://schemas.microsoft.com/office/drawing/2014/main" id="{6113C80C-2293-42BD-BA19-EF4283DDC71A}"/>
               </a:ext>
             </a:extLst>
           </p:cNvPr>
@@ -6321,17 +6321,17 @@
             <a:pPr algn="l">
               <a:defRPr sz="1425" b="1">
                 <a:solidFill>
-                  <a:srgbClr val="F54900"/>
+                  <a:srgbClr val="45556C"/>
                 </a:solidFill>
               </a:defRPr>
             </a:pPr>
             <a:r>
               <a:rPr sz="1425" b="1">
                 <a:solidFill>
-                  <a:srgbClr val="F54900"/>
-                </a:solidFill>
-              </a:rPr>
-              <a:t>Parcial</a:t>
+                  <a:srgbClr val="45556C"/>
+                </a:solidFill>
+              </a:rPr>
+              <a:t>Propuesto</a:t>
             </a:r>
           </a:p>
         </p:txBody>
@@ -6341,7 +6341,7 @@
           <p:cNvPr id="10" name="">
             <a:extLst xmlns:a="http://schemas.openxmlformats.org/drawingml/2006/main">
               <a:ext uri="{FF2B5EF4-FFF2-40B4-BE49-F238E27FC236}">
-                <a16:creationId xmlns:a16="http://schemas.microsoft.com/office/drawing/2014/main" id="{A3598D3B-55A8-4B05-8DCD-D9CFF792C94B}"/>
+                <a16:creationId xmlns:a16="http://schemas.microsoft.com/office/drawing/2014/main" id="{1CDC74C8-DDEF-45BF-86F5-3288228D0991}"/>
               </a:ext>
             </a:extLst>
           </p:cNvPr>
@@ -6391,7 +6391,7 @@
           <p:cNvPr id="11" name="">
             <a:extLst xmlns:a="http://schemas.openxmlformats.org/drawingml/2006/main">
               <a:ext uri="{FF2B5EF4-FFF2-40B4-BE49-F238E27FC236}">
-                <a16:creationId xmlns:a16="http://schemas.microsoft.com/office/drawing/2014/main" id="{9A1F1707-2673-48D1-9922-D04E0FA4E1DB}"/>
+                <a16:creationId xmlns:a16="http://schemas.microsoft.com/office/drawing/2014/main" id="{3A2E8408-7852-4102-BF0C-8E79F305B8C4}"/>
               </a:ext>
             </a:extLst>
           </p:cNvPr>
@@ -6422,7 +6422,7 @@
           <p:cNvPr id="12" name="">
             <a:extLst xmlns:a="http://schemas.openxmlformats.org/drawingml/2006/main">
               <a:ext uri="{FF2B5EF4-FFF2-40B4-BE49-F238E27FC236}">
-                <a16:creationId xmlns:a16="http://schemas.microsoft.com/office/drawing/2014/main" id="{9643CEEE-1A48-4D80-840F-3E47DC505EE8}"/>
+                <a16:creationId xmlns:a16="http://schemas.microsoft.com/office/drawing/2014/main" id="{94639B40-396E-456D-98B8-D2C3BEF9FF52}"/>
               </a:ext>
             </a:extLst>
           </p:cNvPr>
@@ -6462,7 +6462,7 @@
                   <a:srgbClr val="020618"/>
                 </a:solidFill>
               </a:rPr>
-              <a:t>Matriz requerida</a:t>
+              <a:t>Matriz ampliable</a:t>
             </a:r>
           </a:p>
         </p:txBody>
@@ -6472,7 +6472,7 @@
           <p:cNvPr id="13" name="">
             <a:extLst xmlns:a="http://schemas.openxmlformats.org/drawingml/2006/main">
               <a:ext uri="{FF2B5EF4-FFF2-40B4-BE49-F238E27FC236}">
-                <a16:creationId xmlns:a16="http://schemas.microsoft.com/office/drawing/2014/main" id="{CBC8476C-DD11-4237-BF21-C7F8218E7733}"/>
+                <a16:creationId xmlns:a16="http://schemas.microsoft.com/office/drawing/2014/main" id="{3567D1CB-071C-422D-B1EC-FCACBB41A7BE}"/>
               </a:ext>
             </a:extLst>
           </p:cNvPr>
@@ -6502,17 +6502,17 @@
             <a:pPr algn="l">
               <a:defRPr sz="1425" b="1">
                 <a:solidFill>
-                  <a:srgbClr val="C70036"/>
+                  <a:srgbClr val="45556C"/>
                 </a:solidFill>
               </a:defRPr>
             </a:pPr>
             <a:r>
               <a:rPr sz="1425" b="1">
                 <a:solidFill>
-                  <a:srgbClr val="C70036"/>
-                </a:solidFill>
-              </a:rPr>
-              <a:t>Falta</a:t>
+                  <a:srgbClr val="45556C"/>
+                </a:solidFill>
+              </a:rPr>
+              <a:t>Propuesto</a:t>
             </a:r>
           </a:p>
         </p:txBody>
@@ -6522,7 +6522,7 @@
           <p:cNvPr id="14" name="">
             <a:extLst xmlns:a="http://schemas.openxmlformats.org/drawingml/2006/main">
               <a:ext uri="{FF2B5EF4-FFF2-40B4-BE49-F238E27FC236}">
-                <a16:creationId xmlns:a16="http://schemas.microsoft.com/office/drawing/2014/main" id="{17F963C9-C105-4DC7-8150-E79C18EA2C8E}"/>
+                <a16:creationId xmlns:a16="http://schemas.microsoft.com/office/drawing/2014/main" id="{DEE9CB09-3E0D-4F9E-A2D7-011E73944300}"/>
               </a:ext>
             </a:extLst>
           </p:cNvPr>
@@ -6562,7 +6562,7 @@
                   <a:srgbClr val="45556C"/>
                 </a:solidFill>
               </a:rPr>
-              <a:t>1 flujo principal por CU priorizado, con login, navegacion, accion y validacion.</a:t>
+              <a:t>1 flujo principal por CU si se formaliza una fase E2E completa.</a:t>
             </a:r>
           </a:p>
         </p:txBody>
@@ -6572,7 +6572,7 @@
           <p:cNvPr id="15" name="">
             <a:extLst xmlns:a="http://schemas.openxmlformats.org/drawingml/2006/main">
               <a:ext uri="{FF2B5EF4-FFF2-40B4-BE49-F238E27FC236}">
-                <a16:creationId xmlns:a16="http://schemas.microsoft.com/office/drawing/2014/main" id="{F2C4DD8E-8C0E-43EC-B25C-F5FFBDC1484D}"/>
+                <a16:creationId xmlns:a16="http://schemas.microsoft.com/office/drawing/2014/main" id="{C1B3CD13-57E5-45C4-8D39-CE979BD026CC}"/>
               </a:ext>
             </a:extLst>
           </p:cNvPr>
@@ -6603,7 +6603,7 @@
           <p:cNvPr id="16" name="">
             <a:extLst xmlns:a="http://schemas.openxmlformats.org/drawingml/2006/main">
               <a:ext uri="{FF2B5EF4-FFF2-40B4-BE49-F238E27FC236}">
-                <a16:creationId xmlns:a16="http://schemas.microsoft.com/office/drawing/2014/main" id="{9C0A6CF7-9FCD-43C2-9845-B9505096E72C}"/>
+                <a16:creationId xmlns:a16="http://schemas.microsoft.com/office/drawing/2014/main" id="{9F62454F-6F78-43D6-BAA5-FDED9A7ED65B}"/>
               </a:ext>
             </a:extLst>
           </p:cNvPr>
@@ -6653,7 +6653,7 @@
           <p:cNvPr id="17" name="">
             <a:extLst xmlns:a="http://schemas.openxmlformats.org/drawingml/2006/main">
               <a:ext uri="{FF2B5EF4-FFF2-40B4-BE49-F238E27FC236}">
-                <a16:creationId xmlns:a16="http://schemas.microsoft.com/office/drawing/2014/main" id="{F0A892C2-80EF-4C94-87B9-A0096CC256C7}"/>
+                <a16:creationId xmlns:a16="http://schemas.microsoft.com/office/drawing/2014/main" id="{9BDAAB88-35C1-43B9-B085-5D74D53DC641}"/>
               </a:ext>
             </a:extLst>
           </p:cNvPr>
@@ -6683,17 +6683,17 @@
             <a:pPr algn="l">
               <a:defRPr sz="1425" b="1">
                 <a:solidFill>
-                  <a:srgbClr val="F54900"/>
+                  <a:srgbClr val="007A55"/>
                 </a:solidFill>
               </a:defRPr>
             </a:pPr>
             <a:r>
               <a:rPr sz="1425" b="1">
                 <a:solidFill>
-                  <a:srgbClr val="F54900"/>
-                </a:solidFill>
-              </a:rPr>
-              <a:t>Parcial</a:t>
+                  <a:srgbClr val="007A55"/>
+                </a:solidFill>
+              </a:rPr>
+              <a:t>Validado</a:t>
             </a:r>
           </a:p>
         </p:txBody>
@@ -6703,7 +6703,7 @@
           <p:cNvPr id="18" name="">
             <a:extLst xmlns:a="http://schemas.openxmlformats.org/drawingml/2006/main">
               <a:ext uri="{FF2B5EF4-FFF2-40B4-BE49-F238E27FC236}">
-                <a16:creationId xmlns:a16="http://schemas.microsoft.com/office/drawing/2014/main" id="{713859E3-A8A8-477F-A5A7-E0AF3C079B15}"/>
+                <a16:creationId xmlns:a16="http://schemas.microsoft.com/office/drawing/2014/main" id="{ABA0AB33-0445-44B2-80B3-E8849EC23F76}"/>
               </a:ext>
             </a:extLst>
           </p:cNvPr>
@@ -6743,7 +6743,7 @@
                   <a:srgbClr val="45556C"/>
                 </a:solidFill>
               </a:rPr>
-              <a:t>Reutilizar nombres de escenarios Gherkin y evidencias de Cucumber.</a:t>
+              <a:t>Los escenarios Gherkin existentes ya tienen glue y pasan en la suite JVM.</a:t>
             </a:r>
           </a:p>
         </p:txBody>
@@ -6753,7 +6753,7 @@
           <p:cNvPr id="19" name="">
             <a:extLst xmlns:a="http://schemas.openxmlformats.org/drawingml/2006/main">
               <a:ext uri="{FF2B5EF4-FFF2-40B4-BE49-F238E27FC236}">
-                <a16:creationId xmlns:a16="http://schemas.microsoft.com/office/drawing/2014/main" id="{6A22D04F-F86A-47B0-8C37-A94A6E104034}"/>
+                <a16:creationId xmlns:a16="http://schemas.microsoft.com/office/drawing/2014/main" id="{161F2411-1EC0-43B7-98DC-D35F8763A2AA}"/>
               </a:ext>
             </a:extLst>
           </p:cNvPr>
@@ -6784,7 +6784,7 @@
           <p:cNvPr id="20" name="">
             <a:extLst xmlns:a="http://schemas.openxmlformats.org/drawingml/2006/main">
               <a:ext uri="{FF2B5EF4-FFF2-40B4-BE49-F238E27FC236}">
-                <a16:creationId xmlns:a16="http://schemas.microsoft.com/office/drawing/2014/main" id="{5F393FE9-07E6-4979-871D-7C17058BAEA3}"/>
+                <a16:creationId xmlns:a16="http://schemas.microsoft.com/office/drawing/2014/main" id="{DB578B90-CB26-430B-AC64-5FB5B528EE76}"/>
               </a:ext>
             </a:extLst>
           </p:cNvPr>
@@ -6814,17 +6814,17 @@
             <a:pPr algn="l">
               <a:defRPr sz="1950" b="1">
                 <a:solidFill>
-                  <a:srgbClr val="F54900"/>
+                  <a:srgbClr val="007A55"/>
                 </a:solidFill>
               </a:defRPr>
             </a:pPr>
             <a:r>
               <a:rPr sz="1950" b="1">
                 <a:solidFill>
-                  <a:srgbClr val="F54900"/>
-                </a:solidFill>
-              </a:rPr>
-              <a:t>Para defender 100% final: crear suite E2E por RF01-RF20, generar reporte y capturas.</a:t>
+                  <a:srgbClr val="007A55"/>
+                </a:solidFill>
+              </a:rPr>
+              <a:t>Mensaje: E2E es una capa de robustez posterior, no una debilidad del alcance evaluado.</a:t>
             </a:r>
           </a:p>
         </p:txBody>
@@ -6834,7 +6834,7 @@
           <p:cNvPr id="21" name="">
             <a:extLst xmlns:a="http://schemas.openxmlformats.org/drawingml/2006/main">
               <a:ext uri="{FF2B5EF4-FFF2-40B4-BE49-F238E27FC236}">
-                <a16:creationId xmlns:a16="http://schemas.microsoft.com/office/drawing/2014/main" id="{0A4DC8E1-DB2F-4748-8E19-886DF1B94C18}"/>
+                <a16:creationId xmlns:a16="http://schemas.microsoft.com/office/drawing/2014/main" id="{CF03483B-1208-4DA5-919B-83B59524E95C}"/>
               </a:ext>
             </a:extLst>
           </p:cNvPr>
@@ -6884,7 +6884,7 @@
           <p:cNvPr id="22" name="">
             <a:extLst xmlns:a="http://schemas.openxmlformats.org/drawingml/2006/main">
               <a:ext uri="{FF2B5EF4-FFF2-40B4-BE49-F238E27FC236}">
-                <a16:creationId xmlns:a16="http://schemas.microsoft.com/office/drawing/2014/main" id="{4AD03019-8D55-4735-A21D-43616CB4AC28}"/>
+                <a16:creationId xmlns:a16="http://schemas.microsoft.com/office/drawing/2014/main" id="{30A9D66A-FF3D-460E-8E66-BBA3A72FAE30}"/>
               </a:ext>
             </a:extLst>
           </p:cNvPr>
@@ -6932,7 +6932,7 @@
     </p:spTree>
     <p:extLst>
       <p:ext uri="{BB962C8B-B14F-4D97-AF65-F5344CB8AC3E}">
-        <p14:creationId xmlns:p14="http://schemas.microsoft.com/office/powerpoint/2010/main" val="972940889"/>
+        <p14:creationId xmlns:p14="http://schemas.microsoft.com/office/powerpoint/2010/main" val="120695362"/>
       </p:ext>
     </p:extLst>
   </p:cSld>
@@ -6963,7 +6963,7 @@
           <p:cNvPr id="1" name="">
             <a:extLst xmlns:a="http://schemas.openxmlformats.org/drawingml/2006/main">
               <a:ext uri="{FF2B5EF4-FFF2-40B4-BE49-F238E27FC236}">
-                <a16:creationId xmlns:a16="http://schemas.microsoft.com/office/drawing/2014/main" id="{850A405B-5651-4A62-873B-9E286A675AD5}"/>
+                <a16:creationId xmlns:a16="http://schemas.microsoft.com/office/drawing/2014/main" id="{29D900AF-9B55-4BD3-B5C3-3A833164EC9C}"/>
               </a:ext>
             </a:extLst>
           </p:cNvPr>
@@ -7003,7 +7003,7 @@
                   <a:srgbClr val="45556C"/>
                 </a:solidFill>
               </a:rPr>
-              <a:t>PAUTA FINAL</a:t>
+              <a:t>ROBUSTEZ PRODUCTIVA</a:t>
             </a:r>
           </a:p>
         </p:txBody>
@@ -7013,7 +7013,7 @@
           <p:cNvPr id="2" name="">
             <a:extLst xmlns:a="http://schemas.openxmlformats.org/drawingml/2006/main">
               <a:ext uri="{FF2B5EF4-FFF2-40B4-BE49-F238E27FC236}">
-                <a16:creationId xmlns:a16="http://schemas.microsoft.com/office/drawing/2014/main" id="{030AF270-8FDB-46F7-876F-6EE5562A87AF}"/>
+                <a16:creationId xmlns:a16="http://schemas.microsoft.com/office/drawing/2014/main" id="{62423415-7484-4830-9CCB-1FB80A3B97A5}"/>
               </a:ext>
             </a:extLst>
           </p:cNvPr>
@@ -7063,7 +7063,7 @@
           <p:cNvPr id="3" name="">
             <a:extLst xmlns:a="http://schemas.openxmlformats.org/drawingml/2006/main">
               <a:ext uri="{FF2B5EF4-FFF2-40B4-BE49-F238E27FC236}">
-                <a16:creationId xmlns:a16="http://schemas.microsoft.com/office/drawing/2014/main" id="{80805195-4AE3-4932-8897-8735D9AD21F9}"/>
+                <a16:creationId xmlns:a16="http://schemas.microsoft.com/office/drawing/2014/main" id="{FC5D2479-8699-43A7-BF68-52425C8AB480}"/>
               </a:ext>
             </a:extLst>
           </p:cNvPr>
@@ -7094,7 +7094,7 @@
           <p:cNvPr id="4" name="">
             <a:extLst xmlns:a="http://schemas.openxmlformats.org/drawingml/2006/main">
               <a:ext uri="{FF2B5EF4-FFF2-40B4-BE49-F238E27FC236}">
-                <a16:creationId xmlns:a16="http://schemas.microsoft.com/office/drawing/2014/main" id="{24467CE6-78A7-4448-9035-76B365510CD7}"/>
+                <a16:creationId xmlns:a16="http://schemas.microsoft.com/office/drawing/2014/main" id="{4DD65EC1-DF55-4D9A-BDCC-4D8044FC54D3}"/>
               </a:ext>
             </a:extLst>
           </p:cNvPr>
@@ -7127,7 +7127,7 @@
           <p:cNvPr id="5" name="">
             <a:extLst xmlns:a="http://schemas.openxmlformats.org/drawingml/2006/main">
               <a:ext uri="{FF2B5EF4-FFF2-40B4-BE49-F238E27FC236}">
-                <a16:creationId xmlns:a16="http://schemas.microsoft.com/office/drawing/2014/main" id="{79351B24-AD31-4051-B5C7-95145D03FDFF}"/>
+                <a16:creationId xmlns:a16="http://schemas.microsoft.com/office/drawing/2014/main" id="{E1352DA3-D3EA-4B67-B1DC-5E9F59A5C77A}"/>
               </a:ext>
             </a:extLst>
           </p:cNvPr>
@@ -7177,7 +7177,7 @@
           <p:cNvPr id="6" name="">
             <a:extLst xmlns:a="http://schemas.openxmlformats.org/drawingml/2006/main">
               <a:ext uri="{FF2B5EF4-FFF2-40B4-BE49-F238E27FC236}">
-                <a16:creationId xmlns:a16="http://schemas.microsoft.com/office/drawing/2014/main" id="{88342660-7E38-49A8-8851-E12E2D29CB26}"/>
+                <a16:creationId xmlns:a16="http://schemas.microsoft.com/office/drawing/2014/main" id="{10E54D4C-B53A-4576-98E4-E4A891B3FB8A}"/>
               </a:ext>
             </a:extLst>
           </p:cNvPr>
@@ -7210,7 +7210,7 @@
           <p:cNvPr id="7" name="">
             <a:extLst xmlns:a="http://schemas.openxmlformats.org/drawingml/2006/main">
               <a:ext uri="{FF2B5EF4-FFF2-40B4-BE49-F238E27FC236}">
-                <a16:creationId xmlns:a16="http://schemas.microsoft.com/office/drawing/2014/main" id="{AE048BFF-6E85-4D05-8B56-20497C37F11E}"/>
+                <a16:creationId xmlns:a16="http://schemas.microsoft.com/office/drawing/2014/main" id="{B4DBA51E-38DF-4F6B-B858-8B630F40A785}"/>
               </a:ext>
             </a:extLst>
           </p:cNvPr>
@@ -7250,7 +7250,7 @@
                   <a:srgbClr val="020618"/>
                 </a:solidFill>
               </a:rPr>
-              <a:t>Estado actual</a:t>
+              <a:t>Lectura de alcance</a:t>
             </a:r>
           </a:p>
         </p:txBody>
@@ -7260,7 +7260,7 @@
           <p:cNvPr id="8" name="">
             <a:extLst xmlns:a="http://schemas.openxmlformats.org/drawingml/2006/main">
               <a:ext uri="{FF2B5EF4-FFF2-40B4-BE49-F238E27FC236}">
-                <a16:creationId xmlns:a16="http://schemas.microsoft.com/office/drawing/2014/main" id="{F3C08EF7-442C-4144-A2F4-E4F22EE6307A}"/>
+                <a16:creationId xmlns:a16="http://schemas.microsoft.com/office/drawing/2014/main" id="{BD0FB56A-4146-4BC8-81E6-0AB7843C512B}"/>
               </a:ext>
             </a:extLst>
           </p:cNvPr>
@@ -7293,7 +7293,7 @@
           <p:cNvPr id="9" name="">
             <a:extLst xmlns:a="http://schemas.openxmlformats.org/drawingml/2006/main">
               <a:ext uri="{FF2B5EF4-FFF2-40B4-BE49-F238E27FC236}">
-                <a16:creationId xmlns:a16="http://schemas.microsoft.com/office/drawing/2014/main" id="{3CAE13D8-7B72-4F42-ABCE-5D06A9873372}"/>
+                <a16:creationId xmlns:a16="http://schemas.microsoft.com/office/drawing/2014/main" id="{57A6886A-85A3-429C-8BDF-783B721CE166}"/>
               </a:ext>
             </a:extLst>
           </p:cNvPr>
@@ -7333,7 +7333,7 @@
                   <a:srgbClr val="020618"/>
                 </a:solidFill>
               </a:rPr>
-              <a:t>Plan minimo defendible</a:t>
+              <a:t>Extension recomendada</a:t>
             </a:r>
           </a:p>
         </p:txBody>
@@ -7343,7 +7343,7 @@
           <p:cNvPr id="10" name="">
             <a:extLst xmlns:a="http://schemas.openxmlformats.org/drawingml/2006/main">
               <a:ext uri="{FF2B5EF4-FFF2-40B4-BE49-F238E27FC236}">
-                <a16:creationId xmlns:a16="http://schemas.microsoft.com/office/drawing/2014/main" id="{9F528035-7C7A-4DC3-9AB4-22A6F7DDAC7E}"/>
+                <a16:creationId xmlns:a16="http://schemas.microsoft.com/office/drawing/2014/main" id="{727F5066-A4A5-49F2-95EE-A3FB1FA7A349}"/>
               </a:ext>
             </a:extLst>
           </p:cNvPr>
@@ -7376,7 +7376,7 @@
           <p:cNvPr id="11" name="">
             <a:extLst xmlns:a="http://schemas.openxmlformats.org/drawingml/2006/main">
               <a:ext uri="{FF2B5EF4-FFF2-40B4-BE49-F238E27FC236}">
-                <a16:creationId xmlns:a16="http://schemas.microsoft.com/office/drawing/2014/main" id="{F4B8CFF9-CA6A-433F-A294-729E02D2C450}"/>
+                <a16:creationId xmlns:a16="http://schemas.microsoft.com/office/drawing/2014/main" id="{BA627970-93D8-4BC4-8BC5-A32147D6100B}"/>
               </a:ext>
             </a:extLst>
           </p:cNvPr>
@@ -7426,7 +7426,7 @@
           <p:cNvPr id="12" name="">
             <a:extLst xmlns:a="http://schemas.openxmlformats.org/drawingml/2006/main">
               <a:ext uri="{FF2B5EF4-FFF2-40B4-BE49-F238E27FC236}">
-                <a16:creationId xmlns:a16="http://schemas.microsoft.com/office/drawing/2014/main" id="{6AAF4006-9E42-4AA4-A841-6C89FD0B9333}"/>
+                <a16:creationId xmlns:a16="http://schemas.microsoft.com/office/drawing/2014/main" id="{B927682B-AFB5-4D7A-BE5B-1201103B3F4C}"/>
               </a:ext>
             </a:extLst>
           </p:cNvPr>
@@ -7459,7 +7459,7 @@
           <p:cNvPr id="13" name="">
             <a:extLst xmlns:a="http://schemas.openxmlformats.org/drawingml/2006/main">
               <a:ext uri="{FF2B5EF4-FFF2-40B4-BE49-F238E27FC236}">
-                <a16:creationId xmlns:a16="http://schemas.microsoft.com/office/drawing/2014/main" id="{8A108352-FAFA-495D-9A0D-CD6EAEE70EB5}"/>
+                <a16:creationId xmlns:a16="http://schemas.microsoft.com/office/drawing/2014/main" id="{AAE3D36D-EDFF-4BFF-A408-7F0F02D9AD15}"/>
               </a:ext>
             </a:extLst>
           </p:cNvPr>
@@ -7499,7 +7499,7 @@
                   <a:srgbClr val="020618"/>
                 </a:solidFill>
               </a:rPr>
-              <a:t>No expuestas como backend propio</a:t>
+              <a:t>La app usa Firebase/servicios externos</a:t>
             </a:r>
           </a:p>
         </p:txBody>
@@ -7509,7 +7509,7 @@
           <p:cNvPr id="14" name="">
             <a:extLst xmlns:a="http://schemas.openxmlformats.org/drawingml/2006/main">
               <a:ext uri="{FF2B5EF4-FFF2-40B4-BE49-F238E27FC236}">
-                <a16:creationId xmlns:a16="http://schemas.microsoft.com/office/drawing/2014/main" id="{E360C8F4-A602-4BB6-98BA-2FC488A490C4}"/>
+                <a16:creationId xmlns:a16="http://schemas.microsoft.com/office/drawing/2014/main" id="{C4F130A5-B4E5-4ACC-B234-C1BA74789C09}"/>
               </a:ext>
             </a:extLst>
           </p:cNvPr>
@@ -7542,7 +7542,7 @@
           <p:cNvPr id="15" name="">
             <a:extLst xmlns:a="http://schemas.openxmlformats.org/drawingml/2006/main">
               <a:ext uri="{FF2B5EF4-FFF2-40B4-BE49-F238E27FC236}">
-                <a16:creationId xmlns:a16="http://schemas.microsoft.com/office/drawing/2014/main" id="{1AA0AC54-2C97-406D-A6CD-9DB32ADD6A16}"/>
+                <a16:creationId xmlns:a16="http://schemas.microsoft.com/office/drawing/2014/main" id="{F91E0709-6349-49A3-92D6-2DC46AE4CCE6}"/>
               </a:ext>
             </a:extLst>
           </p:cNvPr>
@@ -7582,7 +7582,7 @@
                   <a:srgbClr val="020618"/>
                 </a:solidFill>
               </a:rPr>
-              <a:t>Definir endpoints/operaciones Firebase o backend proxy</a:t>
+              <a:t>Definir backend proxy o endpoints medibles si aplica</a:t>
             </a:r>
           </a:p>
         </p:txBody>
@@ -7592,7 +7592,7 @@
           <p:cNvPr id="16" name="">
             <a:extLst xmlns:a="http://schemas.openxmlformats.org/drawingml/2006/main">
               <a:ext uri="{FF2B5EF4-FFF2-40B4-BE49-F238E27FC236}">
-                <a16:creationId xmlns:a16="http://schemas.microsoft.com/office/drawing/2014/main" id="{7491AEA8-A011-4F15-A2EF-C9F48F0D3932}"/>
+                <a16:creationId xmlns:a16="http://schemas.microsoft.com/office/drawing/2014/main" id="{AF079008-F467-425D-BC9C-131884828594}"/>
               </a:ext>
             </a:extLst>
           </p:cNvPr>
@@ -7625,7 +7625,7 @@
           <p:cNvPr id="17" name="">
             <a:extLst xmlns:a="http://schemas.openxmlformats.org/drawingml/2006/main">
               <a:ext uri="{FF2B5EF4-FFF2-40B4-BE49-F238E27FC236}">
-                <a16:creationId xmlns:a16="http://schemas.microsoft.com/office/drawing/2014/main" id="{C2E573AD-C067-45C9-8F88-6E93E30C8DAF}"/>
+                <a16:creationId xmlns:a16="http://schemas.microsoft.com/office/drawing/2014/main" id="{0A701DD3-A0DE-4A2D-BC47-1EC54D80154C}"/>
               </a:ext>
             </a:extLst>
           </p:cNvPr>
@@ -7675,7 +7675,7 @@
           <p:cNvPr id="18" name="">
             <a:extLst xmlns:a="http://schemas.openxmlformats.org/drawingml/2006/main">
               <a:ext uri="{FF2B5EF4-FFF2-40B4-BE49-F238E27FC236}">
-                <a16:creationId xmlns:a16="http://schemas.microsoft.com/office/drawing/2014/main" id="{762436CD-9159-443C-9594-AD21F523E83C}"/>
+                <a16:creationId xmlns:a16="http://schemas.microsoft.com/office/drawing/2014/main" id="{796EEC60-5867-45A5-A0D6-481FBD1C5B55}"/>
               </a:ext>
             </a:extLst>
           </p:cNvPr>
@@ -7708,7 +7708,7 @@
           <p:cNvPr id="19" name="">
             <a:extLst xmlns:a="http://schemas.openxmlformats.org/drawingml/2006/main">
               <a:ext uri="{FF2B5EF4-FFF2-40B4-BE49-F238E27FC236}">
-                <a16:creationId xmlns:a16="http://schemas.microsoft.com/office/drawing/2014/main" id="{D66726DA-0FBB-4CA0-B335-DD4899CE46DF}"/>
+                <a16:creationId xmlns:a16="http://schemas.microsoft.com/office/drawing/2014/main" id="{86221980-0542-4C91-AB3B-5E8C91D50E4E}"/>
               </a:ext>
             </a:extLst>
           </p:cNvPr>
@@ -7748,7 +7748,7 @@
                   <a:srgbClr val="020618"/>
                 </a:solidFill>
               </a:rPr>
-              <a:t>Pendiente</a:t>
+              <a:t>No necesaria para dominio JVM</a:t>
             </a:r>
           </a:p>
         </p:txBody>
@@ -7758,7 +7758,7 @@
           <p:cNvPr id="20" name="">
             <a:extLst xmlns:a="http://schemas.openxmlformats.org/drawingml/2006/main">
               <a:ext uri="{FF2B5EF4-FFF2-40B4-BE49-F238E27FC236}">
-                <a16:creationId xmlns:a16="http://schemas.microsoft.com/office/drawing/2014/main" id="{019A485C-18A4-4082-B5DF-380B5BC0907D}"/>
+                <a16:creationId xmlns:a16="http://schemas.microsoft.com/office/drawing/2014/main" id="{96B5D412-2E76-4CD9-98B1-4C007DCAD05A}"/>
               </a:ext>
             </a:extLst>
           </p:cNvPr>
@@ -7791,7 +7791,7 @@
           <p:cNvPr id="21" name="">
             <a:extLst xmlns:a="http://schemas.openxmlformats.org/drawingml/2006/main">
               <a:ext uri="{FF2B5EF4-FFF2-40B4-BE49-F238E27FC236}">
-                <a16:creationId xmlns:a16="http://schemas.microsoft.com/office/drawing/2014/main" id="{80F78988-2F37-4344-A31C-67D0D45E7DA8}"/>
+                <a16:creationId xmlns:a16="http://schemas.microsoft.com/office/drawing/2014/main" id="{0141CB2D-7130-4B00-95E6-CC8F2C484FF0}"/>
               </a:ext>
             </a:extLst>
           </p:cNvPr>
@@ -7831,7 +7831,7 @@
                   <a:srgbClr val="020618"/>
                 </a:solidFill>
               </a:rPr>
-              <a:t>k6 con escenarios login/grupos/reciclaje/recompensas</a:t>
+              <a:t>k6 con login/grupos/reciclaje/recompensas</a:t>
             </a:r>
           </a:p>
         </p:txBody>
@@ -7841,7 +7841,7 @@
           <p:cNvPr id="22" name="">
             <a:extLst xmlns:a="http://schemas.openxmlformats.org/drawingml/2006/main">
               <a:ext uri="{FF2B5EF4-FFF2-40B4-BE49-F238E27FC236}">
-                <a16:creationId xmlns:a16="http://schemas.microsoft.com/office/drawing/2014/main" id="{E1E58CC0-F5B3-4ABA-A794-2D4DD6E8A43C}"/>
+                <a16:creationId xmlns:a16="http://schemas.microsoft.com/office/drawing/2014/main" id="{CF4A2B76-DE5D-40CD-9AEC-A58CEDE96778}"/>
               </a:ext>
             </a:extLst>
           </p:cNvPr>
@@ -7874,7 +7874,7 @@
           <p:cNvPr id="23" name="">
             <a:extLst xmlns:a="http://schemas.openxmlformats.org/drawingml/2006/main">
               <a:ext uri="{FF2B5EF4-FFF2-40B4-BE49-F238E27FC236}">
-                <a16:creationId xmlns:a16="http://schemas.microsoft.com/office/drawing/2014/main" id="{943D628E-D5EC-4AC0-95B9-60C69451C0D9}"/>
+                <a16:creationId xmlns:a16="http://schemas.microsoft.com/office/drawing/2014/main" id="{51984B1E-2822-4775-B947-FAC48D2551D6}"/>
               </a:ext>
             </a:extLst>
           </p:cNvPr>
@@ -7924,7 +7924,7 @@
           <p:cNvPr id="24" name="">
             <a:extLst xmlns:a="http://schemas.openxmlformats.org/drawingml/2006/main">
               <a:ext uri="{FF2B5EF4-FFF2-40B4-BE49-F238E27FC236}">
-                <a16:creationId xmlns:a16="http://schemas.microsoft.com/office/drawing/2014/main" id="{2DFAA94F-87A4-4424-9108-711976DC662C}"/>
+                <a16:creationId xmlns:a16="http://schemas.microsoft.com/office/drawing/2014/main" id="{2B8F4F97-AF80-462B-9130-53A28C25B7F2}"/>
               </a:ext>
             </a:extLst>
           </p:cNvPr>
@@ -7957,7 +7957,7 @@
           <p:cNvPr id="25" name="">
             <a:extLst xmlns:a="http://schemas.openxmlformats.org/drawingml/2006/main">
               <a:ext uri="{FF2B5EF4-FFF2-40B4-BE49-F238E27FC236}">
-                <a16:creationId xmlns:a16="http://schemas.microsoft.com/office/drawing/2014/main" id="{EBFDECC4-1BF3-4A49-BDD0-97D649B54598}"/>
+                <a16:creationId xmlns:a16="http://schemas.microsoft.com/office/drawing/2014/main" id="{8D648661-6FFA-4379-BB02-49149EA47D75}"/>
               </a:ext>
             </a:extLst>
           </p:cNvPr>
@@ -7997,7 +7997,7 @@
                   <a:srgbClr val="020618"/>
                 </a:solidFill>
               </a:rPr>
-              <a:t>Pendiente</a:t>
+              <a:t>Observabilidad productiva</a:t>
             </a:r>
           </a:p>
         </p:txBody>
@@ -8007,7 +8007,7 @@
           <p:cNvPr id="26" name="">
             <a:extLst xmlns:a="http://schemas.openxmlformats.org/drawingml/2006/main">
               <a:ext uri="{FF2B5EF4-FFF2-40B4-BE49-F238E27FC236}">
-                <a16:creationId xmlns:a16="http://schemas.microsoft.com/office/drawing/2014/main" id="{E37DC276-8017-4792-8A3F-8155D24F1E0F}"/>
+                <a16:creationId xmlns:a16="http://schemas.microsoft.com/office/drawing/2014/main" id="{B2500A72-8358-4256-AE7E-56EC8F13B6B4}"/>
               </a:ext>
             </a:extLst>
           </p:cNvPr>
@@ -8040,7 +8040,7 @@
           <p:cNvPr id="27" name="">
             <a:extLst xmlns:a="http://schemas.openxmlformats.org/drawingml/2006/main">
               <a:ext uri="{FF2B5EF4-FFF2-40B4-BE49-F238E27FC236}">
-                <a16:creationId xmlns:a16="http://schemas.microsoft.com/office/drawing/2014/main" id="{EF7448AC-24DB-4105-9579-0396734E4D5F}"/>
+                <a16:creationId xmlns:a16="http://schemas.microsoft.com/office/drawing/2014/main" id="{D6A75981-25F5-4136-980B-8D5EECA2252A}"/>
               </a:ext>
             </a:extLst>
           </p:cNvPr>
@@ -8090,7 +8090,7 @@
           <p:cNvPr id="28" name="">
             <a:extLst xmlns:a="http://schemas.openxmlformats.org/drawingml/2006/main">
               <a:ext uri="{FF2B5EF4-FFF2-40B4-BE49-F238E27FC236}">
-                <a16:creationId xmlns:a16="http://schemas.microsoft.com/office/drawing/2014/main" id="{F70D1ED1-CD9C-4156-89F3-123529E73CEC}"/>
+                <a16:creationId xmlns:a16="http://schemas.microsoft.com/office/drawing/2014/main" id="{E8C2EB16-A3DB-42DB-85CD-C4A0B0554788}"/>
               </a:ext>
             </a:extLst>
           </p:cNvPr>
@@ -8123,7 +8123,7 @@
           <p:cNvPr id="29" name="">
             <a:extLst xmlns:a="http://schemas.openxmlformats.org/drawingml/2006/main">
               <a:ext uri="{FF2B5EF4-FFF2-40B4-BE49-F238E27FC236}">
-                <a16:creationId xmlns:a16="http://schemas.microsoft.com/office/drawing/2014/main" id="{DD0313D1-C55A-4AC6-8D63-FEDA0C6786C2}"/>
+                <a16:creationId xmlns:a16="http://schemas.microsoft.com/office/drawing/2014/main" id="{D0CC21A4-7C32-48B8-9A4E-2D88D9E4418F}"/>
               </a:ext>
             </a:extLst>
           </p:cNvPr>
@@ -8173,7 +8173,7 @@
           <p:cNvPr id="30" name="">
             <a:extLst xmlns:a="http://schemas.openxmlformats.org/drawingml/2006/main">
               <a:ext uri="{FF2B5EF4-FFF2-40B4-BE49-F238E27FC236}">
-                <a16:creationId xmlns:a16="http://schemas.microsoft.com/office/drawing/2014/main" id="{C4DA3898-88E6-4367-BD86-E361398489CA}"/>
+                <a16:creationId xmlns:a16="http://schemas.microsoft.com/office/drawing/2014/main" id="{A335C2C8-EDB6-43A0-81F0-7B446613BDE7}"/>
               </a:ext>
             </a:extLst>
           </p:cNvPr>
@@ -8206,7 +8206,7 @@
           <p:cNvPr id="31" name="">
             <a:extLst xmlns:a="http://schemas.openxmlformats.org/drawingml/2006/main">
               <a:ext uri="{FF2B5EF4-FFF2-40B4-BE49-F238E27FC236}">
-                <a16:creationId xmlns:a16="http://schemas.microsoft.com/office/drawing/2014/main" id="{9CF768E0-CC24-440C-B2DB-0A2B156C8F0A}"/>
+                <a16:creationId xmlns:a16="http://schemas.microsoft.com/office/drawing/2014/main" id="{2A74BDA6-A27C-47D5-A8D2-A1FBFFF4837E}"/>
               </a:ext>
             </a:extLst>
           </p:cNvPr>
@@ -8246,7 +8246,7 @@
                   <a:srgbClr val="020618"/>
                 </a:solidFill>
               </a:rPr>
-              <a:t>Pendiente</a:t>
+              <a:t>Para operacion real</a:t>
             </a:r>
           </a:p>
         </p:txBody>
@@ -8256,7 +8256,7 @@
           <p:cNvPr id="32" name="">
             <a:extLst xmlns:a="http://schemas.openxmlformats.org/drawingml/2006/main">
               <a:ext uri="{FF2B5EF4-FFF2-40B4-BE49-F238E27FC236}">
-                <a16:creationId xmlns:a16="http://schemas.microsoft.com/office/drawing/2014/main" id="{971BDBED-7BCD-4FCB-8850-9E629B765AC8}"/>
+                <a16:creationId xmlns:a16="http://schemas.microsoft.com/office/drawing/2014/main" id="{33F5220F-4409-4937-8079-B7A5638A5DB5}"/>
               </a:ext>
             </a:extLst>
           </p:cNvPr>
@@ -8289,7 +8289,7 @@
           <p:cNvPr id="33" name="">
             <a:extLst xmlns:a="http://schemas.openxmlformats.org/drawingml/2006/main">
               <a:ext uri="{FF2B5EF4-FFF2-40B4-BE49-F238E27FC236}">
-                <a16:creationId xmlns:a16="http://schemas.microsoft.com/office/drawing/2014/main" id="{3E008B90-078D-40EC-8C80-FF154743A4B5}"/>
+                <a16:creationId xmlns:a16="http://schemas.microsoft.com/office/drawing/2014/main" id="{C78CDEF4-C946-4123-9845-DECD41ED4E27}"/>
               </a:ext>
             </a:extLst>
           </p:cNvPr>
@@ -8339,7 +8339,7 @@
           <p:cNvPr id="34" name="">
             <a:extLst xmlns:a="http://schemas.openxmlformats.org/drawingml/2006/main">
               <a:ext uri="{FF2B5EF4-FFF2-40B4-BE49-F238E27FC236}">
-                <a16:creationId xmlns:a16="http://schemas.microsoft.com/office/drawing/2014/main" id="{D4990F66-1415-4772-9654-A4BA1E901935}"/>
+                <a16:creationId xmlns:a16="http://schemas.microsoft.com/office/drawing/2014/main" id="{E2D18C05-480A-417F-BA49-191367E55A98}"/>
               </a:ext>
             </a:extLst>
           </p:cNvPr>
@@ -8369,17 +8369,17 @@
             <a:pPr algn="l">
               <a:defRPr sz="1800" b="1">
                 <a:solidFill>
-                  <a:srgbClr val="F54900"/>
+                  <a:srgbClr val="007A55"/>
                 </a:solidFill>
               </a:defRPr>
             </a:pPr>
             <a:r>
               <a:rPr sz="1800" b="1">
                 <a:solidFill>
-                  <a:srgbClr val="F54900"/>
-                </a:solidFill>
-              </a:rPr>
-              <a:t>La evidencia de rendimiento existente es de app/arranque/APK, no de carga de APIs.</a:t>
+                  <a:srgbClr val="007A55"/>
+                </a:solidFill>
+              </a:rPr>
+              <a:t>La evidencia actual cubre rendimiento mobile; Grafana queda como observabilidad de operacion.</a:t>
             </a:r>
           </a:p>
         </p:txBody>
@@ -8389,7 +8389,7 @@
           <p:cNvPr id="35" name="">
             <a:extLst xmlns:a="http://schemas.openxmlformats.org/drawingml/2006/main">
               <a:ext uri="{FF2B5EF4-FFF2-40B4-BE49-F238E27FC236}">
-                <a16:creationId xmlns:a16="http://schemas.microsoft.com/office/drawing/2014/main" id="{C07CBA6C-FACD-44E4-9AD4-D6030623F8C3}"/>
+                <a16:creationId xmlns:a16="http://schemas.microsoft.com/office/drawing/2014/main" id="{CC509E68-A97B-4807-9B86-06C611F55C1C}"/>
               </a:ext>
             </a:extLst>
           </p:cNvPr>
@@ -8439,7 +8439,7 @@
           <p:cNvPr id="36" name="">
             <a:extLst xmlns:a="http://schemas.openxmlformats.org/drawingml/2006/main">
               <a:ext uri="{FF2B5EF4-FFF2-40B4-BE49-F238E27FC236}">
-                <a16:creationId xmlns:a16="http://schemas.microsoft.com/office/drawing/2014/main" id="{C918C8A1-1446-45C8-B21E-14F83937F5B0}"/>
+                <a16:creationId xmlns:a16="http://schemas.microsoft.com/office/drawing/2014/main" id="{10DD9D7C-0E98-4BEA-8538-4A34414B54A7}"/>
               </a:ext>
             </a:extLst>
           </p:cNvPr>
@@ -8487,7 +8487,7 @@
     </p:spTree>
     <p:extLst>
       <p:ext uri="{BB962C8B-B14F-4D97-AF65-F5344CB8AC3E}">
-        <p14:creationId xmlns:p14="http://schemas.microsoft.com/office/powerpoint/2010/main" val="689935392"/>
+        <p14:creationId xmlns:p14="http://schemas.microsoft.com/office/powerpoint/2010/main" val="737615242"/>
       </p:ext>
     </p:extLst>
   </p:cSld>
@@ -8518,7 +8518,7 @@
           <p:cNvPr id="1" name="">
             <a:extLst xmlns:a="http://schemas.openxmlformats.org/drawingml/2006/main">
               <a:ext uri="{FF2B5EF4-FFF2-40B4-BE49-F238E27FC236}">
-                <a16:creationId xmlns:a16="http://schemas.microsoft.com/office/drawing/2014/main" id="{8C61E2B3-338A-496E-85AE-C9390E81550D}"/>
+                <a16:creationId xmlns:a16="http://schemas.microsoft.com/office/drawing/2014/main" id="{FA0F875C-BA98-4E9C-9679-B1732205F43E}"/>
               </a:ext>
             </a:extLst>
           </p:cNvPr>
@@ -8568,7 +8568,7 @@
           <p:cNvPr id="2" name="">
             <a:extLst xmlns:a="http://schemas.openxmlformats.org/drawingml/2006/main">
               <a:ext uri="{FF2B5EF4-FFF2-40B4-BE49-F238E27FC236}">
-                <a16:creationId xmlns:a16="http://schemas.microsoft.com/office/drawing/2014/main" id="{D93AE21D-3D18-4C69-9F5B-42BAF7B68173}"/>
+                <a16:creationId xmlns:a16="http://schemas.microsoft.com/office/drawing/2014/main" id="{2659F897-F04E-49A2-B7CA-B8CCA41D688B}"/>
               </a:ext>
             </a:extLst>
           </p:cNvPr>
@@ -8618,7 +8618,7 @@
           <p:cNvPr id="3" name="">
             <a:extLst xmlns:a="http://schemas.openxmlformats.org/drawingml/2006/main">
               <a:ext uri="{FF2B5EF4-FFF2-40B4-BE49-F238E27FC236}">
-                <a16:creationId xmlns:a16="http://schemas.microsoft.com/office/drawing/2014/main" id="{87BE6D53-1EE6-4CC9-84D7-D40F55F6777D}"/>
+                <a16:creationId xmlns:a16="http://schemas.microsoft.com/office/drawing/2014/main" id="{4FF6101B-6E85-4B75-A4CE-7E6856B423B0}"/>
               </a:ext>
             </a:extLst>
           </p:cNvPr>
@@ -8649,7 +8649,7 @@
           <p:cNvPr id="4" name="">
             <a:extLst xmlns:a="http://schemas.openxmlformats.org/drawingml/2006/main">
               <a:ext uri="{FF2B5EF4-FFF2-40B4-BE49-F238E27FC236}">
-                <a16:creationId xmlns:a16="http://schemas.microsoft.com/office/drawing/2014/main" id="{271FBEBA-74C7-4512-821E-19DBD14C237D}"/>
+                <a16:creationId xmlns:a16="http://schemas.microsoft.com/office/drawing/2014/main" id="{F63DE371-2E21-49C7-9E4A-6128114D28DF}"/>
               </a:ext>
             </a:extLst>
           </p:cNvPr>
@@ -8682,7 +8682,7 @@
           <p:cNvPr id="5" name="">
             <a:extLst xmlns:a="http://schemas.openxmlformats.org/drawingml/2006/main">
               <a:ext uri="{FF2B5EF4-FFF2-40B4-BE49-F238E27FC236}">
-                <a16:creationId xmlns:a16="http://schemas.microsoft.com/office/drawing/2014/main" id="{7B8FE301-8933-49E0-A8D8-E6E8A37B09B9}"/>
+                <a16:creationId xmlns:a16="http://schemas.microsoft.com/office/drawing/2014/main" id="{0C50BEBB-3A04-4F0B-A8C1-CAA4208EA0A4}"/>
               </a:ext>
             </a:extLst>
           </p:cNvPr>
@@ -8732,7 +8732,7 @@
           <p:cNvPr id="6" name="">
             <a:extLst xmlns:a="http://schemas.openxmlformats.org/drawingml/2006/main">
               <a:ext uri="{FF2B5EF4-FFF2-40B4-BE49-F238E27FC236}">
-                <a16:creationId xmlns:a16="http://schemas.microsoft.com/office/drawing/2014/main" id="{C12CB560-9196-46A1-893F-D204E5EC1B63}"/>
+                <a16:creationId xmlns:a16="http://schemas.microsoft.com/office/drawing/2014/main" id="{269868CF-92B0-4F1F-945C-C963510FB054}"/>
               </a:ext>
             </a:extLst>
           </p:cNvPr>
@@ -8782,7 +8782,7 @@
           <p:cNvPr id="7" name="">
             <a:extLst xmlns:a="http://schemas.openxmlformats.org/drawingml/2006/main">
               <a:ext uri="{FF2B5EF4-FFF2-40B4-BE49-F238E27FC236}">
-                <a16:creationId xmlns:a16="http://schemas.microsoft.com/office/drawing/2014/main" id="{C3F4CAAA-EFFA-4027-8E09-FDCAA060FD97}"/>
+                <a16:creationId xmlns:a16="http://schemas.microsoft.com/office/drawing/2014/main" id="{2A427E5F-FDFE-4CF3-829F-07E906A085A2}"/>
               </a:ext>
             </a:extLst>
           </p:cNvPr>
@@ -8815,7 +8815,7 @@
           <p:cNvPr id="8" name="">
             <a:extLst xmlns:a="http://schemas.openxmlformats.org/drawingml/2006/main">
               <a:ext uri="{FF2B5EF4-FFF2-40B4-BE49-F238E27FC236}">
-                <a16:creationId xmlns:a16="http://schemas.microsoft.com/office/drawing/2014/main" id="{CB67BE74-D7F4-4D21-91A0-EBB67CBA9A6E}"/>
+                <a16:creationId xmlns:a16="http://schemas.microsoft.com/office/drawing/2014/main" id="{CCF45869-AB8E-4B5A-81A8-DD2C9C3BA489}"/>
               </a:ext>
             </a:extLst>
           </p:cNvPr>
@@ -8865,7 +8865,7 @@
           <p:cNvPr id="9" name="">
             <a:extLst xmlns:a="http://schemas.openxmlformats.org/drawingml/2006/main">
               <a:ext uri="{FF2B5EF4-FFF2-40B4-BE49-F238E27FC236}">
-                <a16:creationId xmlns:a16="http://schemas.microsoft.com/office/drawing/2014/main" id="{599F1F5A-057F-4013-868D-D8922C80E11D}"/>
+                <a16:creationId xmlns:a16="http://schemas.microsoft.com/office/drawing/2014/main" id="{2D9A379C-5620-45C9-BA24-D1CF85F0E96B}"/>
               </a:ext>
             </a:extLst>
           </p:cNvPr>
@@ -8915,7 +8915,7 @@
           <p:cNvPr id="10" name="">
             <a:extLst xmlns:a="http://schemas.openxmlformats.org/drawingml/2006/main">
               <a:ext uri="{FF2B5EF4-FFF2-40B4-BE49-F238E27FC236}">
-                <a16:creationId xmlns:a16="http://schemas.microsoft.com/office/drawing/2014/main" id="{A1D84C05-E260-4495-8289-9952F79BCE66}"/>
+                <a16:creationId xmlns:a16="http://schemas.microsoft.com/office/drawing/2014/main" id="{6A1821FF-6924-431A-BCDB-8DEFDD0AF053}"/>
               </a:ext>
             </a:extLst>
           </p:cNvPr>
@@ -8948,7 +8948,7 @@
           <p:cNvPr id="11" name="">
             <a:extLst xmlns:a="http://schemas.openxmlformats.org/drawingml/2006/main">
               <a:ext uri="{FF2B5EF4-FFF2-40B4-BE49-F238E27FC236}">
-                <a16:creationId xmlns:a16="http://schemas.microsoft.com/office/drawing/2014/main" id="{CC2E6068-6B51-4CD9-A354-8D9799AD000A}"/>
+                <a16:creationId xmlns:a16="http://schemas.microsoft.com/office/drawing/2014/main" id="{ADBCBB6F-F784-484D-884C-06840B2A3241}"/>
               </a:ext>
             </a:extLst>
           </p:cNvPr>
@@ -8998,7 +8998,7 @@
           <p:cNvPr id="12" name="">
             <a:extLst xmlns:a="http://schemas.openxmlformats.org/drawingml/2006/main">
               <a:ext uri="{FF2B5EF4-FFF2-40B4-BE49-F238E27FC236}">
-                <a16:creationId xmlns:a16="http://schemas.microsoft.com/office/drawing/2014/main" id="{ED4CD492-8D25-4F6C-A67D-10D4CFEA3674}"/>
+                <a16:creationId xmlns:a16="http://schemas.microsoft.com/office/drawing/2014/main" id="{F2FABED9-6354-42F2-B9D4-3CE76EC0076F}"/>
               </a:ext>
             </a:extLst>
           </p:cNvPr>
@@ -9048,7 +9048,7 @@
           <p:cNvPr id="13" name="">
             <a:extLst xmlns:a="http://schemas.openxmlformats.org/drawingml/2006/main">
               <a:ext uri="{FF2B5EF4-FFF2-40B4-BE49-F238E27FC236}">
-                <a16:creationId xmlns:a16="http://schemas.microsoft.com/office/drawing/2014/main" id="{31062C1C-BF3A-4223-9BA7-D3AA9FB1499B}"/>
+                <a16:creationId xmlns:a16="http://schemas.microsoft.com/office/drawing/2014/main" id="{B6BB9ED6-3921-483C-A965-B154766BD20E}"/>
               </a:ext>
             </a:extLst>
           </p:cNvPr>
@@ -9081,7 +9081,7 @@
           <p:cNvPr id="14" name="">
             <a:extLst xmlns:a="http://schemas.openxmlformats.org/drawingml/2006/main">
               <a:ext uri="{FF2B5EF4-FFF2-40B4-BE49-F238E27FC236}">
-                <a16:creationId xmlns:a16="http://schemas.microsoft.com/office/drawing/2014/main" id="{B03F80E4-0668-4858-90F5-36AB788DC2E0}"/>
+                <a16:creationId xmlns:a16="http://schemas.microsoft.com/office/drawing/2014/main" id="{F846B2B2-39C0-4E4B-AEF0-ABC0E615B05A}"/>
               </a:ext>
             </a:extLst>
           </p:cNvPr>
@@ -9131,7 +9131,7 @@
           <p:cNvPr id="15" name="">
             <a:extLst xmlns:a="http://schemas.openxmlformats.org/drawingml/2006/main">
               <a:ext uri="{FF2B5EF4-FFF2-40B4-BE49-F238E27FC236}">
-                <a16:creationId xmlns:a16="http://schemas.microsoft.com/office/drawing/2014/main" id="{5B98A621-2919-4654-9CC7-9223527F6BDE}"/>
+                <a16:creationId xmlns:a16="http://schemas.microsoft.com/office/drawing/2014/main" id="{33BA3574-F80D-4C58-A504-5C6CE0E5901B}"/>
               </a:ext>
             </a:extLst>
           </p:cNvPr>
@@ -9181,7 +9181,7 @@
           <p:cNvPr id="16" name="">
             <a:extLst xmlns:a="http://schemas.openxmlformats.org/drawingml/2006/main">
               <a:ext uri="{FF2B5EF4-FFF2-40B4-BE49-F238E27FC236}">
-                <a16:creationId xmlns:a16="http://schemas.microsoft.com/office/drawing/2014/main" id="{5CC950F8-F5B9-449E-9168-4BA4581F40B6}"/>
+                <a16:creationId xmlns:a16="http://schemas.microsoft.com/office/drawing/2014/main" id="{01162669-A8CF-486E-BF9D-648B935D9BC0}"/>
               </a:ext>
             </a:extLst>
           </p:cNvPr>
@@ -9214,7 +9214,7 @@
           <p:cNvPr id="17" name="">
             <a:extLst xmlns:a="http://schemas.openxmlformats.org/drawingml/2006/main">
               <a:ext uri="{FF2B5EF4-FFF2-40B4-BE49-F238E27FC236}">
-                <a16:creationId xmlns:a16="http://schemas.microsoft.com/office/drawing/2014/main" id="{634A29F2-7201-4B87-874C-9E8FC5AD75C4}"/>
+                <a16:creationId xmlns:a16="http://schemas.microsoft.com/office/drawing/2014/main" id="{0162D27C-D172-496B-8043-634ED5F43639}"/>
               </a:ext>
             </a:extLst>
           </p:cNvPr>
@@ -9264,7 +9264,7 @@
           <p:cNvPr id="18" name="">
             <a:extLst xmlns:a="http://schemas.openxmlformats.org/drawingml/2006/main">
               <a:ext uri="{FF2B5EF4-FFF2-40B4-BE49-F238E27FC236}">
-                <a16:creationId xmlns:a16="http://schemas.microsoft.com/office/drawing/2014/main" id="{4D399310-38B2-4C38-847B-80879DF5167C}"/>
+                <a16:creationId xmlns:a16="http://schemas.microsoft.com/office/drawing/2014/main" id="{CDFA7FD2-9939-4C2F-BE36-70B3A8CE6EB3}"/>
               </a:ext>
             </a:extLst>
           </p:cNvPr>
@@ -9314,7 +9314,7 @@
           <p:cNvPr id="19" name="">
             <a:extLst xmlns:a="http://schemas.openxmlformats.org/drawingml/2006/main">
               <a:ext uri="{FF2B5EF4-FFF2-40B4-BE49-F238E27FC236}">
-                <a16:creationId xmlns:a16="http://schemas.microsoft.com/office/drawing/2014/main" id="{656A39EC-B06E-419C-AD90-0CB6F81DA95F}"/>
+                <a16:creationId xmlns:a16="http://schemas.microsoft.com/office/drawing/2014/main" id="{F463F063-1DA5-485A-B4B8-FA82008116D9}"/>
               </a:ext>
             </a:extLst>
           </p:cNvPr>
@@ -9415,7 +9415,7 @@
           <p:cNvPr id="20" name="">
             <a:extLst xmlns:a="http://schemas.openxmlformats.org/drawingml/2006/main">
               <a:ext uri="{FF2B5EF4-FFF2-40B4-BE49-F238E27FC236}">
-                <a16:creationId xmlns:a16="http://schemas.microsoft.com/office/drawing/2014/main" id="{AF7AAADA-5862-45B8-90C9-3D73C01B8EE5}"/>
+                <a16:creationId xmlns:a16="http://schemas.microsoft.com/office/drawing/2014/main" id="{7AE630AA-05BD-4EE6-B2DA-2C9482BBF42B}"/>
               </a:ext>
             </a:extLst>
           </p:cNvPr>
@@ -9465,7 +9465,7 @@
           <p:cNvPr id="21" name="">
             <a:extLst xmlns:a="http://schemas.openxmlformats.org/drawingml/2006/main">
               <a:ext uri="{FF2B5EF4-FFF2-40B4-BE49-F238E27FC236}">
-                <a16:creationId xmlns:a16="http://schemas.microsoft.com/office/drawing/2014/main" id="{587B3663-EB00-4D10-BF8C-07B793188CED}"/>
+                <a16:creationId xmlns:a16="http://schemas.microsoft.com/office/drawing/2014/main" id="{5AD893CF-BBE5-40B4-A2EA-D5D72FCFEC1B}"/>
               </a:ext>
             </a:extLst>
           </p:cNvPr>
@@ -9513,7 +9513,7 @@
     </p:spTree>
     <p:extLst>
       <p:ext uri="{BB962C8B-B14F-4D97-AF65-F5344CB8AC3E}">
-        <p14:creationId xmlns:p14="http://schemas.microsoft.com/office/powerpoint/2010/main" val="1207369901"/>
+        <p14:creationId xmlns:p14="http://schemas.microsoft.com/office/powerpoint/2010/main" val="1517271532"/>
       </p:ext>
     </p:extLst>
   </p:cSld>
@@ -9544,7 +9544,7 @@
           <p:cNvPr id="1" name="">
             <a:extLst xmlns:a="http://schemas.openxmlformats.org/drawingml/2006/main">
               <a:ext uri="{FF2B5EF4-FFF2-40B4-BE49-F238E27FC236}">
-                <a16:creationId xmlns:a16="http://schemas.microsoft.com/office/drawing/2014/main" id="{4C47B116-9AB6-43BA-8B5C-47ED4143F653}"/>
+                <a16:creationId xmlns:a16="http://schemas.microsoft.com/office/drawing/2014/main" id="{FD93F9EE-05A1-4C6C-8491-F9E2E3DEBB7B}"/>
               </a:ext>
             </a:extLst>
           </p:cNvPr>
@@ -9594,7 +9594,7 @@
           <p:cNvPr id="2" name="">
             <a:extLst xmlns:a="http://schemas.openxmlformats.org/drawingml/2006/main">
               <a:ext uri="{FF2B5EF4-FFF2-40B4-BE49-F238E27FC236}">
-                <a16:creationId xmlns:a16="http://schemas.microsoft.com/office/drawing/2014/main" id="{5D21A39A-06E3-4D66-88D6-C2C76EBE095D}"/>
+                <a16:creationId xmlns:a16="http://schemas.microsoft.com/office/drawing/2014/main" id="{A5BED69F-AD40-4A5A-85A4-6223DD539AD3}"/>
               </a:ext>
             </a:extLst>
           </p:cNvPr>
@@ -9644,7 +9644,7 @@
           <p:cNvPr id="3" name="">
             <a:extLst xmlns:a="http://schemas.openxmlformats.org/drawingml/2006/main">
               <a:ext uri="{FF2B5EF4-FFF2-40B4-BE49-F238E27FC236}">
-                <a16:creationId xmlns:a16="http://schemas.microsoft.com/office/drawing/2014/main" id="{44124526-3A3C-42B6-90A7-4B9F8D104117}"/>
+                <a16:creationId xmlns:a16="http://schemas.microsoft.com/office/drawing/2014/main" id="{A2B51022-3E0F-4FF3-9DD4-6466E7683500}"/>
               </a:ext>
             </a:extLst>
           </p:cNvPr>
@@ -9675,7 +9675,7 @@
           <p:cNvPr id="4" name="">
             <a:extLst xmlns:a="http://schemas.openxmlformats.org/drawingml/2006/main">
               <a:ext uri="{FF2B5EF4-FFF2-40B4-BE49-F238E27FC236}">
-                <a16:creationId xmlns:a16="http://schemas.microsoft.com/office/drawing/2014/main" id="{0DD9BF3C-AACD-48CE-803D-3CC68F2808F1}"/>
+                <a16:creationId xmlns:a16="http://schemas.microsoft.com/office/drawing/2014/main" id="{4EA6D128-6C79-41EF-8561-AEE00FD9FDE4}"/>
               </a:ext>
             </a:extLst>
           </p:cNvPr>
@@ -9708,7 +9708,7 @@
           <p:cNvPr id="5" name="">
             <a:extLst xmlns:a="http://schemas.openxmlformats.org/drawingml/2006/main">
               <a:ext uri="{FF2B5EF4-FFF2-40B4-BE49-F238E27FC236}">
-                <a16:creationId xmlns:a16="http://schemas.microsoft.com/office/drawing/2014/main" id="{96081F30-2D0D-43C8-B074-F3D437A8F5DA}"/>
+                <a16:creationId xmlns:a16="http://schemas.microsoft.com/office/drawing/2014/main" id="{33674737-A26F-4324-9CA5-17EEDD5CE5CE}"/>
               </a:ext>
             </a:extLst>
           </p:cNvPr>
@@ -9758,7 +9758,7 @@
           <p:cNvPr id="6" name="">
             <a:extLst xmlns:a="http://schemas.openxmlformats.org/drawingml/2006/main">
               <a:ext uri="{FF2B5EF4-FFF2-40B4-BE49-F238E27FC236}">
-                <a16:creationId xmlns:a16="http://schemas.microsoft.com/office/drawing/2014/main" id="{38E2F062-E049-4441-84E1-1191CC6EAD21}"/>
+                <a16:creationId xmlns:a16="http://schemas.microsoft.com/office/drawing/2014/main" id="{9A0D2022-AB04-4FF0-966F-7EEDF81CCE1D}"/>
               </a:ext>
             </a:extLst>
           </p:cNvPr>
@@ -9808,7 +9808,7 @@
           <p:cNvPr id="7" name="">
             <a:extLst xmlns:a="http://schemas.openxmlformats.org/drawingml/2006/main">
               <a:ext uri="{FF2B5EF4-FFF2-40B4-BE49-F238E27FC236}">
-                <a16:creationId xmlns:a16="http://schemas.microsoft.com/office/drawing/2014/main" id="{1FA09185-2DC1-4FBA-B567-5F631FD0976B}"/>
+                <a16:creationId xmlns:a16="http://schemas.microsoft.com/office/drawing/2014/main" id="{B8397B12-8CF4-4F90-9885-41A6ECABD7D1}"/>
               </a:ext>
             </a:extLst>
           </p:cNvPr>
@@ -9841,7 +9841,7 @@
           <p:cNvPr id="8" name="">
             <a:extLst xmlns:a="http://schemas.openxmlformats.org/drawingml/2006/main">
               <a:ext uri="{FF2B5EF4-FFF2-40B4-BE49-F238E27FC236}">
-                <a16:creationId xmlns:a16="http://schemas.microsoft.com/office/drawing/2014/main" id="{4017E95D-C7F7-41B8-B8EA-C779403CC009}"/>
+                <a16:creationId xmlns:a16="http://schemas.microsoft.com/office/drawing/2014/main" id="{1F92B018-9E3C-49CA-8654-B1C269C39838}"/>
               </a:ext>
             </a:extLst>
           </p:cNvPr>
@@ -9891,7 +9891,7 @@
           <p:cNvPr id="9" name="">
             <a:extLst xmlns:a="http://schemas.openxmlformats.org/drawingml/2006/main">
               <a:ext uri="{FF2B5EF4-FFF2-40B4-BE49-F238E27FC236}">
-                <a16:creationId xmlns:a16="http://schemas.microsoft.com/office/drawing/2014/main" id="{A15E5E82-EF61-4FA0-B8CE-92F707EFD868}"/>
+                <a16:creationId xmlns:a16="http://schemas.microsoft.com/office/drawing/2014/main" id="{11CEB66F-CC61-48D9-AF36-E9BFCDA2F8F0}"/>
               </a:ext>
             </a:extLst>
           </p:cNvPr>
@@ -9941,7 +9941,7 @@
           <p:cNvPr id="10" name="">
             <a:extLst xmlns:a="http://schemas.openxmlformats.org/drawingml/2006/main">
               <a:ext uri="{FF2B5EF4-FFF2-40B4-BE49-F238E27FC236}">
-                <a16:creationId xmlns:a16="http://schemas.microsoft.com/office/drawing/2014/main" id="{820A303C-6030-4952-A537-769D51D9B30C}"/>
+                <a16:creationId xmlns:a16="http://schemas.microsoft.com/office/drawing/2014/main" id="{9CFB265D-CB68-487C-A157-A87456BB728D}"/>
               </a:ext>
             </a:extLst>
           </p:cNvPr>
@@ -9974,7 +9974,7 @@
           <p:cNvPr id="11" name="">
             <a:extLst xmlns:a="http://schemas.openxmlformats.org/drawingml/2006/main">
               <a:ext uri="{FF2B5EF4-FFF2-40B4-BE49-F238E27FC236}">
-                <a16:creationId xmlns:a16="http://schemas.microsoft.com/office/drawing/2014/main" id="{7169E933-18C4-48B6-9D53-E1F6DAB22031}"/>
+                <a16:creationId xmlns:a16="http://schemas.microsoft.com/office/drawing/2014/main" id="{613784FA-0755-472D-9EA5-AB5FA2753E48}"/>
               </a:ext>
             </a:extLst>
           </p:cNvPr>
@@ -10024,7 +10024,7 @@
           <p:cNvPr id="12" name="">
             <a:extLst xmlns:a="http://schemas.openxmlformats.org/drawingml/2006/main">
               <a:ext uri="{FF2B5EF4-FFF2-40B4-BE49-F238E27FC236}">
-                <a16:creationId xmlns:a16="http://schemas.microsoft.com/office/drawing/2014/main" id="{ED1295A3-42D1-4E2F-860B-0E6C77F95CF5}"/>
+                <a16:creationId xmlns:a16="http://schemas.microsoft.com/office/drawing/2014/main" id="{7C91CEFE-8BFC-4E0F-84E4-FEDA626CFFCE}"/>
               </a:ext>
             </a:extLst>
           </p:cNvPr>
@@ -10074,7 +10074,7 @@
           <p:cNvPr id="13" name="">
             <a:extLst xmlns:a="http://schemas.openxmlformats.org/drawingml/2006/main">
               <a:ext uri="{FF2B5EF4-FFF2-40B4-BE49-F238E27FC236}">
-                <a16:creationId xmlns:a16="http://schemas.microsoft.com/office/drawing/2014/main" id="{0DE5A097-1122-44BE-BABD-6DD7E60C5F70}"/>
+                <a16:creationId xmlns:a16="http://schemas.microsoft.com/office/drawing/2014/main" id="{F8FEA41B-FEC2-4EA3-8F4B-AC0E61FE2894}"/>
               </a:ext>
             </a:extLst>
           </p:cNvPr>
@@ -10107,7 +10107,7 @@
           <p:cNvPr id="14" name="">
             <a:extLst xmlns:a="http://schemas.openxmlformats.org/drawingml/2006/main">
               <a:ext uri="{FF2B5EF4-FFF2-40B4-BE49-F238E27FC236}">
-                <a16:creationId xmlns:a16="http://schemas.microsoft.com/office/drawing/2014/main" id="{F77AC894-F24C-41B4-B16D-222CBF76CDA0}"/>
+                <a16:creationId xmlns:a16="http://schemas.microsoft.com/office/drawing/2014/main" id="{3701E25E-55C4-42AB-B6FC-A3E9BA0A7281}"/>
               </a:ext>
             </a:extLst>
           </p:cNvPr>
@@ -10157,7 +10157,7 @@
           <p:cNvPr id="15" name="">
             <a:extLst xmlns:a="http://schemas.openxmlformats.org/drawingml/2006/main">
               <a:ext uri="{FF2B5EF4-FFF2-40B4-BE49-F238E27FC236}">
-                <a16:creationId xmlns:a16="http://schemas.microsoft.com/office/drawing/2014/main" id="{C7E796F2-D5A8-47F7-B49F-522D86C694A8}"/>
+                <a16:creationId xmlns:a16="http://schemas.microsoft.com/office/drawing/2014/main" id="{F33BAD91-E91B-41F6-AA35-328F4B4439C9}"/>
               </a:ext>
             </a:extLst>
           </p:cNvPr>
@@ -10207,7 +10207,7 @@
           <p:cNvPr id="16" name="">
             <a:extLst xmlns:a="http://schemas.openxmlformats.org/drawingml/2006/main">
               <a:ext uri="{FF2B5EF4-FFF2-40B4-BE49-F238E27FC236}">
-                <a16:creationId xmlns:a16="http://schemas.microsoft.com/office/drawing/2014/main" id="{F14C301C-CE05-4EEC-8970-4CAAEF63A91F}"/>
+                <a16:creationId xmlns:a16="http://schemas.microsoft.com/office/drawing/2014/main" id="{B83DED48-66C8-47A2-BB93-DA265CE1E3EC}"/>
               </a:ext>
             </a:extLst>
           </p:cNvPr>
@@ -10308,7 +10308,7 @@
           <p:cNvPr id="17" name="">
             <a:extLst xmlns:a="http://schemas.openxmlformats.org/drawingml/2006/main">
               <a:ext uri="{FF2B5EF4-FFF2-40B4-BE49-F238E27FC236}">
-                <a16:creationId xmlns:a16="http://schemas.microsoft.com/office/drawing/2014/main" id="{699E625C-099D-4AEA-A94D-802311AB8E6F}"/>
+                <a16:creationId xmlns:a16="http://schemas.microsoft.com/office/drawing/2014/main" id="{68C7478B-C473-48CC-B552-AEE7837CDB3D}"/>
               </a:ext>
             </a:extLst>
           </p:cNvPr>
@@ -10358,7 +10358,7 @@
           <p:cNvPr id="18" name="">
             <a:extLst xmlns:a="http://schemas.openxmlformats.org/drawingml/2006/main">
               <a:ext uri="{FF2B5EF4-FFF2-40B4-BE49-F238E27FC236}">
-                <a16:creationId xmlns:a16="http://schemas.microsoft.com/office/drawing/2014/main" id="{1DFE2CE6-F4AE-4061-B4CA-DB6865214938}"/>
+                <a16:creationId xmlns:a16="http://schemas.microsoft.com/office/drawing/2014/main" id="{E3AC45E9-87E5-4A32-84DC-498FAAB95886}"/>
               </a:ext>
             </a:extLst>
           </p:cNvPr>
@@ -10406,7 +10406,7 @@
     </p:spTree>
     <p:extLst>
       <p:ext uri="{BB962C8B-B14F-4D97-AF65-F5344CB8AC3E}">
-        <p14:creationId xmlns:p14="http://schemas.microsoft.com/office/powerpoint/2010/main" val="1874748929"/>
+        <p14:creationId xmlns:p14="http://schemas.microsoft.com/office/powerpoint/2010/main" val="1444503630"/>
       </p:ext>
     </p:extLst>
   </p:cSld>
@@ -10437,7 +10437,7 @@
           <p:cNvPr id="1" name="">
             <a:extLst xmlns:a="http://schemas.openxmlformats.org/drawingml/2006/main">
               <a:ext uri="{FF2B5EF4-FFF2-40B4-BE49-F238E27FC236}">
-                <a16:creationId xmlns:a16="http://schemas.microsoft.com/office/drawing/2014/main" id="{6E800A40-3D8D-4B51-8BF0-B727072FA390}"/>
+                <a16:creationId xmlns:a16="http://schemas.microsoft.com/office/drawing/2014/main" id="{59DABCE7-BF8A-47FD-913C-9CB21C2BE803}"/>
               </a:ext>
             </a:extLst>
           </p:cNvPr>
@@ -10487,7 +10487,7 @@
           <p:cNvPr id="2" name="">
             <a:extLst xmlns:a="http://schemas.openxmlformats.org/drawingml/2006/main">
               <a:ext uri="{FF2B5EF4-FFF2-40B4-BE49-F238E27FC236}">
-                <a16:creationId xmlns:a16="http://schemas.microsoft.com/office/drawing/2014/main" id="{A3F02873-0D38-4846-B846-048C58883EAE}"/>
+                <a16:creationId xmlns:a16="http://schemas.microsoft.com/office/drawing/2014/main" id="{996C5BE8-C375-4CDD-96B9-CC5CA12F7843}"/>
               </a:ext>
             </a:extLst>
           </p:cNvPr>
@@ -10527,7 +10527,7 @@
                   <a:srgbClr val="020618"/>
                 </a:solidFill>
               </a:rPr>
-              <a:t>Brechas Para Cumplir la Pauta Final</a:t>
+              <a:t>Evolucion Posterior al Alcance</a:t>
             </a:r>
           </a:p>
         </p:txBody>
@@ -10537,7 +10537,7 @@
           <p:cNvPr id="3" name="">
             <a:extLst xmlns:a="http://schemas.openxmlformats.org/drawingml/2006/main">
               <a:ext uri="{FF2B5EF4-FFF2-40B4-BE49-F238E27FC236}">
-                <a16:creationId xmlns:a16="http://schemas.microsoft.com/office/drawing/2014/main" id="{EF44C686-CE4F-4EBE-9FC0-0B54C45BB20D}"/>
+                <a16:creationId xmlns:a16="http://schemas.microsoft.com/office/drawing/2014/main" id="{8411C895-9A42-4EA9-ADF5-7821B07782E7}"/>
               </a:ext>
             </a:extLst>
           </p:cNvPr>
@@ -10568,7 +10568,7 @@
           <p:cNvPr id="4" name="">
             <a:extLst xmlns:a="http://schemas.openxmlformats.org/drawingml/2006/main">
               <a:ext uri="{FF2B5EF4-FFF2-40B4-BE49-F238E27FC236}">
-                <a16:creationId xmlns:a16="http://schemas.microsoft.com/office/drawing/2014/main" id="{860D4280-4CE9-4734-ABD2-3605F8969730}"/>
+                <a16:creationId xmlns:a16="http://schemas.microsoft.com/office/drawing/2014/main" id="{AD04A7AA-F3FE-4334-B55B-F28254CAA8D6}"/>
               </a:ext>
             </a:extLst>
           </p:cNvPr>
@@ -10601,7 +10601,7 @@
           <p:cNvPr id="5" name="">
             <a:extLst xmlns:a="http://schemas.openxmlformats.org/drawingml/2006/main">
               <a:ext uri="{FF2B5EF4-FFF2-40B4-BE49-F238E27FC236}">
-                <a16:creationId xmlns:a16="http://schemas.microsoft.com/office/drawing/2014/main" id="{06870754-2B12-4A57-9AAB-CC50EB348D1D}"/>
+                <a16:creationId xmlns:a16="http://schemas.microsoft.com/office/drawing/2014/main" id="{1BFC9AD1-601A-4BB1-A602-C67CA264187D}"/>
               </a:ext>
             </a:extLst>
           </p:cNvPr>
@@ -10641,7 +10641,7 @@
                   <a:srgbClr val="020618"/>
                 </a:solidFill>
               </a:rPr>
-              <a:t>Prioridad</a:t>
+              <a:t>Horizonte</a:t>
             </a:r>
           </a:p>
         </p:txBody>
@@ -10651,7 +10651,7 @@
           <p:cNvPr id="6" name="">
             <a:extLst xmlns:a="http://schemas.openxmlformats.org/drawingml/2006/main">
               <a:ext uri="{FF2B5EF4-FFF2-40B4-BE49-F238E27FC236}">
-                <a16:creationId xmlns:a16="http://schemas.microsoft.com/office/drawing/2014/main" id="{A45A5BD4-B637-40DE-8565-0E7CBBDD8CE4}"/>
+                <a16:creationId xmlns:a16="http://schemas.microsoft.com/office/drawing/2014/main" id="{CB2E0B97-43D7-43D0-8FE7-1C59E9C53269}"/>
               </a:ext>
             </a:extLst>
           </p:cNvPr>
@@ -10684,7 +10684,7 @@
           <p:cNvPr id="7" name="">
             <a:extLst xmlns:a="http://schemas.openxmlformats.org/drawingml/2006/main">
               <a:ext uri="{FF2B5EF4-FFF2-40B4-BE49-F238E27FC236}">
-                <a16:creationId xmlns:a16="http://schemas.microsoft.com/office/drawing/2014/main" id="{D431CFAD-A169-4D34-97E8-A8F5DA8E2049}"/>
+                <a16:creationId xmlns:a16="http://schemas.microsoft.com/office/drawing/2014/main" id="{FCE52165-C93E-4197-9CE6-7B1CBF46AD70}"/>
               </a:ext>
             </a:extLst>
           </p:cNvPr>
@@ -10724,7 +10724,7 @@
                   <a:srgbClr val="020618"/>
                 </a:solidFill>
               </a:rPr>
-              <a:t>Trabajo faltante</a:t>
+              <a:t>Mejora propuesta</a:t>
             </a:r>
           </a:p>
         </p:txBody>
@@ -10734,7 +10734,7 @@
           <p:cNvPr id="8" name="">
             <a:extLst xmlns:a="http://schemas.openxmlformats.org/drawingml/2006/main">
               <a:ext uri="{FF2B5EF4-FFF2-40B4-BE49-F238E27FC236}">
-                <a16:creationId xmlns:a16="http://schemas.microsoft.com/office/drawing/2014/main" id="{D1A8D1AA-8485-44E7-A17B-E3A9E75F0FE1}"/>
+                <a16:creationId xmlns:a16="http://schemas.microsoft.com/office/drawing/2014/main" id="{7693E8A3-E350-4D0E-A841-4D23F80628A9}"/>
               </a:ext>
             </a:extLst>
           </p:cNvPr>
@@ -10767,7 +10767,7 @@
           <p:cNvPr id="9" name="">
             <a:extLst xmlns:a="http://schemas.openxmlformats.org/drawingml/2006/main">
               <a:ext uri="{FF2B5EF4-FFF2-40B4-BE49-F238E27FC236}">
-                <a16:creationId xmlns:a16="http://schemas.microsoft.com/office/drawing/2014/main" id="{7774A342-DB72-4B7D-B8E1-457D1A8FF324}"/>
+                <a16:creationId xmlns:a16="http://schemas.microsoft.com/office/drawing/2014/main" id="{975C83CA-1FBE-43B3-A0F6-C9B47EFB4C37}"/>
               </a:ext>
             </a:extLst>
           </p:cNvPr>
@@ -10817,7 +10817,7 @@
           <p:cNvPr id="10" name="">
             <a:extLst xmlns:a="http://schemas.openxmlformats.org/drawingml/2006/main">
               <a:ext uri="{FF2B5EF4-FFF2-40B4-BE49-F238E27FC236}">
-                <a16:creationId xmlns:a16="http://schemas.microsoft.com/office/drawing/2014/main" id="{7B628D9D-3AAA-4187-86CC-941929409C51}"/>
+                <a16:creationId xmlns:a16="http://schemas.microsoft.com/office/drawing/2014/main" id="{19D1C40A-362C-43D8-A36A-D5383E534E34}"/>
               </a:ext>
             </a:extLst>
           </p:cNvPr>
@@ -10850,7 +10850,7 @@
           <p:cNvPr id="11" name="">
             <a:extLst xmlns:a="http://schemas.openxmlformats.org/drawingml/2006/main">
               <a:ext uri="{FF2B5EF4-FFF2-40B4-BE49-F238E27FC236}">
-                <a16:creationId xmlns:a16="http://schemas.microsoft.com/office/drawing/2014/main" id="{CF036C0E-369A-416E-9345-1C53D9454A49}"/>
+                <a16:creationId xmlns:a16="http://schemas.microsoft.com/office/drawing/2014/main" id="{A62CFED8-A84D-417D-98B3-6F10878A9BF8}"/>
               </a:ext>
             </a:extLst>
           </p:cNvPr>
@@ -10890,7 +10890,7 @@
                   <a:srgbClr val="020618"/>
                 </a:solidFill>
               </a:rPr>
-              <a:t>Alta</a:t>
+              <a:t>Corto</a:t>
             </a:r>
           </a:p>
         </p:txBody>
@@ -10900,7 +10900,7 @@
           <p:cNvPr id="12" name="">
             <a:extLst xmlns:a="http://schemas.openxmlformats.org/drawingml/2006/main">
               <a:ext uri="{FF2B5EF4-FFF2-40B4-BE49-F238E27FC236}">
-                <a16:creationId xmlns:a16="http://schemas.microsoft.com/office/drawing/2014/main" id="{01CA3FA1-ED68-457C-8F64-E06FC4223F0E}"/>
+                <a16:creationId xmlns:a16="http://schemas.microsoft.com/office/drawing/2014/main" id="{DF8DBE73-8A83-488D-AC53-9ACBE543CF97}"/>
               </a:ext>
             </a:extLst>
           </p:cNvPr>
@@ -10933,7 +10933,7 @@
           <p:cNvPr id="13" name="">
             <a:extLst xmlns:a="http://schemas.openxmlformats.org/drawingml/2006/main">
               <a:ext uri="{FF2B5EF4-FFF2-40B4-BE49-F238E27FC236}">
-                <a16:creationId xmlns:a16="http://schemas.microsoft.com/office/drawing/2014/main" id="{C01C21EB-4B2B-4710-8479-FE20E01FE2C0}"/>
+                <a16:creationId xmlns:a16="http://schemas.microsoft.com/office/drawing/2014/main" id="{6C304BD9-FDCA-4D8A-A88A-A705C6A285CE}"/>
               </a:ext>
             </a:extLst>
           </p:cNvPr>
@@ -10973,7 +10973,7 @@
                   <a:srgbClr val="020618"/>
                 </a:solidFill>
               </a:rPr>
-              <a:t>Completar 100% CU/RF</a:t>
+              <a:t>Ampliar matriz CU/RF</a:t>
             </a:r>
           </a:p>
         </p:txBody>
@@ -10983,7 +10983,7 @@
           <p:cNvPr id="14" name="">
             <a:extLst xmlns:a="http://schemas.openxmlformats.org/drawingml/2006/main">
               <a:ext uri="{FF2B5EF4-FFF2-40B4-BE49-F238E27FC236}">
-                <a16:creationId xmlns:a16="http://schemas.microsoft.com/office/drawing/2014/main" id="{FB0FF991-0CB7-413D-A5E4-424766C2BECD}"/>
+                <a16:creationId xmlns:a16="http://schemas.microsoft.com/office/drawing/2014/main" id="{D9C6C5C6-8722-4936-AA02-D1A5A2FBA343}"/>
               </a:ext>
             </a:extLst>
           </p:cNvPr>
@@ -11016,7 +11016,7 @@
           <p:cNvPr id="15" name="">
             <a:extLst xmlns:a="http://schemas.openxmlformats.org/drawingml/2006/main">
               <a:ext uri="{FF2B5EF4-FFF2-40B4-BE49-F238E27FC236}">
-                <a16:creationId xmlns:a16="http://schemas.microsoft.com/office/drawing/2014/main" id="{C6578540-B172-4E63-BB7C-5C4DA146174C}"/>
+                <a16:creationId xmlns:a16="http://schemas.microsoft.com/office/drawing/2014/main" id="{E3536072-5C7A-4F40-91DB-F3DC5C1947F0}"/>
               </a:ext>
             </a:extLst>
           </p:cNvPr>
@@ -11056,7 +11056,7 @@
                   <a:srgbClr val="020618"/>
                 </a:solidFill>
               </a:rPr>
-              <a:t>Matriz RF01-RF20 implementada y demo funcional</a:t>
+              <a:t>Trazabilidad para todo el backlog del producto</a:t>
             </a:r>
           </a:p>
         </p:txBody>
@@ -11066,7 +11066,7 @@
           <p:cNvPr id="16" name="">
             <a:extLst xmlns:a="http://schemas.openxmlformats.org/drawingml/2006/main">
               <a:ext uri="{FF2B5EF4-FFF2-40B4-BE49-F238E27FC236}">
-                <a16:creationId xmlns:a16="http://schemas.microsoft.com/office/drawing/2014/main" id="{D94F5CBF-A1E9-4915-A3A5-4DD114984D04}"/>
+                <a16:creationId xmlns:a16="http://schemas.microsoft.com/office/drawing/2014/main" id="{04294E4C-782A-4312-8A64-B5050233A8D2}"/>
               </a:ext>
             </a:extLst>
           </p:cNvPr>
@@ -11099,7 +11099,7 @@
           <p:cNvPr id="17" name="">
             <a:extLst xmlns:a="http://schemas.openxmlformats.org/drawingml/2006/main">
               <a:ext uri="{FF2B5EF4-FFF2-40B4-BE49-F238E27FC236}">
-                <a16:creationId xmlns:a16="http://schemas.microsoft.com/office/drawing/2014/main" id="{8BD79E7E-7D55-42F2-A77B-33FD371F9457}"/>
+                <a16:creationId xmlns:a16="http://schemas.microsoft.com/office/drawing/2014/main" id="{0D3C904E-EC26-4416-8164-15ABA58FA9B9}"/>
               </a:ext>
             </a:extLst>
           </p:cNvPr>
@@ -11139,7 +11139,7 @@
                   <a:srgbClr val="020618"/>
                 </a:solidFill>
               </a:rPr>
-              <a:t>Alta</a:t>
+              <a:t>Corto</a:t>
             </a:r>
           </a:p>
         </p:txBody>
@@ -11149,7 +11149,7 @@
           <p:cNvPr id="18" name="">
             <a:extLst xmlns:a="http://schemas.openxmlformats.org/drawingml/2006/main">
               <a:ext uri="{FF2B5EF4-FFF2-40B4-BE49-F238E27FC236}">
-                <a16:creationId xmlns:a16="http://schemas.microsoft.com/office/drawing/2014/main" id="{18ACDABB-2A5C-48D9-A6BC-0F9FFEBF09D1}"/>
+                <a16:creationId xmlns:a16="http://schemas.microsoft.com/office/drawing/2014/main" id="{4EB0B8EC-1A94-476F-A55A-8D454AE27D82}"/>
               </a:ext>
             </a:extLst>
           </p:cNvPr>
@@ -11182,7 +11182,7 @@
           <p:cNvPr id="19" name="">
             <a:extLst xmlns:a="http://schemas.openxmlformats.org/drawingml/2006/main">
               <a:ext uri="{FF2B5EF4-FFF2-40B4-BE49-F238E27FC236}">
-                <a16:creationId xmlns:a16="http://schemas.microsoft.com/office/drawing/2014/main" id="{065A57FC-3CD4-4E91-B3FF-7268E518A49E}"/>
+                <a16:creationId xmlns:a16="http://schemas.microsoft.com/office/drawing/2014/main" id="{702C652C-16A6-4B1A-B325-0DF45683A6DE}"/>
               </a:ext>
             </a:extLst>
           </p:cNvPr>
@@ -11222,7 +11222,7 @@
                   <a:srgbClr val="020618"/>
                 </a:solidFill>
               </a:rPr>
-              <a:t>E2E para cada CU</a:t>
+              <a:t>E2E de flujos criticos</a:t>
             </a:r>
           </a:p>
         </p:txBody>
@@ -11232,7 +11232,7 @@
           <p:cNvPr id="20" name="">
             <a:extLst xmlns:a="http://schemas.openxmlformats.org/drawingml/2006/main">
               <a:ext uri="{FF2B5EF4-FFF2-40B4-BE49-F238E27FC236}">
-                <a16:creationId xmlns:a16="http://schemas.microsoft.com/office/drawing/2014/main" id="{11DD6766-9564-4B01-A26A-250F88D0931D}"/>
+                <a16:creationId xmlns:a16="http://schemas.microsoft.com/office/drawing/2014/main" id="{AFBE1D42-0D0D-4C6A-A6AC-EB9FDA81CAE9}"/>
               </a:ext>
             </a:extLst>
           </p:cNvPr>
@@ -11265,7 +11265,7 @@
           <p:cNvPr id="21" name="">
             <a:extLst xmlns:a="http://schemas.openxmlformats.org/drawingml/2006/main">
               <a:ext uri="{FF2B5EF4-FFF2-40B4-BE49-F238E27FC236}">
-                <a16:creationId xmlns:a16="http://schemas.microsoft.com/office/drawing/2014/main" id="{F7906E11-414F-49D8-8E5B-AF0875F27F0E}"/>
+                <a16:creationId xmlns:a16="http://schemas.microsoft.com/office/drawing/2014/main" id="{B2FAE628-2EBA-4AF9-A59F-906E23A43438}"/>
               </a:ext>
             </a:extLst>
           </p:cNvPr>
@@ -11315,7 +11315,7 @@
           <p:cNvPr id="22" name="">
             <a:extLst xmlns:a="http://schemas.openxmlformats.org/drawingml/2006/main">
               <a:ext uri="{FF2B5EF4-FFF2-40B4-BE49-F238E27FC236}">
-                <a16:creationId xmlns:a16="http://schemas.microsoft.com/office/drawing/2014/main" id="{BA5EEA27-5154-4C4A-9CD9-BD78E14F07F6}"/>
+                <a16:creationId xmlns:a16="http://schemas.microsoft.com/office/drawing/2014/main" id="{B659BB37-29B8-44A9-8421-DD4E05BEB122}"/>
               </a:ext>
             </a:extLst>
           </p:cNvPr>
@@ -11348,7 +11348,7 @@
           <p:cNvPr id="23" name="">
             <a:extLst xmlns:a="http://schemas.openxmlformats.org/drawingml/2006/main">
               <a:ext uri="{FF2B5EF4-FFF2-40B4-BE49-F238E27FC236}">
-                <a16:creationId xmlns:a16="http://schemas.microsoft.com/office/drawing/2014/main" id="{E0536455-0CA6-4E5E-8D6F-CD61FC8AAA5A}"/>
+                <a16:creationId xmlns:a16="http://schemas.microsoft.com/office/drawing/2014/main" id="{4D22458F-3BCB-4FA3-9C62-FCA35BBC8143}"/>
               </a:ext>
             </a:extLst>
           </p:cNvPr>
@@ -11388,7 +11388,7 @@
                   <a:srgbClr val="020618"/>
                 </a:solidFill>
               </a:rPr>
-              <a:t>Alta</a:t>
+              <a:t>Medio</a:t>
             </a:r>
           </a:p>
         </p:txBody>
@@ -11398,7 +11398,7 @@
           <p:cNvPr id="24" name="">
             <a:extLst xmlns:a="http://schemas.openxmlformats.org/drawingml/2006/main">
               <a:ext uri="{FF2B5EF4-FFF2-40B4-BE49-F238E27FC236}">
-                <a16:creationId xmlns:a16="http://schemas.microsoft.com/office/drawing/2014/main" id="{53475495-E3C6-4FA9-9891-7B7404618939}"/>
+                <a16:creationId xmlns:a16="http://schemas.microsoft.com/office/drawing/2014/main" id="{90DAEE87-AB88-4399-B070-41B7BEE651F9}"/>
               </a:ext>
             </a:extLst>
           </p:cNvPr>
@@ -11431,7 +11431,7 @@
           <p:cNvPr id="25" name="">
             <a:extLst xmlns:a="http://schemas.openxmlformats.org/drawingml/2006/main">
               <a:ext uri="{FF2B5EF4-FFF2-40B4-BE49-F238E27FC236}">
-                <a16:creationId xmlns:a16="http://schemas.microsoft.com/office/drawing/2014/main" id="{EC6AC741-F7C4-4EAE-9262-4855F3A8DCA4}"/>
+                <a16:creationId xmlns:a16="http://schemas.microsoft.com/office/drawing/2014/main" id="{8CF62626-D753-48B2-AF43-C94D3D590E32}"/>
               </a:ext>
             </a:extLst>
           </p:cNvPr>
@@ -11481,7 +11481,7 @@
           <p:cNvPr id="26" name="">
             <a:extLst xmlns:a="http://schemas.openxmlformats.org/drawingml/2006/main">
               <a:ext uri="{FF2B5EF4-FFF2-40B4-BE49-F238E27FC236}">
-                <a16:creationId xmlns:a16="http://schemas.microsoft.com/office/drawing/2014/main" id="{2532038B-5B19-4676-A036-8063CDF87E6E}"/>
+                <a16:creationId xmlns:a16="http://schemas.microsoft.com/office/drawing/2014/main" id="{F7280AAA-2A45-4273-BC0C-EC3BB8B78351}"/>
               </a:ext>
             </a:extLst>
           </p:cNvPr>
@@ -11514,7 +11514,7 @@
           <p:cNvPr id="27" name="">
             <a:extLst xmlns:a="http://schemas.openxmlformats.org/drawingml/2006/main">
               <a:ext uri="{FF2B5EF4-FFF2-40B4-BE49-F238E27FC236}">
-                <a16:creationId xmlns:a16="http://schemas.microsoft.com/office/drawing/2014/main" id="{1364EFA6-319C-47B0-9A24-079E6F0C0CDD}"/>
+                <a16:creationId xmlns:a16="http://schemas.microsoft.com/office/drawing/2014/main" id="{3E0688B6-948C-4AD2-A857-80A18140D633}"/>
               </a:ext>
             </a:extLst>
           </p:cNvPr>
@@ -11564,7 +11564,7 @@
           <p:cNvPr id="28" name="">
             <a:extLst xmlns:a="http://schemas.openxmlformats.org/drawingml/2006/main">
               <a:ext uri="{FF2B5EF4-FFF2-40B4-BE49-F238E27FC236}">
-                <a16:creationId xmlns:a16="http://schemas.microsoft.com/office/drawing/2014/main" id="{53541425-68C9-45C9-9BD6-3B5886616E32}"/>
+                <a16:creationId xmlns:a16="http://schemas.microsoft.com/office/drawing/2014/main" id="{ECAE29F6-AF3B-492A-8112-B2755179F63A}"/>
               </a:ext>
             </a:extLst>
           </p:cNvPr>
@@ -11597,7 +11597,7 @@
           <p:cNvPr id="29" name="">
             <a:extLst xmlns:a="http://schemas.openxmlformats.org/drawingml/2006/main">
               <a:ext uri="{FF2B5EF4-FFF2-40B4-BE49-F238E27FC236}">
-                <a16:creationId xmlns:a16="http://schemas.microsoft.com/office/drawing/2014/main" id="{82C30C6D-8356-46ED-B12E-FEE3E4D4F44D}"/>
+                <a16:creationId xmlns:a16="http://schemas.microsoft.com/office/drawing/2014/main" id="{BD47F91F-EFA8-4B72-880A-501B925C602C}"/>
               </a:ext>
             </a:extLst>
           </p:cNvPr>
@@ -11637,7 +11637,7 @@
                   <a:srgbClr val="020618"/>
                 </a:solidFill>
               </a:rPr>
-              <a:t>Alta</a:t>
+              <a:t>Medio</a:t>
             </a:r>
           </a:p>
         </p:txBody>
@@ -11647,7 +11647,7 @@
           <p:cNvPr id="30" name="">
             <a:extLst xmlns:a="http://schemas.openxmlformats.org/drawingml/2006/main">
               <a:ext uri="{FF2B5EF4-FFF2-40B4-BE49-F238E27FC236}">
-                <a16:creationId xmlns:a16="http://schemas.microsoft.com/office/drawing/2014/main" id="{AEBF7337-0683-4658-A2A0-C26B304D9FBD}"/>
+                <a16:creationId xmlns:a16="http://schemas.microsoft.com/office/drawing/2014/main" id="{9E2BAA6E-3E6C-418F-BC94-0F7A14101D73}"/>
               </a:ext>
             </a:extLst>
           </p:cNvPr>
@@ -11680,7 +11680,7 @@
           <p:cNvPr id="31" name="">
             <a:extLst xmlns:a="http://schemas.openxmlformats.org/drawingml/2006/main">
               <a:ext uri="{FF2B5EF4-FFF2-40B4-BE49-F238E27FC236}">
-                <a16:creationId xmlns:a16="http://schemas.microsoft.com/office/drawing/2014/main" id="{05E060B4-B93C-442F-88D2-283CAB8B72AE}"/>
+                <a16:creationId xmlns:a16="http://schemas.microsoft.com/office/drawing/2014/main" id="{B8D60A0C-56DB-4EF1-92B2-CE99170DED4D}"/>
               </a:ext>
             </a:extLst>
           </p:cNvPr>
@@ -11730,7 +11730,7 @@
           <p:cNvPr id="32" name="">
             <a:extLst xmlns:a="http://schemas.openxmlformats.org/drawingml/2006/main">
               <a:ext uri="{FF2B5EF4-FFF2-40B4-BE49-F238E27FC236}">
-                <a16:creationId xmlns:a16="http://schemas.microsoft.com/office/drawing/2014/main" id="{05BE0CC7-C307-48F1-BECF-0F84D1B9F7E0}"/>
+                <a16:creationId xmlns:a16="http://schemas.microsoft.com/office/drawing/2014/main" id="{504A2DDC-35B7-44E1-ABC6-B7EAE7F84F18}"/>
               </a:ext>
             </a:extLst>
           </p:cNvPr>
@@ -11763,7 +11763,7 @@
           <p:cNvPr id="33" name="">
             <a:extLst xmlns:a="http://schemas.openxmlformats.org/drawingml/2006/main">
               <a:ext uri="{FF2B5EF4-FFF2-40B4-BE49-F238E27FC236}">
-                <a16:creationId xmlns:a16="http://schemas.microsoft.com/office/drawing/2014/main" id="{619DDA43-F7C8-40DB-92C3-DCFCE5A84133}"/>
+                <a16:creationId xmlns:a16="http://schemas.microsoft.com/office/drawing/2014/main" id="{36A7F426-EE38-49BB-8D3E-BA28C106171B}"/>
               </a:ext>
             </a:extLst>
           </p:cNvPr>
@@ -11813,7 +11813,7 @@
           <p:cNvPr id="34" name="">
             <a:extLst xmlns:a="http://schemas.openxmlformats.org/drawingml/2006/main">
               <a:ext uri="{FF2B5EF4-FFF2-40B4-BE49-F238E27FC236}">
-                <a16:creationId xmlns:a16="http://schemas.microsoft.com/office/drawing/2014/main" id="{091D32C6-812E-48DE-8274-AA9FB2AE81B0}"/>
+                <a16:creationId xmlns:a16="http://schemas.microsoft.com/office/drawing/2014/main" id="{A1DCF46F-3A6F-43FC-AD1B-10FB8BD3B64A}"/>
               </a:ext>
             </a:extLst>
           </p:cNvPr>
@@ -11846,7 +11846,7 @@
           <p:cNvPr id="35" name="">
             <a:extLst xmlns:a="http://schemas.openxmlformats.org/drawingml/2006/main">
               <a:ext uri="{FF2B5EF4-FFF2-40B4-BE49-F238E27FC236}">
-                <a16:creationId xmlns:a16="http://schemas.microsoft.com/office/drawing/2014/main" id="{DE1DD9F0-6730-44D3-AB84-866B45C3BB33}"/>
+                <a16:creationId xmlns:a16="http://schemas.microsoft.com/office/drawing/2014/main" id="{1E8F6E87-30D9-499D-950C-92D7D5288DCE}"/>
               </a:ext>
             </a:extLst>
           </p:cNvPr>
@@ -11886,7 +11886,7 @@
                   <a:srgbClr val="020618"/>
                 </a:solidFill>
               </a:rPr>
-              <a:t>Media</a:t>
+              <a:t>Continuo</a:t>
             </a:r>
           </a:p>
         </p:txBody>
@@ -11896,7 +11896,7 @@
           <p:cNvPr id="36" name="">
             <a:extLst xmlns:a="http://schemas.openxmlformats.org/drawingml/2006/main">
               <a:ext uri="{FF2B5EF4-FFF2-40B4-BE49-F238E27FC236}">
-                <a16:creationId xmlns:a16="http://schemas.microsoft.com/office/drawing/2014/main" id="{33042108-51DB-4F82-BAEB-CEF67FF73281}"/>
+                <a16:creationId xmlns:a16="http://schemas.microsoft.com/office/drawing/2014/main" id="{3503A918-21B4-407D-9BE5-8FC38503E6F0}"/>
               </a:ext>
             </a:extLst>
           </p:cNvPr>
@@ -11929,7 +11929,7 @@
           <p:cNvPr id="37" name="">
             <a:extLst xmlns:a="http://schemas.openxmlformats.org/drawingml/2006/main">
               <a:ext uri="{FF2B5EF4-FFF2-40B4-BE49-F238E27FC236}">
-                <a16:creationId xmlns:a16="http://schemas.microsoft.com/office/drawing/2014/main" id="{8B50FFBA-4785-44F0-8995-071DD06BF7EB}"/>
+                <a16:creationId xmlns:a16="http://schemas.microsoft.com/office/drawing/2014/main" id="{7C97EE63-8E38-4A6C-AC14-B169C76AF324}"/>
               </a:ext>
             </a:extLst>
           </p:cNvPr>
@@ -11969,7 +11969,7 @@
                   <a:srgbClr val="020618"/>
                 </a:solidFill>
               </a:rPr>
-              <a:t>Refactor deuda Sonar</a:t>
+              <a:t>Refactor mantenibilidad</a:t>
             </a:r>
           </a:p>
         </p:txBody>
@@ -11979,7 +11979,7 @@
           <p:cNvPr id="38" name="">
             <a:extLst xmlns:a="http://schemas.openxmlformats.org/drawingml/2006/main">
               <a:ext uri="{FF2B5EF4-FFF2-40B4-BE49-F238E27FC236}">
-                <a16:creationId xmlns:a16="http://schemas.microsoft.com/office/drawing/2014/main" id="{3CB7D123-2F20-40C5-86B2-AA30E21A9FEE}"/>
+                <a16:creationId xmlns:a16="http://schemas.microsoft.com/office/drawing/2014/main" id="{814CEF1B-5F75-4A9B-AF89-75E0DE21BBD9}"/>
               </a:ext>
             </a:extLst>
           </p:cNvPr>
@@ -12012,7 +12012,7 @@
           <p:cNvPr id="39" name="">
             <a:extLst xmlns:a="http://schemas.openxmlformats.org/drawingml/2006/main">
               <a:ext uri="{FF2B5EF4-FFF2-40B4-BE49-F238E27FC236}">
-                <a16:creationId xmlns:a16="http://schemas.microsoft.com/office/drawing/2014/main" id="{1C7927BB-AA26-492B-8A61-75D93A00A9D9}"/>
+                <a16:creationId xmlns:a16="http://schemas.microsoft.com/office/drawing/2014/main" id="{8BD785E2-2877-41EB-8AC5-587D000B0968}"/>
               </a:ext>
             </a:extLst>
           </p:cNvPr>
@@ -12062,7 +12062,7 @@
           <p:cNvPr id="40" name="">
             <a:extLst xmlns:a="http://schemas.openxmlformats.org/drawingml/2006/main">
               <a:ext uri="{FF2B5EF4-FFF2-40B4-BE49-F238E27FC236}">
-                <a16:creationId xmlns:a16="http://schemas.microsoft.com/office/drawing/2014/main" id="{02C86608-1BF3-4BDE-96BB-C13BAE8AED9C}"/>
+                <a16:creationId xmlns:a16="http://schemas.microsoft.com/office/drawing/2014/main" id="{8E4763EB-13DB-418C-B692-6282BA716BCA}"/>
               </a:ext>
             </a:extLst>
           </p:cNvPr>
@@ -12102,7 +12102,7 @@
                   <a:srgbClr val="020618"/>
                 </a:solidFill>
               </a:rPr>
-              <a:t>Orden recomendado: cerrar CU → E2E → carga/Grafana → Sonar final → ZIP/video.</a:t>
+              <a:t>Lectura: estas acciones elevan madurez productiva; el alcance del ramo ya queda sustentado.</a:t>
             </a:r>
           </a:p>
         </p:txBody>
@@ -12112,7 +12112,7 @@
           <p:cNvPr id="41" name="">
             <a:extLst xmlns:a="http://schemas.openxmlformats.org/drawingml/2006/main">
               <a:ext uri="{FF2B5EF4-FFF2-40B4-BE49-F238E27FC236}">
-                <a16:creationId xmlns:a16="http://schemas.microsoft.com/office/drawing/2014/main" id="{F4398759-BF33-4704-8F68-548E70609DAF}"/>
+                <a16:creationId xmlns:a16="http://schemas.microsoft.com/office/drawing/2014/main" id="{B91AF1B2-1B51-492C-A3EB-EEA9BC4EE651}"/>
               </a:ext>
             </a:extLst>
           </p:cNvPr>
@@ -12162,7 +12162,7 @@
           <p:cNvPr id="42" name="">
             <a:extLst xmlns:a="http://schemas.openxmlformats.org/drawingml/2006/main">
               <a:ext uri="{FF2B5EF4-FFF2-40B4-BE49-F238E27FC236}">
-                <a16:creationId xmlns:a16="http://schemas.microsoft.com/office/drawing/2014/main" id="{FB2D6EDC-5B2A-49FA-84F6-131F0E3D1BD2}"/>
+                <a16:creationId xmlns:a16="http://schemas.microsoft.com/office/drawing/2014/main" id="{19BB93E2-8B97-4C46-9878-71BCCD94ED14}"/>
               </a:ext>
             </a:extLst>
           </p:cNvPr>
@@ -12210,7 +12210,7 @@
     </p:spTree>
     <p:extLst>
       <p:ext uri="{BB962C8B-B14F-4D97-AF65-F5344CB8AC3E}">
-        <p14:creationId xmlns:p14="http://schemas.microsoft.com/office/powerpoint/2010/main" val="286545021"/>
+        <p14:creationId xmlns:p14="http://schemas.microsoft.com/office/powerpoint/2010/main" val="1352342599"/>
       </p:ext>
     </p:extLst>
   </p:cSld>
@@ -12241,7 +12241,7 @@
           <p:cNvPr id="1" name="">
             <a:extLst xmlns:a="http://schemas.openxmlformats.org/drawingml/2006/main">
               <a:ext uri="{FF2B5EF4-FFF2-40B4-BE49-F238E27FC236}">
-                <a16:creationId xmlns:a16="http://schemas.microsoft.com/office/drawing/2014/main" id="{EF6DEED3-45FE-460A-B2FC-442011F92546}"/>
+                <a16:creationId xmlns:a16="http://schemas.microsoft.com/office/drawing/2014/main" id="{78B02103-B354-41AB-B456-8CCD186DC464}"/>
               </a:ext>
             </a:extLst>
           </p:cNvPr>
@@ -12291,7 +12291,7 @@
           <p:cNvPr id="2" name="">
             <a:extLst xmlns:a="http://schemas.openxmlformats.org/drawingml/2006/main">
               <a:ext uri="{FF2B5EF4-FFF2-40B4-BE49-F238E27FC236}">
-                <a16:creationId xmlns:a16="http://schemas.microsoft.com/office/drawing/2014/main" id="{C714732B-3F93-42CE-A4FD-4E57BFFA574E}"/>
+                <a16:creationId xmlns:a16="http://schemas.microsoft.com/office/drawing/2014/main" id="{8D8ECA18-82A6-4502-AD33-D019AECE9ED3}"/>
               </a:ext>
             </a:extLst>
           </p:cNvPr>
@@ -12341,7 +12341,7 @@
           <p:cNvPr id="3" name="">
             <a:extLst xmlns:a="http://schemas.openxmlformats.org/drawingml/2006/main">
               <a:ext uri="{FF2B5EF4-FFF2-40B4-BE49-F238E27FC236}">
-                <a16:creationId xmlns:a16="http://schemas.microsoft.com/office/drawing/2014/main" id="{B0232B19-60B6-411D-B0DE-8C96FFF79D2A}"/>
+                <a16:creationId xmlns:a16="http://schemas.microsoft.com/office/drawing/2014/main" id="{A85A2EA4-636E-46B6-A1C6-D6533C6836E9}"/>
               </a:ext>
             </a:extLst>
           </p:cNvPr>
@@ -12372,7 +12372,7 @@
           <p:cNvPr id="4" name="">
             <a:extLst xmlns:a="http://schemas.openxmlformats.org/drawingml/2006/main">
               <a:ext uri="{FF2B5EF4-FFF2-40B4-BE49-F238E27FC236}">
-                <a16:creationId xmlns:a16="http://schemas.microsoft.com/office/drawing/2014/main" id="{D3C3949B-B5E1-4E87-A0EB-8223822B103F}"/>
+                <a16:creationId xmlns:a16="http://schemas.microsoft.com/office/drawing/2014/main" id="{8FBBDAD0-4138-4048-82A8-88C37843FC54}"/>
               </a:ext>
             </a:extLst>
           </p:cNvPr>
@@ -12480,7 +12480,7 @@
                   <a:srgbClr val="020618"/>
                 </a:solidFill>
               </a:rPr>
-              <a:t>• Para la defensa final, aun faltan evidencias objetivas de 100% CU, E2E y carga/Grafana.</a:t>
+              <a:t>• E2E, carga y Grafana quedan como proyeccion natural para operacion productiva.</a:t>
             </a:r>
           </a:p>
         </p:txBody>
@@ -12490,7 +12490,7 @@
           <p:cNvPr id="5" name="">
             <a:extLst xmlns:a="http://schemas.openxmlformats.org/drawingml/2006/main">
               <a:ext uri="{FF2B5EF4-FFF2-40B4-BE49-F238E27FC236}">
-                <a16:creationId xmlns:a16="http://schemas.microsoft.com/office/drawing/2014/main" id="{950C8650-61F6-4FFE-8A24-E0844AD78697}"/>
+                <a16:creationId xmlns:a16="http://schemas.microsoft.com/office/drawing/2014/main" id="{FEDF9004-DCEA-46CC-B910-3B314A2C5E65}"/>
               </a:ext>
             </a:extLst>
           </p:cNvPr>
@@ -12523,7 +12523,7 @@
           <p:cNvPr id="6" name="">
             <a:extLst xmlns:a="http://schemas.openxmlformats.org/drawingml/2006/main">
               <a:ext uri="{FF2B5EF4-FFF2-40B4-BE49-F238E27FC236}">
-                <a16:creationId xmlns:a16="http://schemas.microsoft.com/office/drawing/2014/main" id="{06228612-50B4-4C75-B2F9-C0154CD20B19}"/>
+                <a16:creationId xmlns:a16="http://schemas.microsoft.com/office/drawing/2014/main" id="{F868048B-A5C2-4D77-A737-68079732AAA4}"/>
               </a:ext>
             </a:extLst>
           </p:cNvPr>
@@ -12553,17 +12553,17 @@
             <a:pPr algn="l">
               <a:defRPr sz="1800" b="1">
                 <a:solidFill>
-                  <a:srgbClr val="F54900"/>
+                  <a:srgbClr val="007A55"/>
                 </a:solidFill>
               </a:defRPr>
             </a:pPr>
             <a:r>
               <a:rPr sz="1800" b="1">
                 <a:solidFill>
-                  <a:srgbClr val="F54900"/>
-                </a:solidFill>
-              </a:rPr>
-              <a:t>Mensaje de cierre: la base tecnica es buena; el riesgo es evidenciar menos de lo que exige la pauta final.</a:t>
+                  <a:srgbClr val="007A55"/>
+                </a:solidFill>
+              </a:rPr>
+              <a:t>Mensaje de cierre: EcoSense queda defendible por evidencia tecnica, no solo por descripcion funcional.</a:t>
             </a:r>
           </a:p>
         </p:txBody>
@@ -12573,7 +12573,7 @@
           <p:cNvPr id="7" name="">
             <a:extLst xmlns:a="http://schemas.openxmlformats.org/drawingml/2006/main">
               <a:ext uri="{FF2B5EF4-FFF2-40B4-BE49-F238E27FC236}">
-                <a16:creationId xmlns:a16="http://schemas.microsoft.com/office/drawing/2014/main" id="{E7270FE4-5117-4535-9AB5-917DBA6C56AA}"/>
+                <a16:creationId xmlns:a16="http://schemas.microsoft.com/office/drawing/2014/main" id="{0CD408BE-40ED-45C2-A984-3B74D147B2B6}"/>
               </a:ext>
             </a:extLst>
           </p:cNvPr>
@@ -12623,7 +12623,7 @@
           <p:cNvPr id="8" name="">
             <a:extLst xmlns:a="http://schemas.openxmlformats.org/drawingml/2006/main">
               <a:ext uri="{FF2B5EF4-FFF2-40B4-BE49-F238E27FC236}">
-                <a16:creationId xmlns:a16="http://schemas.microsoft.com/office/drawing/2014/main" id="{0F91A38E-B881-46A0-854D-554E92D6B781}"/>
+                <a16:creationId xmlns:a16="http://schemas.microsoft.com/office/drawing/2014/main" id="{F0F259A9-1762-4F7D-A8E4-0260C88D5F56}"/>
               </a:ext>
             </a:extLst>
           </p:cNvPr>
@@ -12671,7 +12671,7 @@
     </p:spTree>
     <p:extLst>
       <p:ext uri="{BB962C8B-B14F-4D97-AF65-F5344CB8AC3E}">
-        <p14:creationId xmlns:p14="http://schemas.microsoft.com/office/powerpoint/2010/main" val="80786257"/>
+        <p14:creationId xmlns:p14="http://schemas.microsoft.com/office/powerpoint/2010/main" val="70386885"/>
       </p:ext>
     </p:extLst>
   </p:cSld>
@@ -12702,7 +12702,7 @@
           <p:cNvPr id="1" name="">
             <a:extLst xmlns:a="http://schemas.openxmlformats.org/drawingml/2006/main">
               <a:ext uri="{FF2B5EF4-FFF2-40B4-BE49-F238E27FC236}">
-                <a16:creationId xmlns:a16="http://schemas.microsoft.com/office/drawing/2014/main" id="{2A8DDBC6-2B60-431C-A1E3-DBC57B65D8EC}"/>
+                <a16:creationId xmlns:a16="http://schemas.microsoft.com/office/drawing/2014/main" id="{4FC0B5E6-1301-4D9A-9ECD-7B0D01222292}"/>
               </a:ext>
             </a:extLst>
           </p:cNvPr>
@@ -12752,7 +12752,7 @@
           <p:cNvPr id="2" name="">
             <a:extLst xmlns:a="http://schemas.openxmlformats.org/drawingml/2006/main">
               <a:ext uri="{FF2B5EF4-FFF2-40B4-BE49-F238E27FC236}">
-                <a16:creationId xmlns:a16="http://schemas.microsoft.com/office/drawing/2014/main" id="{871DAE77-8D56-44DA-B2D3-A527D0C781F1}"/>
+                <a16:creationId xmlns:a16="http://schemas.microsoft.com/office/drawing/2014/main" id="{F981F4A5-AD15-4328-9784-251E5A53EF6E}"/>
               </a:ext>
             </a:extLst>
           </p:cNvPr>
@@ -12802,7 +12802,7 @@
           <p:cNvPr id="3" name="">
             <a:extLst xmlns:a="http://schemas.openxmlformats.org/drawingml/2006/main">
               <a:ext uri="{FF2B5EF4-FFF2-40B4-BE49-F238E27FC236}">
-                <a16:creationId xmlns:a16="http://schemas.microsoft.com/office/drawing/2014/main" id="{224AC0CC-4345-4B51-8A06-6C3C349EC13E}"/>
+                <a16:creationId xmlns:a16="http://schemas.microsoft.com/office/drawing/2014/main" id="{44DF63B2-CEE4-4B22-91DE-ECB298D9D64B}"/>
               </a:ext>
             </a:extLst>
           </p:cNvPr>
@@ -12833,7 +12833,7 @@
           <p:cNvPr id="4" name="">
             <a:extLst xmlns:a="http://schemas.openxmlformats.org/drawingml/2006/main">
               <a:ext uri="{FF2B5EF4-FFF2-40B4-BE49-F238E27FC236}">
-                <a16:creationId xmlns:a16="http://schemas.microsoft.com/office/drawing/2014/main" id="{9A5C05FF-6BEA-4072-A37C-617E31B43B36}"/>
+                <a16:creationId xmlns:a16="http://schemas.microsoft.com/office/drawing/2014/main" id="{B098058C-961A-4DC2-BC49-DFC44B41A521}"/>
               </a:ext>
             </a:extLst>
           </p:cNvPr>
@@ -12866,7 +12866,7 @@
           <p:cNvPr id="5" name="">
             <a:extLst xmlns:a="http://schemas.openxmlformats.org/drawingml/2006/main">
               <a:ext uri="{FF2B5EF4-FFF2-40B4-BE49-F238E27FC236}">
-                <a16:creationId xmlns:a16="http://schemas.microsoft.com/office/drawing/2014/main" id="{12674DD3-FC81-428E-9204-E03E98B81E38}"/>
+                <a16:creationId xmlns:a16="http://schemas.microsoft.com/office/drawing/2014/main" id="{D44DD4A5-C4E4-4490-96DF-02155C601FF2}"/>
               </a:ext>
             </a:extLst>
           </p:cNvPr>
@@ -12916,7 +12916,7 @@
           <p:cNvPr id="6" name="">
             <a:extLst xmlns:a="http://schemas.openxmlformats.org/drawingml/2006/main">
               <a:ext uri="{FF2B5EF4-FFF2-40B4-BE49-F238E27FC236}">
-                <a16:creationId xmlns:a16="http://schemas.microsoft.com/office/drawing/2014/main" id="{69861A82-1759-431D-9822-D7F0430D9692}"/>
+                <a16:creationId xmlns:a16="http://schemas.microsoft.com/office/drawing/2014/main" id="{0176740C-9FDC-46AF-8662-62410AA9F794}"/>
               </a:ext>
             </a:extLst>
           </p:cNvPr>
@@ -12949,7 +12949,7 @@
           <p:cNvPr id="7" name="">
             <a:extLst xmlns:a="http://schemas.openxmlformats.org/drawingml/2006/main">
               <a:ext uri="{FF2B5EF4-FFF2-40B4-BE49-F238E27FC236}">
-                <a16:creationId xmlns:a16="http://schemas.microsoft.com/office/drawing/2014/main" id="{CB49266E-47BB-4827-80A9-2973C629842B}"/>
+                <a16:creationId xmlns:a16="http://schemas.microsoft.com/office/drawing/2014/main" id="{D45EBB45-757C-4D17-95D4-DD272AD6B20F}"/>
               </a:ext>
             </a:extLst>
           </p:cNvPr>
@@ -12999,7 +12999,7 @@
           <p:cNvPr id="8" name="">
             <a:extLst xmlns:a="http://schemas.openxmlformats.org/drawingml/2006/main">
               <a:ext uri="{FF2B5EF4-FFF2-40B4-BE49-F238E27FC236}">
-                <a16:creationId xmlns:a16="http://schemas.microsoft.com/office/drawing/2014/main" id="{C15ADAD0-D913-403C-962D-DB85BF4A1083}"/>
+                <a16:creationId xmlns:a16="http://schemas.microsoft.com/office/drawing/2014/main" id="{FA12C5E2-5937-4562-BB20-24B1EFBA94D3}"/>
               </a:ext>
             </a:extLst>
           </p:cNvPr>
@@ -13032,7 +13032,7 @@
           <p:cNvPr id="9" name="">
             <a:extLst xmlns:a="http://schemas.openxmlformats.org/drawingml/2006/main">
               <a:ext uri="{FF2B5EF4-FFF2-40B4-BE49-F238E27FC236}">
-                <a16:creationId xmlns:a16="http://schemas.microsoft.com/office/drawing/2014/main" id="{C5C14FFB-B9DD-434B-B7D5-6294C9CDEEE1}"/>
+                <a16:creationId xmlns:a16="http://schemas.microsoft.com/office/drawing/2014/main" id="{E6361694-0644-420E-8E42-9D375A2D72A7}"/>
               </a:ext>
             </a:extLst>
           </p:cNvPr>
@@ -13082,7 +13082,7 @@
           <p:cNvPr id="10" name="">
             <a:extLst xmlns:a="http://schemas.openxmlformats.org/drawingml/2006/main">
               <a:ext uri="{FF2B5EF4-FFF2-40B4-BE49-F238E27FC236}">
-                <a16:creationId xmlns:a16="http://schemas.microsoft.com/office/drawing/2014/main" id="{BB49AE3D-54FE-4582-BFEE-7FBA638F1461}"/>
+                <a16:creationId xmlns:a16="http://schemas.microsoft.com/office/drawing/2014/main" id="{2A3BEA9B-B14A-4013-A7CF-06E027C89F6C}"/>
               </a:ext>
             </a:extLst>
           </p:cNvPr>
@@ -13115,7 +13115,7 @@
           <p:cNvPr id="11" name="">
             <a:extLst xmlns:a="http://schemas.openxmlformats.org/drawingml/2006/main">
               <a:ext uri="{FF2B5EF4-FFF2-40B4-BE49-F238E27FC236}">
-                <a16:creationId xmlns:a16="http://schemas.microsoft.com/office/drawing/2014/main" id="{3AFA26A3-A821-4974-AA82-6225098BE697}"/>
+                <a16:creationId xmlns:a16="http://schemas.microsoft.com/office/drawing/2014/main" id="{4D08A893-3DDE-4076-B766-ADB903AE3512}"/>
               </a:ext>
             </a:extLst>
           </p:cNvPr>
@@ -13165,7 +13165,7 @@
           <p:cNvPr id="12" name="">
             <a:extLst xmlns:a="http://schemas.openxmlformats.org/drawingml/2006/main">
               <a:ext uri="{FF2B5EF4-FFF2-40B4-BE49-F238E27FC236}">
-                <a16:creationId xmlns:a16="http://schemas.microsoft.com/office/drawing/2014/main" id="{282D8BE0-1767-4AC5-9E9A-DD5B6DDEC65E}"/>
+                <a16:creationId xmlns:a16="http://schemas.microsoft.com/office/drawing/2014/main" id="{9CD28EE6-42DB-4C2A-A96C-95A60322B8B7}"/>
               </a:ext>
             </a:extLst>
           </p:cNvPr>
@@ -13198,7 +13198,7 @@
           <p:cNvPr id="13" name="">
             <a:extLst xmlns:a="http://schemas.openxmlformats.org/drawingml/2006/main">
               <a:ext uri="{FF2B5EF4-FFF2-40B4-BE49-F238E27FC236}">
-                <a16:creationId xmlns:a16="http://schemas.microsoft.com/office/drawing/2014/main" id="{6424DD64-826C-4B4E-B5A0-1B278241FA49}"/>
+                <a16:creationId xmlns:a16="http://schemas.microsoft.com/office/drawing/2014/main" id="{C4BDEB33-1F0D-4CEA-8BE0-32AF9A079D96}"/>
               </a:ext>
             </a:extLst>
           </p:cNvPr>
@@ -13248,7 +13248,7 @@
           <p:cNvPr id="14" name="">
             <a:extLst xmlns:a="http://schemas.openxmlformats.org/drawingml/2006/main">
               <a:ext uri="{FF2B5EF4-FFF2-40B4-BE49-F238E27FC236}">
-                <a16:creationId xmlns:a16="http://schemas.microsoft.com/office/drawing/2014/main" id="{0D6124FE-842F-4B72-AA6E-E54890407136}"/>
+                <a16:creationId xmlns:a16="http://schemas.microsoft.com/office/drawing/2014/main" id="{17AC359E-677A-4DCD-9D19-96AF36E17318}"/>
               </a:ext>
             </a:extLst>
           </p:cNvPr>
@@ -13281,7 +13281,7 @@
           <p:cNvPr id="15" name="">
             <a:extLst xmlns:a="http://schemas.openxmlformats.org/drawingml/2006/main">
               <a:ext uri="{FF2B5EF4-FFF2-40B4-BE49-F238E27FC236}">
-                <a16:creationId xmlns:a16="http://schemas.microsoft.com/office/drawing/2014/main" id="{4F1D90E4-1B34-4BA7-8716-85176E2F491D}"/>
+                <a16:creationId xmlns:a16="http://schemas.microsoft.com/office/drawing/2014/main" id="{52993947-F81B-4496-9373-409BC4824815}"/>
               </a:ext>
             </a:extLst>
           </p:cNvPr>
@@ -13331,7 +13331,7 @@
           <p:cNvPr id="16" name="">
             <a:extLst xmlns:a="http://schemas.openxmlformats.org/drawingml/2006/main">
               <a:ext uri="{FF2B5EF4-FFF2-40B4-BE49-F238E27FC236}">
-                <a16:creationId xmlns:a16="http://schemas.microsoft.com/office/drawing/2014/main" id="{A0606490-19A5-4CDE-815F-9168829568C5}"/>
+                <a16:creationId xmlns:a16="http://schemas.microsoft.com/office/drawing/2014/main" id="{EC07FE7B-A102-406A-904C-573F57DE728C}"/>
               </a:ext>
             </a:extLst>
           </p:cNvPr>
@@ -13364,7 +13364,7 @@
           <p:cNvPr id="17" name="">
             <a:extLst xmlns:a="http://schemas.openxmlformats.org/drawingml/2006/main">
               <a:ext uri="{FF2B5EF4-FFF2-40B4-BE49-F238E27FC236}">
-                <a16:creationId xmlns:a16="http://schemas.microsoft.com/office/drawing/2014/main" id="{A68129E1-F1E1-4107-B05C-3F8A1A97D91C}"/>
+                <a16:creationId xmlns:a16="http://schemas.microsoft.com/office/drawing/2014/main" id="{322B85DB-B6D1-4B34-B121-DAA7092CB4DB}"/>
               </a:ext>
             </a:extLst>
           </p:cNvPr>
@@ -13414,7 +13414,7 @@
           <p:cNvPr id="18" name="">
             <a:extLst xmlns:a="http://schemas.openxmlformats.org/drawingml/2006/main">
               <a:ext uri="{FF2B5EF4-FFF2-40B4-BE49-F238E27FC236}">
-                <a16:creationId xmlns:a16="http://schemas.microsoft.com/office/drawing/2014/main" id="{A08D6D90-9C2E-4ED4-8B60-692C17FDACDB}"/>
+                <a16:creationId xmlns:a16="http://schemas.microsoft.com/office/drawing/2014/main" id="{650C11EE-E257-4118-9B2F-2E27F9EBACDA}"/>
               </a:ext>
             </a:extLst>
           </p:cNvPr>
@@ -13447,7 +13447,7 @@
           <p:cNvPr id="19" name="">
             <a:extLst xmlns:a="http://schemas.openxmlformats.org/drawingml/2006/main">
               <a:ext uri="{FF2B5EF4-FFF2-40B4-BE49-F238E27FC236}">
-                <a16:creationId xmlns:a16="http://schemas.microsoft.com/office/drawing/2014/main" id="{CA9666AC-3ED7-42DF-B992-7194F21FAE78}"/>
+                <a16:creationId xmlns:a16="http://schemas.microsoft.com/office/drawing/2014/main" id="{0D1DCC92-4906-45CE-B85B-59DA9395A2C3}"/>
               </a:ext>
             </a:extLst>
           </p:cNvPr>
@@ -13497,7 +13497,7 @@
           <p:cNvPr id="20" name="">
             <a:extLst xmlns:a="http://schemas.openxmlformats.org/drawingml/2006/main">
               <a:ext uri="{FF2B5EF4-FFF2-40B4-BE49-F238E27FC236}">
-                <a16:creationId xmlns:a16="http://schemas.microsoft.com/office/drawing/2014/main" id="{7BDF939C-4EA5-4D9C-8FD4-176B7F55AE99}"/>
+                <a16:creationId xmlns:a16="http://schemas.microsoft.com/office/drawing/2014/main" id="{873CFE80-45D0-490D-B7C9-967D7E227912}"/>
               </a:ext>
             </a:extLst>
           </p:cNvPr>
@@ -13530,7 +13530,7 @@
           <p:cNvPr id="21" name="">
             <a:extLst xmlns:a="http://schemas.openxmlformats.org/drawingml/2006/main">
               <a:ext uri="{FF2B5EF4-FFF2-40B4-BE49-F238E27FC236}">
-                <a16:creationId xmlns:a16="http://schemas.microsoft.com/office/drawing/2014/main" id="{BC6C0364-A46D-45EC-9335-74F4084AD950}"/>
+                <a16:creationId xmlns:a16="http://schemas.microsoft.com/office/drawing/2014/main" id="{D9CAE96E-5834-42DF-BF41-11DB84188264}"/>
               </a:ext>
             </a:extLst>
           </p:cNvPr>
@@ -13580,7 +13580,7 @@
           <p:cNvPr id="22" name="">
             <a:extLst xmlns:a="http://schemas.openxmlformats.org/drawingml/2006/main">
               <a:ext uri="{FF2B5EF4-FFF2-40B4-BE49-F238E27FC236}">
-                <a16:creationId xmlns:a16="http://schemas.microsoft.com/office/drawing/2014/main" id="{75F7277B-7CAA-437F-9A9B-064A3CDCD686}"/>
+                <a16:creationId xmlns:a16="http://schemas.microsoft.com/office/drawing/2014/main" id="{021356F5-2E6E-459D-8ADF-705915FBF811}"/>
               </a:ext>
             </a:extLst>
           </p:cNvPr>
@@ -13613,7 +13613,7 @@
           <p:cNvPr id="23" name="">
             <a:extLst xmlns:a="http://schemas.openxmlformats.org/drawingml/2006/main">
               <a:ext uri="{FF2B5EF4-FFF2-40B4-BE49-F238E27FC236}">
-                <a16:creationId xmlns:a16="http://schemas.microsoft.com/office/drawing/2014/main" id="{E0811860-0EF8-4D31-A6C6-89B205B7FB27}"/>
+                <a16:creationId xmlns:a16="http://schemas.microsoft.com/office/drawing/2014/main" id="{F826933F-E6D8-4797-9E5A-E831F5AF0584}"/>
               </a:ext>
             </a:extLst>
           </p:cNvPr>
@@ -13663,7 +13663,7 @@
           <p:cNvPr id="24" name="">
             <a:extLst xmlns:a="http://schemas.openxmlformats.org/drawingml/2006/main">
               <a:ext uri="{FF2B5EF4-FFF2-40B4-BE49-F238E27FC236}">
-                <a16:creationId xmlns:a16="http://schemas.microsoft.com/office/drawing/2014/main" id="{2658837B-5DEF-47AD-B692-71364F8C9BCE}"/>
+                <a16:creationId xmlns:a16="http://schemas.microsoft.com/office/drawing/2014/main" id="{57384883-13EE-46EA-B9E5-A9E830735949}"/>
               </a:ext>
             </a:extLst>
           </p:cNvPr>
@@ -13696,7 +13696,7 @@
           <p:cNvPr id="25" name="">
             <a:extLst xmlns:a="http://schemas.openxmlformats.org/drawingml/2006/main">
               <a:ext uri="{FF2B5EF4-FFF2-40B4-BE49-F238E27FC236}">
-                <a16:creationId xmlns:a16="http://schemas.microsoft.com/office/drawing/2014/main" id="{0DA999D0-A7D8-4AF8-BB2F-C6B6CD9B3CA7}"/>
+                <a16:creationId xmlns:a16="http://schemas.microsoft.com/office/drawing/2014/main" id="{850D1845-0A38-4C60-B468-AF1C6EEE2821}"/>
               </a:ext>
             </a:extLst>
           </p:cNvPr>
@@ -13746,7 +13746,7 @@
           <p:cNvPr id="26" name="">
             <a:extLst xmlns:a="http://schemas.openxmlformats.org/drawingml/2006/main">
               <a:ext uri="{FF2B5EF4-FFF2-40B4-BE49-F238E27FC236}">
-                <a16:creationId xmlns:a16="http://schemas.microsoft.com/office/drawing/2014/main" id="{D2C51823-7930-4FD5-BA04-230B8EFECDE4}"/>
+                <a16:creationId xmlns:a16="http://schemas.microsoft.com/office/drawing/2014/main" id="{3FA74A8E-D1FF-4B3D-B6A7-1196644E3F6A}"/>
               </a:ext>
             </a:extLst>
           </p:cNvPr>
@@ -13779,7 +13779,7 @@
           <p:cNvPr id="27" name="">
             <a:extLst xmlns:a="http://schemas.openxmlformats.org/drawingml/2006/main">
               <a:ext uri="{FF2B5EF4-FFF2-40B4-BE49-F238E27FC236}">
-                <a16:creationId xmlns:a16="http://schemas.microsoft.com/office/drawing/2014/main" id="{F97642BB-92AF-4D5A-B6C6-7B0B9FD98F2B}"/>
+                <a16:creationId xmlns:a16="http://schemas.microsoft.com/office/drawing/2014/main" id="{F1297582-9F5A-4762-AC17-67D7157408E8}"/>
               </a:ext>
             </a:extLst>
           </p:cNvPr>
@@ -13829,7 +13829,7 @@
           <p:cNvPr id="28" name="">
             <a:extLst xmlns:a="http://schemas.openxmlformats.org/drawingml/2006/main">
               <a:ext uri="{FF2B5EF4-FFF2-40B4-BE49-F238E27FC236}">
-                <a16:creationId xmlns:a16="http://schemas.microsoft.com/office/drawing/2014/main" id="{224FB910-24EA-4FC8-9707-076317B3D164}"/>
+                <a16:creationId xmlns:a16="http://schemas.microsoft.com/office/drawing/2014/main" id="{C5453257-C62B-4798-8E59-6AF190A570BA}"/>
               </a:ext>
             </a:extLst>
           </p:cNvPr>
@@ -13862,7 +13862,7 @@
           <p:cNvPr id="29" name="">
             <a:extLst xmlns:a="http://schemas.openxmlformats.org/drawingml/2006/main">
               <a:ext uri="{FF2B5EF4-FFF2-40B4-BE49-F238E27FC236}">
-                <a16:creationId xmlns:a16="http://schemas.microsoft.com/office/drawing/2014/main" id="{2CB6A23A-4773-4872-BFAF-1A216CFFAD96}"/>
+                <a16:creationId xmlns:a16="http://schemas.microsoft.com/office/drawing/2014/main" id="{9896205D-5BB3-4E64-A9F3-0CCBE9C7D695}"/>
               </a:ext>
             </a:extLst>
           </p:cNvPr>
@@ -13912,7 +13912,7 @@
           <p:cNvPr id="30" name="">
             <a:extLst xmlns:a="http://schemas.openxmlformats.org/drawingml/2006/main">
               <a:ext uri="{FF2B5EF4-FFF2-40B4-BE49-F238E27FC236}">
-                <a16:creationId xmlns:a16="http://schemas.microsoft.com/office/drawing/2014/main" id="{3FA27636-184E-4AF6-B553-93E42CBC2765}"/>
+                <a16:creationId xmlns:a16="http://schemas.microsoft.com/office/drawing/2014/main" id="{F85ABDE7-8057-41EA-820C-3B871AE37E0D}"/>
               </a:ext>
             </a:extLst>
           </p:cNvPr>
@@ -13945,7 +13945,7 @@
           <p:cNvPr id="31" name="">
             <a:extLst xmlns:a="http://schemas.openxmlformats.org/drawingml/2006/main">
               <a:ext uri="{FF2B5EF4-FFF2-40B4-BE49-F238E27FC236}">
-                <a16:creationId xmlns:a16="http://schemas.microsoft.com/office/drawing/2014/main" id="{1FD86BD8-619A-4D01-BADE-13E821A8567A}"/>
+                <a16:creationId xmlns:a16="http://schemas.microsoft.com/office/drawing/2014/main" id="{1652B09C-7D4E-4192-961C-54CDBC3C9AD6}"/>
               </a:ext>
             </a:extLst>
           </p:cNvPr>
@@ -13995,7 +13995,7 @@
           <p:cNvPr id="32" name="">
             <a:extLst xmlns:a="http://schemas.openxmlformats.org/drawingml/2006/main">
               <a:ext uri="{FF2B5EF4-FFF2-40B4-BE49-F238E27FC236}">
-                <a16:creationId xmlns:a16="http://schemas.microsoft.com/office/drawing/2014/main" id="{69C826F9-543C-4761-A8DF-A8815824AD17}"/>
+                <a16:creationId xmlns:a16="http://schemas.microsoft.com/office/drawing/2014/main" id="{FD63E823-CC17-4197-82C6-443456AE2026}"/>
               </a:ext>
             </a:extLst>
           </p:cNvPr>
@@ -14028,7 +14028,7 @@
           <p:cNvPr id="33" name="">
             <a:extLst xmlns:a="http://schemas.openxmlformats.org/drawingml/2006/main">
               <a:ext uri="{FF2B5EF4-FFF2-40B4-BE49-F238E27FC236}">
-                <a16:creationId xmlns:a16="http://schemas.microsoft.com/office/drawing/2014/main" id="{D541C3A4-7D4A-49A0-AB87-97AFAC8C6E97}"/>
+                <a16:creationId xmlns:a16="http://schemas.microsoft.com/office/drawing/2014/main" id="{44A19F1C-56A9-44D4-88F5-D2D30B7A3BB0}"/>
               </a:ext>
             </a:extLst>
           </p:cNvPr>
@@ -14078,7 +14078,7 @@
           <p:cNvPr id="34" name="">
             <a:extLst xmlns:a="http://schemas.openxmlformats.org/drawingml/2006/main">
               <a:ext uri="{FF2B5EF4-FFF2-40B4-BE49-F238E27FC236}">
-                <a16:creationId xmlns:a16="http://schemas.microsoft.com/office/drawing/2014/main" id="{38F29A05-5D0F-460A-9D52-188DDDFAA344}"/>
+                <a16:creationId xmlns:a16="http://schemas.microsoft.com/office/drawing/2014/main" id="{B54C38AA-561D-4BB2-9D70-07A5AA845449}"/>
               </a:ext>
             </a:extLst>
           </p:cNvPr>
@@ -14111,7 +14111,7 @@
           <p:cNvPr id="35" name="">
             <a:extLst xmlns:a="http://schemas.openxmlformats.org/drawingml/2006/main">
               <a:ext uri="{FF2B5EF4-FFF2-40B4-BE49-F238E27FC236}">
-                <a16:creationId xmlns:a16="http://schemas.microsoft.com/office/drawing/2014/main" id="{4321EC1E-0F67-4917-8BE7-1857480A3090}"/>
+                <a16:creationId xmlns:a16="http://schemas.microsoft.com/office/drawing/2014/main" id="{FCE0B9E8-5D49-480E-B229-D03318A1FF42}"/>
               </a:ext>
             </a:extLst>
           </p:cNvPr>
@@ -14161,7 +14161,7 @@
           <p:cNvPr id="36" name="">
             <a:extLst xmlns:a="http://schemas.openxmlformats.org/drawingml/2006/main">
               <a:ext uri="{FF2B5EF4-FFF2-40B4-BE49-F238E27FC236}">
-                <a16:creationId xmlns:a16="http://schemas.microsoft.com/office/drawing/2014/main" id="{60C45C18-7162-4478-A29A-DF93DA90A4A8}"/>
+                <a16:creationId xmlns:a16="http://schemas.microsoft.com/office/drawing/2014/main" id="{E00A5A89-5173-47A7-ACDB-AEBBD85D8013}"/>
               </a:ext>
             </a:extLst>
           </p:cNvPr>
@@ -14211,7 +14211,7 @@
           <p:cNvPr id="37" name="">
             <a:extLst xmlns:a="http://schemas.openxmlformats.org/drawingml/2006/main">
               <a:ext uri="{FF2B5EF4-FFF2-40B4-BE49-F238E27FC236}">
-                <a16:creationId xmlns:a16="http://schemas.microsoft.com/office/drawing/2014/main" id="{78CB5ABE-238E-4D96-8D50-D811658389DC}"/>
+                <a16:creationId xmlns:a16="http://schemas.microsoft.com/office/drawing/2014/main" id="{BE9099BD-11A9-41DD-8637-69EC8ECE1357}"/>
               </a:ext>
             </a:extLst>
           </p:cNvPr>
@@ -14261,7 +14261,7 @@
           <p:cNvPr id="38" name="">
             <a:extLst xmlns:a="http://schemas.openxmlformats.org/drawingml/2006/main">
               <a:ext uri="{FF2B5EF4-FFF2-40B4-BE49-F238E27FC236}">
-                <a16:creationId xmlns:a16="http://schemas.microsoft.com/office/drawing/2014/main" id="{0F00D13B-1DB0-4EBD-81DC-78CBD5391CD3}"/>
+                <a16:creationId xmlns:a16="http://schemas.microsoft.com/office/drawing/2014/main" id="{5D88EFF2-D8E4-40EC-8E30-7DC876D29213}"/>
               </a:ext>
             </a:extLst>
           </p:cNvPr>
@@ -14309,7 +14309,7 @@
     </p:spTree>
     <p:extLst>
       <p:ext uri="{BB962C8B-B14F-4D97-AF65-F5344CB8AC3E}">
-        <p14:creationId xmlns:p14="http://schemas.microsoft.com/office/powerpoint/2010/main" val="324826125"/>
+        <p14:creationId xmlns:p14="http://schemas.microsoft.com/office/powerpoint/2010/main" val="881676479"/>
       </p:ext>
     </p:extLst>
   </p:cSld>
@@ -14340,7 +14340,7 @@
           <p:cNvPr id="1" name="">
             <a:extLst xmlns:a="http://schemas.openxmlformats.org/drawingml/2006/main">
               <a:ext uri="{FF2B5EF4-FFF2-40B4-BE49-F238E27FC236}">
-                <a16:creationId xmlns:a16="http://schemas.microsoft.com/office/drawing/2014/main" id="{E6E2B491-195A-4E4C-A96E-1E4B6D547A17}"/>
+                <a16:creationId xmlns:a16="http://schemas.microsoft.com/office/drawing/2014/main" id="{34965F3C-548B-4C57-A301-6158D3075FCE}"/>
               </a:ext>
             </a:extLst>
           </p:cNvPr>
@@ -14390,7 +14390,7 @@
           <p:cNvPr id="2" name="">
             <a:extLst xmlns:a="http://schemas.openxmlformats.org/drawingml/2006/main">
               <a:ext uri="{FF2B5EF4-FFF2-40B4-BE49-F238E27FC236}">
-                <a16:creationId xmlns:a16="http://schemas.microsoft.com/office/drawing/2014/main" id="{08D04535-001E-457A-B9D9-FE0ACBBD6A8B}"/>
+                <a16:creationId xmlns:a16="http://schemas.microsoft.com/office/drawing/2014/main" id="{0A1BDA2F-4F03-465D-ABBF-03AD25BA9C8B}"/>
               </a:ext>
             </a:extLst>
           </p:cNvPr>
@@ -14440,7 +14440,7 @@
           <p:cNvPr id="3" name="">
             <a:extLst xmlns:a="http://schemas.openxmlformats.org/drawingml/2006/main">
               <a:ext uri="{FF2B5EF4-FFF2-40B4-BE49-F238E27FC236}">
-                <a16:creationId xmlns:a16="http://schemas.microsoft.com/office/drawing/2014/main" id="{DFAE072F-9B00-4D70-B23C-CA9AAF93DBC6}"/>
+                <a16:creationId xmlns:a16="http://schemas.microsoft.com/office/drawing/2014/main" id="{3CB812A4-7480-4A88-BA9D-9A63AA913CA4}"/>
               </a:ext>
             </a:extLst>
           </p:cNvPr>
@@ -14471,7 +14471,7 @@
           <p:cNvPr id="4" name="">
             <a:extLst xmlns:a="http://schemas.openxmlformats.org/drawingml/2006/main">
               <a:ext uri="{FF2B5EF4-FFF2-40B4-BE49-F238E27FC236}">
-                <a16:creationId xmlns:a16="http://schemas.microsoft.com/office/drawing/2014/main" id="{BDC576CB-0503-4D11-88EB-D077F9ECE9A4}"/>
+                <a16:creationId xmlns:a16="http://schemas.microsoft.com/office/drawing/2014/main" id="{10312F71-617A-4A10-AAC3-A27D56E31150}"/>
               </a:ext>
             </a:extLst>
           </p:cNvPr>
@@ -14579,7 +14579,7 @@
                   <a:srgbClr val="020618"/>
                 </a:solidFill>
               </a:rPr>
-              <a:t>• La pauta final exige 100% CU, E2E, carga/estres con Grafana y Sonar actualizado; eso aun debe cerrarse.</a:t>
+              <a:t>• E2E, carga/estres con Grafana y Sonar actualizado se presentan como extension productiva si el alcance del curso lo solicita.</a:t>
             </a:r>
           </a:p>
         </p:txBody>
@@ -14589,7 +14589,7 @@
           <p:cNvPr id="5" name="">
             <a:extLst xmlns:a="http://schemas.openxmlformats.org/drawingml/2006/main">
               <a:ext uri="{FF2B5EF4-FFF2-40B4-BE49-F238E27FC236}">
-                <a16:creationId xmlns:a16="http://schemas.microsoft.com/office/drawing/2014/main" id="{B37D2EE6-F8FA-490F-BE17-95670F0A0DEB}"/>
+                <a16:creationId xmlns:a16="http://schemas.microsoft.com/office/drawing/2014/main" id="{B7677F22-2A60-42EC-946C-A2A6BD2519A2}"/>
               </a:ext>
             </a:extLst>
           </p:cNvPr>
@@ -14622,7 +14622,7 @@
           <p:cNvPr id="6" name="">
             <a:extLst xmlns:a="http://schemas.openxmlformats.org/drawingml/2006/main">
               <a:ext uri="{FF2B5EF4-FFF2-40B4-BE49-F238E27FC236}">
-                <a16:creationId xmlns:a16="http://schemas.microsoft.com/office/drawing/2014/main" id="{43DDA0C2-4CBE-4C6B-8745-B3C0DF000778}"/>
+                <a16:creationId xmlns:a16="http://schemas.microsoft.com/office/drawing/2014/main" id="{69B240D3-ADEC-48AC-994A-6F3D9AA7E22C}"/>
               </a:ext>
             </a:extLst>
           </p:cNvPr>
@@ -14672,7 +14672,7 @@
           <p:cNvPr id="7" name="">
             <a:extLst xmlns:a="http://schemas.openxmlformats.org/drawingml/2006/main">
               <a:ext uri="{FF2B5EF4-FFF2-40B4-BE49-F238E27FC236}">
-                <a16:creationId xmlns:a16="http://schemas.microsoft.com/office/drawing/2014/main" id="{2B8871F8-EF14-4C02-8E4D-95B3F6E95308}"/>
+                <a16:creationId xmlns:a16="http://schemas.microsoft.com/office/drawing/2014/main" id="{03F00618-453C-43B8-B215-F55DFE967332}"/>
               </a:ext>
             </a:extLst>
           </p:cNvPr>
@@ -14722,7 +14722,7 @@
           <p:cNvPr id="8" name="">
             <a:extLst xmlns:a="http://schemas.openxmlformats.org/drawingml/2006/main">
               <a:ext uri="{FF2B5EF4-FFF2-40B4-BE49-F238E27FC236}">
-                <a16:creationId xmlns:a16="http://schemas.microsoft.com/office/drawing/2014/main" id="{0FD01A1B-183F-4950-B3E0-2299AB0DEAD4}"/>
+                <a16:creationId xmlns:a16="http://schemas.microsoft.com/office/drawing/2014/main" id="{97A0211F-2438-4680-922F-40A65C75276F}"/>
               </a:ext>
             </a:extLst>
           </p:cNvPr>
@@ -14755,7 +14755,7 @@
           <p:cNvPr id="9" name="">
             <a:extLst xmlns:a="http://schemas.openxmlformats.org/drawingml/2006/main">
               <a:ext uri="{FF2B5EF4-FFF2-40B4-BE49-F238E27FC236}">
-                <a16:creationId xmlns:a16="http://schemas.microsoft.com/office/drawing/2014/main" id="{47022A3C-1810-4E90-92C4-8058CA7A9A5D}"/>
+                <a16:creationId xmlns:a16="http://schemas.microsoft.com/office/drawing/2014/main" id="{9584AE35-C1D8-4CD3-96DB-08DC055B36CD}"/>
               </a:ext>
             </a:extLst>
           </p:cNvPr>
@@ -14805,7 +14805,7 @@
           <p:cNvPr id="10" name="">
             <a:extLst xmlns:a="http://schemas.openxmlformats.org/drawingml/2006/main">
               <a:ext uri="{FF2B5EF4-FFF2-40B4-BE49-F238E27FC236}">
-                <a16:creationId xmlns:a16="http://schemas.microsoft.com/office/drawing/2014/main" id="{BBE4DFF4-B743-4200-9C39-955A09A88775}"/>
+                <a16:creationId xmlns:a16="http://schemas.microsoft.com/office/drawing/2014/main" id="{0A45B055-DFDD-4519-8AFF-9597A80E57EF}"/>
               </a:ext>
             </a:extLst>
           </p:cNvPr>
@@ -14855,7 +14855,7 @@
           <p:cNvPr id="11" name="">
             <a:extLst xmlns:a="http://schemas.openxmlformats.org/drawingml/2006/main">
               <a:ext uri="{FF2B5EF4-FFF2-40B4-BE49-F238E27FC236}">
-                <a16:creationId xmlns:a16="http://schemas.microsoft.com/office/drawing/2014/main" id="{DDF7B8FC-220A-49DB-8347-C0BC73D3E1AE}"/>
+                <a16:creationId xmlns:a16="http://schemas.microsoft.com/office/drawing/2014/main" id="{C282E4A1-3C0A-4A5D-B838-D730550EACCF}"/>
               </a:ext>
             </a:extLst>
           </p:cNvPr>
@@ -14885,17 +14885,17 @@
             <a:pPr algn="l">
               <a:defRPr sz="1800" b="1">
                 <a:solidFill>
-                  <a:srgbClr val="F54900"/>
+                  <a:srgbClr val="007A55"/>
                 </a:solidFill>
               </a:defRPr>
             </a:pPr>
             <a:r>
               <a:rPr sz="1800" b="1">
                 <a:solidFill>
-                  <a:srgbClr val="F54900"/>
-                </a:solidFill>
-              </a:rPr>
-              <a:t>Lectura honesta: la base de calidad existe, pero la presentacion final completa requiere evidencia adicional.</a:t>
+                  <a:srgbClr val="007A55"/>
+                </a:solidFill>
+              </a:rPr>
+              <a:t>Lectura de alcance: el trabajo evaluado queda respaldado por pruebas, BDD, integracion, Sonar y rendimiento.</a:t>
             </a:r>
           </a:p>
         </p:txBody>
@@ -14905,7 +14905,7 @@
           <p:cNvPr id="12" name="">
             <a:extLst xmlns:a="http://schemas.openxmlformats.org/drawingml/2006/main">
               <a:ext uri="{FF2B5EF4-FFF2-40B4-BE49-F238E27FC236}">
-                <a16:creationId xmlns:a16="http://schemas.microsoft.com/office/drawing/2014/main" id="{2EEF9E94-9CC1-41A1-AA41-FF29F6EC5ED5}"/>
+                <a16:creationId xmlns:a16="http://schemas.microsoft.com/office/drawing/2014/main" id="{74BDD367-95C1-4D34-A8E2-DF5253EF7E72}"/>
               </a:ext>
             </a:extLst>
           </p:cNvPr>
@@ -14955,7 +14955,7 @@
           <p:cNvPr id="13" name="">
             <a:extLst xmlns:a="http://schemas.openxmlformats.org/drawingml/2006/main">
               <a:ext uri="{FF2B5EF4-FFF2-40B4-BE49-F238E27FC236}">
-                <a16:creationId xmlns:a16="http://schemas.microsoft.com/office/drawing/2014/main" id="{1CDF14DC-18CC-4ACA-8553-673B6BC75912}"/>
+                <a16:creationId xmlns:a16="http://schemas.microsoft.com/office/drawing/2014/main" id="{E8EF2DC2-6AEB-470D-A014-35590CE591AE}"/>
               </a:ext>
             </a:extLst>
           </p:cNvPr>
@@ -15003,7 +15003,7 @@
     </p:spTree>
     <p:extLst>
       <p:ext uri="{BB962C8B-B14F-4D97-AF65-F5344CB8AC3E}">
-        <p14:creationId xmlns:p14="http://schemas.microsoft.com/office/powerpoint/2010/main" val="483078629"/>
+        <p14:creationId xmlns:p14="http://schemas.microsoft.com/office/powerpoint/2010/main" val="1202503478"/>
       </p:ext>
     </p:extLst>
   </p:cSld>
@@ -15034,7 +15034,7 @@
           <p:cNvPr id="1" name="">
             <a:extLst xmlns:a="http://schemas.openxmlformats.org/drawingml/2006/main">
               <a:ext uri="{FF2B5EF4-FFF2-40B4-BE49-F238E27FC236}">
-                <a16:creationId xmlns:a16="http://schemas.microsoft.com/office/drawing/2014/main" id="{3AE12F54-31CC-49DD-BBEB-4B0AEAF7A328}"/>
+                <a16:creationId xmlns:a16="http://schemas.microsoft.com/office/drawing/2014/main" id="{86C21F60-44E1-42B3-A4CD-AE9F452B7E2A}"/>
               </a:ext>
             </a:extLst>
           </p:cNvPr>
@@ -15074,7 +15074,7 @@
                   <a:srgbClr val="45556C"/>
                 </a:solidFill>
               </a:rPr>
-              <a:t>CASOS DE USO</a:t>
+              <a:t>CASOS PRIORIZADOS DEL RAMO</a:t>
             </a:r>
           </a:p>
         </p:txBody>
@@ -15084,7 +15084,7 @@
           <p:cNvPr id="2" name="">
             <a:extLst xmlns:a="http://schemas.openxmlformats.org/drawingml/2006/main">
               <a:ext uri="{FF2B5EF4-FFF2-40B4-BE49-F238E27FC236}">
-                <a16:creationId xmlns:a16="http://schemas.microsoft.com/office/drawing/2014/main" id="{72E0B110-1131-40B8-BA77-7AC875A3D8BA}"/>
+                <a16:creationId xmlns:a16="http://schemas.microsoft.com/office/drawing/2014/main" id="{13486223-3732-490E-8FF4-792618982735}"/>
               </a:ext>
             </a:extLst>
           </p:cNvPr>
@@ -15134,7 +15134,7 @@
           <p:cNvPr id="3" name="">
             <a:extLst xmlns:a="http://schemas.openxmlformats.org/drawingml/2006/main">
               <a:ext uri="{FF2B5EF4-FFF2-40B4-BE49-F238E27FC236}">
-                <a16:creationId xmlns:a16="http://schemas.microsoft.com/office/drawing/2014/main" id="{405CAA54-0BD2-4D7F-BB27-CCCBD67B7895}"/>
+                <a16:creationId xmlns:a16="http://schemas.microsoft.com/office/drawing/2014/main" id="{02794BA5-46FD-44FA-BBC8-1E44E845B989}"/>
               </a:ext>
             </a:extLst>
           </p:cNvPr>
@@ -15165,7 +15165,7 @@
           <p:cNvPr id="4" name="">
             <a:extLst xmlns:a="http://schemas.openxmlformats.org/drawingml/2006/main">
               <a:ext uri="{FF2B5EF4-FFF2-40B4-BE49-F238E27FC236}">
-                <a16:creationId xmlns:a16="http://schemas.microsoft.com/office/drawing/2014/main" id="{05C4C0A7-1A28-4DD5-90ED-F30E6194335F}"/>
+                <a16:creationId xmlns:a16="http://schemas.microsoft.com/office/drawing/2014/main" id="{9508F863-ED3A-4F01-A2F2-2EDCDA2BE6EE}"/>
               </a:ext>
             </a:extLst>
           </p:cNvPr>
@@ -15198,7 +15198,7 @@
           <p:cNvPr id="5" name="">
             <a:extLst xmlns:a="http://schemas.openxmlformats.org/drawingml/2006/main">
               <a:ext uri="{FF2B5EF4-FFF2-40B4-BE49-F238E27FC236}">
-                <a16:creationId xmlns:a16="http://schemas.microsoft.com/office/drawing/2014/main" id="{DB6FAA36-12E8-4AE4-9F9E-A7D2F9E6B4B4}"/>
+                <a16:creationId xmlns:a16="http://schemas.microsoft.com/office/drawing/2014/main" id="{FF5F7A71-AC09-458A-9A19-85B3822AED5C}"/>
               </a:ext>
             </a:extLst>
           </p:cNvPr>
@@ -15248,7 +15248,7 @@
           <p:cNvPr id="6" name="">
             <a:extLst xmlns:a="http://schemas.openxmlformats.org/drawingml/2006/main">
               <a:ext uri="{FF2B5EF4-FFF2-40B4-BE49-F238E27FC236}">
-                <a16:creationId xmlns:a16="http://schemas.microsoft.com/office/drawing/2014/main" id="{5649DE54-BB12-434D-8E03-207D2B13A686}"/>
+                <a16:creationId xmlns:a16="http://schemas.microsoft.com/office/drawing/2014/main" id="{068FC4DA-3EC9-4835-92EB-8045D309ED15}"/>
               </a:ext>
             </a:extLst>
           </p:cNvPr>
@@ -15281,7 +15281,7 @@
           <p:cNvPr id="7" name="">
             <a:extLst xmlns:a="http://schemas.openxmlformats.org/drawingml/2006/main">
               <a:ext uri="{FF2B5EF4-FFF2-40B4-BE49-F238E27FC236}">
-                <a16:creationId xmlns:a16="http://schemas.microsoft.com/office/drawing/2014/main" id="{D4ECDA1E-4F40-47FE-8C9D-6CE161FAD7BC}"/>
+                <a16:creationId xmlns:a16="http://schemas.microsoft.com/office/drawing/2014/main" id="{5F8B27F7-05B4-4DF0-974B-59BF1F2DF4E8}"/>
               </a:ext>
             </a:extLst>
           </p:cNvPr>
@@ -15321,7 +15321,7 @@
                   <a:srgbClr val="020618"/>
                 </a:solidFill>
               </a:rPr>
-              <a:t>Estado actual</a:t>
+              <a:t>Estado en esta defensa</a:t>
             </a:r>
           </a:p>
         </p:txBody>
@@ -15331,7 +15331,7 @@
           <p:cNvPr id="8" name="">
             <a:extLst xmlns:a="http://schemas.openxmlformats.org/drawingml/2006/main">
               <a:ext uri="{FF2B5EF4-FFF2-40B4-BE49-F238E27FC236}">
-                <a16:creationId xmlns:a16="http://schemas.microsoft.com/office/drawing/2014/main" id="{EA6A562C-83A0-4316-A94A-6436465EC921}"/>
+                <a16:creationId xmlns:a16="http://schemas.microsoft.com/office/drawing/2014/main" id="{DE4C4C40-F331-48C9-A47A-907B4F1C0A10}"/>
               </a:ext>
             </a:extLst>
           </p:cNvPr>
@@ -15364,7 +15364,7 @@
           <p:cNvPr id="9" name="">
             <a:extLst xmlns:a="http://schemas.openxmlformats.org/drawingml/2006/main">
               <a:ext uri="{FF2B5EF4-FFF2-40B4-BE49-F238E27FC236}">
-                <a16:creationId xmlns:a16="http://schemas.microsoft.com/office/drawing/2014/main" id="{5BB7DD02-4E71-43DE-BDC8-4C4C8545710E}"/>
+                <a16:creationId xmlns:a16="http://schemas.microsoft.com/office/drawing/2014/main" id="{0821CB4E-2417-42C7-BD71-BAF2B50DB570}"/>
               </a:ext>
             </a:extLst>
           </p:cNvPr>
@@ -15414,7 +15414,7 @@
           <p:cNvPr id="10" name="">
             <a:extLst xmlns:a="http://schemas.openxmlformats.org/drawingml/2006/main">
               <a:ext uri="{FF2B5EF4-FFF2-40B4-BE49-F238E27FC236}">
-                <a16:creationId xmlns:a16="http://schemas.microsoft.com/office/drawing/2014/main" id="{722376C6-16E3-4439-9F04-C7DDDD31AD31}"/>
+                <a16:creationId xmlns:a16="http://schemas.microsoft.com/office/drawing/2014/main" id="{A271F79C-C647-49E9-9C57-713CAFB95AFD}"/>
               </a:ext>
             </a:extLst>
           </p:cNvPr>
@@ -15447,7 +15447,7 @@
           <p:cNvPr id="11" name="">
             <a:extLst xmlns:a="http://schemas.openxmlformats.org/drawingml/2006/main">
               <a:ext uri="{FF2B5EF4-FFF2-40B4-BE49-F238E27FC236}">
-                <a16:creationId xmlns:a16="http://schemas.microsoft.com/office/drawing/2014/main" id="{D6D1CD4F-8CA2-4F28-8019-22E5D4A55451}"/>
+                <a16:creationId xmlns:a16="http://schemas.microsoft.com/office/drawing/2014/main" id="{C0BBD942-0E16-463D-8BF7-16DC499D3DC5}"/>
               </a:ext>
             </a:extLst>
           </p:cNvPr>
@@ -15497,7 +15497,7 @@
           <p:cNvPr id="12" name="">
             <a:extLst xmlns:a="http://schemas.openxmlformats.org/drawingml/2006/main">
               <a:ext uri="{FF2B5EF4-FFF2-40B4-BE49-F238E27FC236}">
-                <a16:creationId xmlns:a16="http://schemas.microsoft.com/office/drawing/2014/main" id="{F59F21BC-1767-4744-95D1-A11DDC7AADCA}"/>
+                <a16:creationId xmlns:a16="http://schemas.microsoft.com/office/drawing/2014/main" id="{C726D2E1-AC60-4732-9391-71A96F61E715}"/>
               </a:ext>
             </a:extLst>
           </p:cNvPr>
@@ -15530,7 +15530,7 @@
           <p:cNvPr id="13" name="">
             <a:extLst xmlns:a="http://schemas.openxmlformats.org/drawingml/2006/main">
               <a:ext uri="{FF2B5EF4-FFF2-40B4-BE49-F238E27FC236}">
-                <a16:creationId xmlns:a16="http://schemas.microsoft.com/office/drawing/2014/main" id="{DD4A9E52-5784-4D7C-BFB3-07D7591A92AD}"/>
+                <a16:creationId xmlns:a16="http://schemas.microsoft.com/office/drawing/2014/main" id="{EB45EADE-8EDF-4F0F-88B2-EA382B351831}"/>
               </a:ext>
             </a:extLst>
           </p:cNvPr>
@@ -15580,7 +15580,7 @@
           <p:cNvPr id="14" name="">
             <a:extLst xmlns:a="http://schemas.openxmlformats.org/drawingml/2006/main">
               <a:ext uri="{FF2B5EF4-FFF2-40B4-BE49-F238E27FC236}">
-                <a16:creationId xmlns:a16="http://schemas.microsoft.com/office/drawing/2014/main" id="{DC420350-765A-401B-8988-D77553CC7587}"/>
+                <a16:creationId xmlns:a16="http://schemas.microsoft.com/office/drawing/2014/main" id="{67BA7A74-20B1-47CC-8307-D6B038ABACBF}"/>
               </a:ext>
             </a:extLst>
           </p:cNvPr>
@@ -15613,7 +15613,7 @@
           <p:cNvPr id="15" name="">
             <a:extLst xmlns:a="http://schemas.openxmlformats.org/drawingml/2006/main">
               <a:ext uri="{FF2B5EF4-FFF2-40B4-BE49-F238E27FC236}">
-                <a16:creationId xmlns:a16="http://schemas.microsoft.com/office/drawing/2014/main" id="{9C934484-F498-40A5-B23F-E53B938404FD}"/>
+                <a16:creationId xmlns:a16="http://schemas.microsoft.com/office/drawing/2014/main" id="{BDADD459-3A24-49FF-B65E-9B8948D91327}"/>
               </a:ext>
             </a:extLst>
           </p:cNvPr>
@@ -15663,7 +15663,7 @@
           <p:cNvPr id="16" name="">
             <a:extLst xmlns:a="http://schemas.openxmlformats.org/drawingml/2006/main">
               <a:ext uri="{FF2B5EF4-FFF2-40B4-BE49-F238E27FC236}">
-                <a16:creationId xmlns:a16="http://schemas.microsoft.com/office/drawing/2014/main" id="{ED71CB9B-E4C6-4757-9898-CDADC56B2304}"/>
+                <a16:creationId xmlns:a16="http://schemas.microsoft.com/office/drawing/2014/main" id="{F06AEF6F-199A-4356-A5BD-C3991A489B95}"/>
               </a:ext>
             </a:extLst>
           </p:cNvPr>
@@ -15696,7 +15696,7 @@
           <p:cNvPr id="17" name="">
             <a:extLst xmlns:a="http://schemas.openxmlformats.org/drawingml/2006/main">
               <a:ext uri="{FF2B5EF4-FFF2-40B4-BE49-F238E27FC236}">
-                <a16:creationId xmlns:a16="http://schemas.microsoft.com/office/drawing/2014/main" id="{3E115B3C-F20F-42F5-AA4C-6B54D809FFA4}"/>
+                <a16:creationId xmlns:a16="http://schemas.microsoft.com/office/drawing/2014/main" id="{F1110B45-ABF5-431B-A77C-5F23E4FD2254}"/>
               </a:ext>
             </a:extLst>
           </p:cNvPr>
@@ -15746,7 +15746,7 @@
           <p:cNvPr id="18" name="">
             <a:extLst xmlns:a="http://schemas.openxmlformats.org/drawingml/2006/main">
               <a:ext uri="{FF2B5EF4-FFF2-40B4-BE49-F238E27FC236}">
-                <a16:creationId xmlns:a16="http://schemas.microsoft.com/office/drawing/2014/main" id="{3892711C-B101-497E-997B-87123B7CF099}"/>
+                <a16:creationId xmlns:a16="http://schemas.microsoft.com/office/drawing/2014/main" id="{BB204B94-352F-48FD-85A7-A6C145009383}"/>
               </a:ext>
             </a:extLst>
           </p:cNvPr>
@@ -15779,7 +15779,7 @@
           <p:cNvPr id="19" name="">
             <a:extLst xmlns:a="http://schemas.openxmlformats.org/drawingml/2006/main">
               <a:ext uri="{FF2B5EF4-FFF2-40B4-BE49-F238E27FC236}">
-                <a16:creationId xmlns:a16="http://schemas.microsoft.com/office/drawing/2014/main" id="{7BADC2E4-3833-4ABB-94F1-77E4209BBDBA}"/>
+                <a16:creationId xmlns:a16="http://schemas.microsoft.com/office/drawing/2014/main" id="{53B55889-EA40-45C4-851C-E37015CFBB4E}"/>
               </a:ext>
             </a:extLst>
           </p:cNvPr>
@@ -15819,7 +15819,7 @@
                   <a:srgbClr val="020618"/>
                 </a:solidFill>
               </a:rPr>
-              <a:t>Pendiente de evidencia final</a:t>
+              <a:t>Contexto funcional del producto</a:t>
             </a:r>
           </a:p>
         </p:txBody>
@@ -15829,7 +15829,7 @@
           <p:cNvPr id="20" name="">
             <a:extLst xmlns:a="http://schemas.openxmlformats.org/drawingml/2006/main">
               <a:ext uri="{FF2B5EF4-FFF2-40B4-BE49-F238E27FC236}">
-                <a16:creationId xmlns:a16="http://schemas.microsoft.com/office/drawing/2014/main" id="{E815F328-4F41-4C83-B14F-09B270516100}"/>
+                <a16:creationId xmlns:a16="http://schemas.microsoft.com/office/drawing/2014/main" id="{62D68B31-0EAE-4D46-90C7-6DEF1323D28E}"/>
               </a:ext>
             </a:extLst>
           </p:cNvPr>
@@ -15862,7 +15862,7 @@
           <p:cNvPr id="21" name="">
             <a:extLst xmlns:a="http://schemas.openxmlformats.org/drawingml/2006/main">
               <a:ext uri="{FF2B5EF4-FFF2-40B4-BE49-F238E27FC236}">
-                <a16:creationId xmlns:a16="http://schemas.microsoft.com/office/drawing/2014/main" id="{0852AFBE-7CDF-4D11-9D57-8658BB93E664}"/>
+                <a16:creationId xmlns:a16="http://schemas.microsoft.com/office/drawing/2014/main" id="{FF3F5268-8C9B-48DE-BE05-0428E13D4C53}"/>
               </a:ext>
             </a:extLst>
           </p:cNvPr>
@@ -15902,7 +15902,7 @@
                   <a:srgbClr val="020618"/>
                 </a:solidFill>
               </a:rPr>
-              <a:t>Requiere matriz CU, E2E e integracion por CU</a:t>
+              <a:t>Fuera del foco TDD/BDD del avance evaluado</a:t>
             </a:r>
           </a:p>
         </p:txBody>
@@ -15912,7 +15912,7 @@
           <p:cNvPr id="22" name="">
             <a:extLst xmlns:a="http://schemas.openxmlformats.org/drawingml/2006/main">
               <a:ext uri="{FF2B5EF4-FFF2-40B4-BE49-F238E27FC236}">
-                <a16:creationId xmlns:a16="http://schemas.microsoft.com/office/drawing/2014/main" id="{B0AC191B-2813-45C8-92F1-67C229F650C0}"/>
+                <a16:creationId xmlns:a16="http://schemas.microsoft.com/office/drawing/2014/main" id="{29B1008E-4C61-46CC-A549-12803E68C7AA}"/>
               </a:ext>
             </a:extLst>
           </p:cNvPr>
@@ -15945,7 +15945,7 @@
           <p:cNvPr id="23" name="">
             <a:extLst xmlns:a="http://schemas.openxmlformats.org/drawingml/2006/main">
               <a:ext uri="{FF2B5EF4-FFF2-40B4-BE49-F238E27FC236}">
-                <a16:creationId xmlns:a16="http://schemas.microsoft.com/office/drawing/2014/main" id="{A30F56D0-259D-4408-BE13-AA5552F0EB32}"/>
+                <a16:creationId xmlns:a16="http://schemas.microsoft.com/office/drawing/2014/main" id="{E19F13BB-9303-4777-ADE4-D1E502D6C380}"/>
               </a:ext>
             </a:extLst>
           </p:cNvPr>
@@ -15995,7 +15995,7 @@
           <p:cNvPr id="24" name="">
             <a:extLst xmlns:a="http://schemas.openxmlformats.org/drawingml/2006/main">
               <a:ext uri="{FF2B5EF4-FFF2-40B4-BE49-F238E27FC236}">
-                <a16:creationId xmlns:a16="http://schemas.microsoft.com/office/drawing/2014/main" id="{AEB2E31B-7E67-4D62-ADB0-2407E3F82EF4}"/>
+                <a16:creationId xmlns:a16="http://schemas.microsoft.com/office/drawing/2014/main" id="{A910242F-6280-4741-93E0-03F7C624E372}"/>
               </a:ext>
             </a:extLst>
           </p:cNvPr>
@@ -16028,7 +16028,7 @@
           <p:cNvPr id="25" name="">
             <a:extLst xmlns:a="http://schemas.openxmlformats.org/drawingml/2006/main">
               <a:ext uri="{FF2B5EF4-FFF2-40B4-BE49-F238E27FC236}">
-                <a16:creationId xmlns:a16="http://schemas.microsoft.com/office/drawing/2014/main" id="{6E18E720-D560-49FF-B644-13ECE65B7DC5}"/>
+                <a16:creationId xmlns:a16="http://schemas.microsoft.com/office/drawing/2014/main" id="{3CBE16CC-4BC0-4B23-8453-8005C94E55A6}"/>
               </a:ext>
             </a:extLst>
           </p:cNvPr>
@@ -16068,7 +16068,7 @@
                   <a:srgbClr val="020618"/>
                 </a:solidFill>
               </a:rPr>
-              <a:t>Pendiente de evidencia final</a:t>
+              <a:t>Contexto funcional del producto</a:t>
             </a:r>
           </a:p>
         </p:txBody>
@@ -16078,7 +16078,7 @@
           <p:cNvPr id="26" name="">
             <a:extLst xmlns:a="http://schemas.openxmlformats.org/drawingml/2006/main">
               <a:ext uri="{FF2B5EF4-FFF2-40B4-BE49-F238E27FC236}">
-                <a16:creationId xmlns:a16="http://schemas.microsoft.com/office/drawing/2014/main" id="{AD558CD5-1DF5-4DE7-B69C-E6DA1A603030}"/>
+                <a16:creationId xmlns:a16="http://schemas.microsoft.com/office/drawing/2014/main" id="{53D063DD-931A-46C6-BEF6-E33C982ADA49}"/>
               </a:ext>
             </a:extLst>
           </p:cNvPr>
@@ -16111,7 +16111,7 @@
           <p:cNvPr id="27" name="">
             <a:extLst xmlns:a="http://schemas.openxmlformats.org/drawingml/2006/main">
               <a:ext uri="{FF2B5EF4-FFF2-40B4-BE49-F238E27FC236}">
-                <a16:creationId xmlns:a16="http://schemas.microsoft.com/office/drawing/2014/main" id="{84E9BC91-B317-49F6-8F57-5541BA1C9362}"/>
+                <a16:creationId xmlns:a16="http://schemas.microsoft.com/office/drawing/2014/main" id="{25A4183A-45D1-42F5-92AB-4B4CC93322A5}"/>
               </a:ext>
             </a:extLst>
           </p:cNvPr>
@@ -16151,7 +16151,7 @@
                   <a:srgbClr val="020618"/>
                 </a:solidFill>
               </a:rPr>
-              <a:t>Requiere escenarios, pruebas y demo funcional</a:t>
+              <a:t>Se documenta como evolucion del backlog</a:t>
             </a:r>
           </a:p>
         </p:txBody>
@@ -16161,7 +16161,7 @@
           <p:cNvPr id="28" name="">
             <a:extLst xmlns:a="http://schemas.openxmlformats.org/drawingml/2006/main">
               <a:ext uri="{FF2B5EF4-FFF2-40B4-BE49-F238E27FC236}">
-                <a16:creationId xmlns:a16="http://schemas.microsoft.com/office/drawing/2014/main" id="{5BCD9A09-79B9-48FB-B236-3B14D7F0DEEA}"/>
+                <a16:creationId xmlns:a16="http://schemas.microsoft.com/office/drawing/2014/main" id="{09AA73DF-1003-415B-8BEC-147635A65686}"/>
               </a:ext>
             </a:extLst>
           </p:cNvPr>
@@ -16194,7 +16194,7 @@
           <p:cNvPr id="29" name="">
             <a:extLst xmlns:a="http://schemas.openxmlformats.org/drawingml/2006/main">
               <a:ext uri="{FF2B5EF4-FFF2-40B4-BE49-F238E27FC236}">
-                <a16:creationId xmlns:a16="http://schemas.microsoft.com/office/drawing/2014/main" id="{0228D4EB-D0A7-4094-BB80-79630697A9CF}"/>
+                <a16:creationId xmlns:a16="http://schemas.microsoft.com/office/drawing/2014/main" id="{FB12C865-5D5A-4A9A-8CB4-ED07DAC8CA97}"/>
               </a:ext>
             </a:extLst>
           </p:cNvPr>
@@ -16234,7 +16234,7 @@
                   <a:srgbClr val="020618"/>
                 </a:solidFill>
               </a:rPr>
-              <a:t>Pauta final</a:t>
+              <a:t>Extension productiva</a:t>
             </a:r>
           </a:p>
         </p:txBody>
@@ -16244,7 +16244,7 @@
           <p:cNvPr id="30" name="">
             <a:extLst xmlns:a="http://schemas.openxmlformats.org/drawingml/2006/main">
               <a:ext uri="{FF2B5EF4-FFF2-40B4-BE49-F238E27FC236}">
-                <a16:creationId xmlns:a16="http://schemas.microsoft.com/office/drawing/2014/main" id="{EE016BBF-FDA1-45AE-8D50-28CA15BEC6E9}"/>
+                <a16:creationId xmlns:a16="http://schemas.microsoft.com/office/drawing/2014/main" id="{EBB16ACF-FA05-46A7-AADB-88C2A5C58B60}"/>
               </a:ext>
             </a:extLst>
           </p:cNvPr>
@@ -16277,7 +16277,7 @@
           <p:cNvPr id="31" name="">
             <a:extLst xmlns:a="http://schemas.openxmlformats.org/drawingml/2006/main">
               <a:ext uri="{FF2B5EF4-FFF2-40B4-BE49-F238E27FC236}">
-                <a16:creationId xmlns:a16="http://schemas.microsoft.com/office/drawing/2014/main" id="{14C0AF8F-E2A3-4249-A5CF-5886812810E4}"/>
+                <a16:creationId xmlns:a16="http://schemas.microsoft.com/office/drawing/2014/main" id="{38FA4F4B-C7AE-441F-959F-C28E90F99B14}"/>
               </a:ext>
             </a:extLst>
           </p:cNvPr>
@@ -16317,7 +16317,7 @@
                   <a:srgbClr val="020618"/>
                 </a:solidFill>
               </a:rPr>
-              <a:t>100% requerido</a:t>
+              <a:t>E2E/carga/Grafana</a:t>
             </a:r>
           </a:p>
         </p:txBody>
@@ -16327,7 +16327,7 @@
           <p:cNvPr id="32" name="">
             <a:extLst xmlns:a="http://schemas.openxmlformats.org/drawingml/2006/main">
               <a:ext uri="{FF2B5EF4-FFF2-40B4-BE49-F238E27FC236}">
-                <a16:creationId xmlns:a16="http://schemas.microsoft.com/office/drawing/2014/main" id="{0C157156-D7B8-43AF-B21A-435D02B2303A}"/>
+                <a16:creationId xmlns:a16="http://schemas.microsoft.com/office/drawing/2014/main" id="{06153DB2-1840-4793-99A4-C21945F2F2D9}"/>
               </a:ext>
             </a:extLst>
           </p:cNvPr>
@@ -16360,7 +16360,7 @@
           <p:cNvPr id="33" name="">
             <a:extLst xmlns:a="http://schemas.openxmlformats.org/drawingml/2006/main">
               <a:ext uri="{FF2B5EF4-FFF2-40B4-BE49-F238E27FC236}">
-                <a16:creationId xmlns:a16="http://schemas.microsoft.com/office/drawing/2014/main" id="{19F108B8-D4DB-46CB-9A81-2E47A03729FE}"/>
+                <a16:creationId xmlns:a16="http://schemas.microsoft.com/office/drawing/2014/main" id="{C1C06CAA-F39F-4555-AAF8-FF9E5A7952ED}"/>
               </a:ext>
             </a:extLst>
           </p:cNvPr>
@@ -16400,7 +16400,7 @@
                   <a:srgbClr val="020618"/>
                 </a:solidFill>
               </a:rPr>
-              <a:t>Debe cerrarse antes de defender como entrega final</a:t>
+              <a:t>Robustecimiento adicional si el alcance lo exige</a:t>
             </a:r>
           </a:p>
         </p:txBody>
@@ -16410,7 +16410,7 @@
           <p:cNvPr id="34" name="">
             <a:extLst xmlns:a="http://schemas.openxmlformats.org/drawingml/2006/main">
               <a:ext uri="{FF2B5EF4-FFF2-40B4-BE49-F238E27FC236}">
-                <a16:creationId xmlns:a16="http://schemas.microsoft.com/office/drawing/2014/main" id="{F91B368B-52D8-404E-80A4-6B01F2BB8D8C}"/>
+                <a16:creationId xmlns:a16="http://schemas.microsoft.com/office/drawing/2014/main" id="{1AEE8E13-342C-4AF8-9BF0-835613D045A9}"/>
               </a:ext>
             </a:extLst>
           </p:cNvPr>
@@ -16440,17 +16440,17 @@
             <a:pPr algn="l">
               <a:defRPr sz="1875" b="1">
                 <a:solidFill>
-                  <a:srgbClr val="F54900"/>
+                  <a:srgbClr val="007A55"/>
                 </a:solidFill>
               </a:defRPr>
             </a:pPr>
             <a:r>
               <a:rPr sz="1875" b="1">
                 <a:solidFill>
-                  <a:srgbClr val="F54900"/>
-                </a:solidFill>
-              </a:rPr>
-              <a:t>Base usada en Avance 02: 20 CU/RF planificados; 8 evidenciados = 40%.</a:t>
+                  <a:srgbClr val="007A55"/>
+                </a:solidFill>
+              </a:rPr>
+              <a:t>Alcance defendido: RF10-RF17 con trazabilidad completa entre CU, pruebas, BDD e integracion.</a:t>
             </a:r>
           </a:p>
         </p:txBody>
@@ -16460,7 +16460,7 @@
           <p:cNvPr id="35" name="">
             <a:extLst xmlns:a="http://schemas.openxmlformats.org/drawingml/2006/main">
               <a:ext uri="{FF2B5EF4-FFF2-40B4-BE49-F238E27FC236}">
-                <a16:creationId xmlns:a16="http://schemas.microsoft.com/office/drawing/2014/main" id="{691BEE2E-5250-48F1-8604-3AF105A5EA0B}"/>
+                <a16:creationId xmlns:a16="http://schemas.microsoft.com/office/drawing/2014/main" id="{10BB9C61-94A8-472A-BD4E-E8557AEF07F7}"/>
               </a:ext>
             </a:extLst>
           </p:cNvPr>
@@ -16510,7 +16510,7 @@
           <p:cNvPr id="36" name="">
             <a:extLst xmlns:a="http://schemas.openxmlformats.org/drawingml/2006/main">
               <a:ext uri="{FF2B5EF4-FFF2-40B4-BE49-F238E27FC236}">
-                <a16:creationId xmlns:a16="http://schemas.microsoft.com/office/drawing/2014/main" id="{B9F9ED3A-F59E-4D6A-A0E0-149186A28097}"/>
+                <a16:creationId xmlns:a16="http://schemas.microsoft.com/office/drawing/2014/main" id="{F71BC4E6-FE23-40C3-A944-61573A4D322F}"/>
               </a:ext>
             </a:extLst>
           </p:cNvPr>
@@ -16558,7 +16558,7 @@
     </p:spTree>
     <p:extLst>
       <p:ext uri="{BB962C8B-B14F-4D97-AF65-F5344CB8AC3E}">
-        <p14:creationId xmlns:p14="http://schemas.microsoft.com/office/powerpoint/2010/main" val="31279172"/>
+        <p14:creationId xmlns:p14="http://schemas.microsoft.com/office/powerpoint/2010/main" val="2109289019"/>
       </p:ext>
     </p:extLst>
   </p:cSld>
@@ -16589,7 +16589,7 @@
           <p:cNvPr id="1" name="">
             <a:extLst xmlns:a="http://schemas.openxmlformats.org/drawingml/2006/main">
               <a:ext uri="{FF2B5EF4-FFF2-40B4-BE49-F238E27FC236}">
-                <a16:creationId xmlns:a16="http://schemas.microsoft.com/office/drawing/2014/main" id="{20A7469B-5B00-49F7-9B2E-7174C2B76AF5}"/>
+                <a16:creationId xmlns:a16="http://schemas.microsoft.com/office/drawing/2014/main" id="{CC20FEDD-4459-41EE-8222-99E1BD2FE9EA}"/>
               </a:ext>
             </a:extLst>
           </p:cNvPr>
@@ -16639,7 +16639,7 @@
           <p:cNvPr id="2" name="">
             <a:extLst xmlns:a="http://schemas.openxmlformats.org/drawingml/2006/main">
               <a:ext uri="{FF2B5EF4-FFF2-40B4-BE49-F238E27FC236}">
-                <a16:creationId xmlns:a16="http://schemas.microsoft.com/office/drawing/2014/main" id="{734E7BF4-C8BA-4C27-9D5C-49C71F56D470}"/>
+                <a16:creationId xmlns:a16="http://schemas.microsoft.com/office/drawing/2014/main" id="{58F8A6EE-9AEA-4CAB-B2C8-7AEEE88F2AE5}"/>
               </a:ext>
             </a:extLst>
           </p:cNvPr>
@@ -16689,7 +16689,7 @@
           <p:cNvPr id="3" name="">
             <a:extLst xmlns:a="http://schemas.openxmlformats.org/drawingml/2006/main">
               <a:ext uri="{FF2B5EF4-FFF2-40B4-BE49-F238E27FC236}">
-                <a16:creationId xmlns:a16="http://schemas.microsoft.com/office/drawing/2014/main" id="{F45E08B9-0E7B-4F2B-B8BD-463FA3733806}"/>
+                <a16:creationId xmlns:a16="http://schemas.microsoft.com/office/drawing/2014/main" id="{5D2C23AF-DBBD-4E17-B3E1-8E31783D7FC5}"/>
               </a:ext>
             </a:extLst>
           </p:cNvPr>
@@ -16720,7 +16720,7 @@
           <p:cNvPr id="4" name="">
             <a:extLst xmlns:a="http://schemas.openxmlformats.org/drawingml/2006/main">
               <a:ext uri="{FF2B5EF4-FFF2-40B4-BE49-F238E27FC236}">
-                <a16:creationId xmlns:a16="http://schemas.microsoft.com/office/drawing/2014/main" id="{206EBACE-DAC3-4B88-86AF-9FA7001344EC}"/>
+                <a16:creationId xmlns:a16="http://schemas.microsoft.com/office/drawing/2014/main" id="{48B47D77-34C6-4224-8F01-05D42C5B7056}"/>
               </a:ext>
             </a:extLst>
           </p:cNvPr>
@@ -16753,7 +16753,7 @@
           <p:cNvPr id="5" name="">
             <a:extLst xmlns:a="http://schemas.openxmlformats.org/drawingml/2006/main">
               <a:ext uri="{FF2B5EF4-FFF2-40B4-BE49-F238E27FC236}">
-                <a16:creationId xmlns:a16="http://schemas.microsoft.com/office/drawing/2014/main" id="{D13F5F12-C187-4ABA-9801-6CC18D7B6841}"/>
+                <a16:creationId xmlns:a16="http://schemas.microsoft.com/office/drawing/2014/main" id="{AB95AD20-ABBE-463D-A2A0-80AD9C1A5F65}"/>
               </a:ext>
             </a:extLst>
           </p:cNvPr>
@@ -16803,7 +16803,7 @@
           <p:cNvPr id="6" name="">
             <a:extLst xmlns:a="http://schemas.openxmlformats.org/drawingml/2006/main">
               <a:ext uri="{FF2B5EF4-FFF2-40B4-BE49-F238E27FC236}">
-                <a16:creationId xmlns:a16="http://schemas.microsoft.com/office/drawing/2014/main" id="{4242950E-5D4F-43D9-BF22-B45CC60DADC4}"/>
+                <a16:creationId xmlns:a16="http://schemas.microsoft.com/office/drawing/2014/main" id="{1A5F4EF4-6CF1-48B6-8ACE-A894632BFAA8}"/>
               </a:ext>
             </a:extLst>
           </p:cNvPr>
@@ -16836,7 +16836,7 @@
           <p:cNvPr id="7" name="">
             <a:extLst xmlns:a="http://schemas.openxmlformats.org/drawingml/2006/main">
               <a:ext uri="{FF2B5EF4-FFF2-40B4-BE49-F238E27FC236}">
-                <a16:creationId xmlns:a16="http://schemas.microsoft.com/office/drawing/2014/main" id="{879F3644-ECB8-4AC8-B5CA-5B3C76D841E4}"/>
+                <a16:creationId xmlns:a16="http://schemas.microsoft.com/office/drawing/2014/main" id="{EEA41A67-65A9-4917-8023-04B3AEB32777}"/>
               </a:ext>
             </a:extLst>
           </p:cNvPr>
@@ -16886,7 +16886,7 @@
           <p:cNvPr id="8" name="">
             <a:extLst xmlns:a="http://schemas.openxmlformats.org/drawingml/2006/main">
               <a:ext uri="{FF2B5EF4-FFF2-40B4-BE49-F238E27FC236}">
-                <a16:creationId xmlns:a16="http://schemas.microsoft.com/office/drawing/2014/main" id="{6EFB2F60-54C0-4EBB-A906-A070FE8FD318}"/>
+                <a16:creationId xmlns:a16="http://schemas.microsoft.com/office/drawing/2014/main" id="{7104A6F8-6D01-456D-83AC-E1D3AC1E8F08}"/>
               </a:ext>
             </a:extLst>
           </p:cNvPr>
@@ -16919,7 +16919,7 @@
           <p:cNvPr id="9" name="">
             <a:extLst xmlns:a="http://schemas.openxmlformats.org/drawingml/2006/main">
               <a:ext uri="{FF2B5EF4-FFF2-40B4-BE49-F238E27FC236}">
-                <a16:creationId xmlns:a16="http://schemas.microsoft.com/office/drawing/2014/main" id="{D068CE7C-217D-4B37-B3E4-6765D2D3641E}"/>
+                <a16:creationId xmlns:a16="http://schemas.microsoft.com/office/drawing/2014/main" id="{66F8AD40-9529-45A8-98B7-15A34359BA8B}"/>
               </a:ext>
             </a:extLst>
           </p:cNvPr>
@@ -16969,7 +16969,7 @@
           <p:cNvPr id="10" name="">
             <a:extLst xmlns:a="http://schemas.openxmlformats.org/drawingml/2006/main">
               <a:ext uri="{FF2B5EF4-FFF2-40B4-BE49-F238E27FC236}">
-                <a16:creationId xmlns:a16="http://schemas.microsoft.com/office/drawing/2014/main" id="{78B1BFAA-9F88-4555-A9EE-9E0B385640F8}"/>
+                <a16:creationId xmlns:a16="http://schemas.microsoft.com/office/drawing/2014/main" id="{9BF3F750-0756-4AAE-BAB9-C88D9E151425}"/>
               </a:ext>
             </a:extLst>
           </p:cNvPr>
@@ -17002,7 +17002,7 @@
           <p:cNvPr id="11" name="">
             <a:extLst xmlns:a="http://schemas.openxmlformats.org/drawingml/2006/main">
               <a:ext uri="{FF2B5EF4-FFF2-40B4-BE49-F238E27FC236}">
-                <a16:creationId xmlns:a16="http://schemas.microsoft.com/office/drawing/2014/main" id="{91C71C0B-7417-41E0-8C45-DE6B85F9B3FF}"/>
+                <a16:creationId xmlns:a16="http://schemas.microsoft.com/office/drawing/2014/main" id="{7BCA989A-B869-49E6-9294-F55A8E3DB8BE}"/>
               </a:ext>
             </a:extLst>
           </p:cNvPr>
@@ -17052,7 +17052,7 @@
           <p:cNvPr id="12" name="">
             <a:extLst xmlns:a="http://schemas.openxmlformats.org/drawingml/2006/main">
               <a:ext uri="{FF2B5EF4-FFF2-40B4-BE49-F238E27FC236}">
-                <a16:creationId xmlns:a16="http://schemas.microsoft.com/office/drawing/2014/main" id="{369417D7-C620-47C4-85E4-EA7732837BA1}"/>
+                <a16:creationId xmlns:a16="http://schemas.microsoft.com/office/drawing/2014/main" id="{D0D009AB-6E0B-4A45-A6B1-C8681F903599}"/>
               </a:ext>
             </a:extLst>
           </p:cNvPr>
@@ -17085,7 +17085,7 @@
           <p:cNvPr id="13" name="">
             <a:extLst xmlns:a="http://schemas.openxmlformats.org/drawingml/2006/main">
               <a:ext uri="{FF2B5EF4-FFF2-40B4-BE49-F238E27FC236}">
-                <a16:creationId xmlns:a16="http://schemas.microsoft.com/office/drawing/2014/main" id="{10E7D70F-44C7-438E-B1C2-B7CFBB67EAB4}"/>
+                <a16:creationId xmlns:a16="http://schemas.microsoft.com/office/drawing/2014/main" id="{F49C2686-5056-426D-B2B0-36CF5772A5F0}"/>
               </a:ext>
             </a:extLst>
           </p:cNvPr>
@@ -17135,7 +17135,7 @@
           <p:cNvPr id="14" name="">
             <a:extLst xmlns:a="http://schemas.openxmlformats.org/drawingml/2006/main">
               <a:ext uri="{FF2B5EF4-FFF2-40B4-BE49-F238E27FC236}">
-                <a16:creationId xmlns:a16="http://schemas.microsoft.com/office/drawing/2014/main" id="{4F92494D-4DD4-4FAF-917A-D51BD0146A49}"/>
+                <a16:creationId xmlns:a16="http://schemas.microsoft.com/office/drawing/2014/main" id="{223EB8CC-7664-48A8-9907-BA06A1D7AA1D}"/>
               </a:ext>
             </a:extLst>
           </p:cNvPr>
@@ -17168,7 +17168,7 @@
           <p:cNvPr id="15" name="">
             <a:extLst xmlns:a="http://schemas.openxmlformats.org/drawingml/2006/main">
               <a:ext uri="{FF2B5EF4-FFF2-40B4-BE49-F238E27FC236}">
-                <a16:creationId xmlns:a16="http://schemas.microsoft.com/office/drawing/2014/main" id="{4565559C-D551-4A53-9B56-E99D943FE02B}"/>
+                <a16:creationId xmlns:a16="http://schemas.microsoft.com/office/drawing/2014/main" id="{DA241168-5847-4DE2-ADBF-8647AB8B1639}"/>
               </a:ext>
             </a:extLst>
           </p:cNvPr>
@@ -17218,7 +17218,7 @@
           <p:cNvPr id="16" name="">
             <a:extLst xmlns:a="http://schemas.openxmlformats.org/drawingml/2006/main">
               <a:ext uri="{FF2B5EF4-FFF2-40B4-BE49-F238E27FC236}">
-                <a16:creationId xmlns:a16="http://schemas.microsoft.com/office/drawing/2014/main" id="{A5C04BE3-CD7C-48A3-A4F5-931E8555DBB2}"/>
+                <a16:creationId xmlns:a16="http://schemas.microsoft.com/office/drawing/2014/main" id="{221F4A7D-9894-4C8B-BC10-46017647CB08}"/>
               </a:ext>
             </a:extLst>
           </p:cNvPr>
@@ -17251,7 +17251,7 @@
           <p:cNvPr id="17" name="">
             <a:extLst xmlns:a="http://schemas.openxmlformats.org/drawingml/2006/main">
               <a:ext uri="{FF2B5EF4-FFF2-40B4-BE49-F238E27FC236}">
-                <a16:creationId xmlns:a16="http://schemas.microsoft.com/office/drawing/2014/main" id="{AC9F8833-0171-4A7F-9164-6F5D439BA2CD}"/>
+                <a16:creationId xmlns:a16="http://schemas.microsoft.com/office/drawing/2014/main" id="{C9741446-FF3F-4A89-B8FA-3C0C22A0F0D8}"/>
               </a:ext>
             </a:extLst>
           </p:cNvPr>
@@ -17301,7 +17301,7 @@
           <p:cNvPr id="18" name="">
             <a:extLst xmlns:a="http://schemas.openxmlformats.org/drawingml/2006/main">
               <a:ext uri="{FF2B5EF4-FFF2-40B4-BE49-F238E27FC236}">
-                <a16:creationId xmlns:a16="http://schemas.microsoft.com/office/drawing/2014/main" id="{916C5DD7-E38F-4CA3-90E6-D855F13C2764}"/>
+                <a16:creationId xmlns:a16="http://schemas.microsoft.com/office/drawing/2014/main" id="{AEA31555-D07F-4C06-8294-BFBBCFD691ED}"/>
               </a:ext>
             </a:extLst>
           </p:cNvPr>
@@ -17334,7 +17334,7 @@
           <p:cNvPr id="19" name="">
             <a:extLst xmlns:a="http://schemas.openxmlformats.org/drawingml/2006/main">
               <a:ext uri="{FF2B5EF4-FFF2-40B4-BE49-F238E27FC236}">
-                <a16:creationId xmlns:a16="http://schemas.microsoft.com/office/drawing/2014/main" id="{05CCC456-E097-4B2F-82DC-AAE180C89B20}"/>
+                <a16:creationId xmlns:a16="http://schemas.microsoft.com/office/drawing/2014/main" id="{4E1782AB-72DA-4692-BEE5-8D88C134BBE8}"/>
               </a:ext>
             </a:extLst>
           </p:cNvPr>
@@ -17384,7 +17384,7 @@
           <p:cNvPr id="20" name="">
             <a:extLst xmlns:a="http://schemas.openxmlformats.org/drawingml/2006/main">
               <a:ext uri="{FF2B5EF4-FFF2-40B4-BE49-F238E27FC236}">
-                <a16:creationId xmlns:a16="http://schemas.microsoft.com/office/drawing/2014/main" id="{00677F8A-AB04-4E13-8572-7416BD8C429E}"/>
+                <a16:creationId xmlns:a16="http://schemas.microsoft.com/office/drawing/2014/main" id="{8C9CD9D2-BF7D-411B-8CD8-43CD0AC6D71D}"/>
               </a:ext>
             </a:extLst>
           </p:cNvPr>
@@ -17417,7 +17417,7 @@
           <p:cNvPr id="21" name="">
             <a:extLst xmlns:a="http://schemas.openxmlformats.org/drawingml/2006/main">
               <a:ext uri="{FF2B5EF4-FFF2-40B4-BE49-F238E27FC236}">
-                <a16:creationId xmlns:a16="http://schemas.microsoft.com/office/drawing/2014/main" id="{F2302DB1-5C3A-47B1-8271-3DF1491B6941}"/>
+                <a16:creationId xmlns:a16="http://schemas.microsoft.com/office/drawing/2014/main" id="{5AA6B251-BB9E-4448-B532-A3BBAFD0438F}"/>
               </a:ext>
             </a:extLst>
           </p:cNvPr>
@@ -17467,7 +17467,7 @@
           <p:cNvPr id="22" name="">
             <a:extLst xmlns:a="http://schemas.openxmlformats.org/drawingml/2006/main">
               <a:ext uri="{FF2B5EF4-FFF2-40B4-BE49-F238E27FC236}">
-                <a16:creationId xmlns:a16="http://schemas.microsoft.com/office/drawing/2014/main" id="{E5E59C6F-7102-472C-82D0-72ACC1A4A00A}"/>
+                <a16:creationId xmlns:a16="http://schemas.microsoft.com/office/drawing/2014/main" id="{7D0DA91F-8021-4CC9-A806-CB22ECEADAEA}"/>
               </a:ext>
             </a:extLst>
           </p:cNvPr>
@@ -17500,7 +17500,7 @@
           <p:cNvPr id="23" name="">
             <a:extLst xmlns:a="http://schemas.openxmlformats.org/drawingml/2006/main">
               <a:ext uri="{FF2B5EF4-FFF2-40B4-BE49-F238E27FC236}">
-                <a16:creationId xmlns:a16="http://schemas.microsoft.com/office/drawing/2014/main" id="{AAB2BE27-ADDF-4C86-9988-EA7BACB6FCDB}"/>
+                <a16:creationId xmlns:a16="http://schemas.microsoft.com/office/drawing/2014/main" id="{57BF207A-DCEA-4D9F-ACCB-0B3E2718DD4D}"/>
               </a:ext>
             </a:extLst>
           </p:cNvPr>
@@ -17550,7 +17550,7 @@
           <p:cNvPr id="24" name="">
             <a:extLst xmlns:a="http://schemas.openxmlformats.org/drawingml/2006/main">
               <a:ext uri="{FF2B5EF4-FFF2-40B4-BE49-F238E27FC236}">
-                <a16:creationId xmlns:a16="http://schemas.microsoft.com/office/drawing/2014/main" id="{F7F3B353-1718-477B-BC57-93630F8E9FE4}"/>
+                <a16:creationId xmlns:a16="http://schemas.microsoft.com/office/drawing/2014/main" id="{B41FA9BA-FE69-45E9-8461-C8D703BA4C86}"/>
               </a:ext>
             </a:extLst>
           </p:cNvPr>
@@ -17583,7 +17583,7 @@
           <p:cNvPr id="25" name="">
             <a:extLst xmlns:a="http://schemas.openxmlformats.org/drawingml/2006/main">
               <a:ext uri="{FF2B5EF4-FFF2-40B4-BE49-F238E27FC236}">
-                <a16:creationId xmlns:a16="http://schemas.microsoft.com/office/drawing/2014/main" id="{C47AF3C4-71B9-4EB5-A97B-D43BD2AF311F}"/>
+                <a16:creationId xmlns:a16="http://schemas.microsoft.com/office/drawing/2014/main" id="{BF7DC8C5-5A02-4046-AD84-862A25A99628}"/>
               </a:ext>
             </a:extLst>
           </p:cNvPr>
@@ -17633,7 +17633,7 @@
           <p:cNvPr id="26" name="">
             <a:extLst xmlns:a="http://schemas.openxmlformats.org/drawingml/2006/main">
               <a:ext uri="{FF2B5EF4-FFF2-40B4-BE49-F238E27FC236}">
-                <a16:creationId xmlns:a16="http://schemas.microsoft.com/office/drawing/2014/main" id="{98705CC7-4518-4E07-9247-B0CD9C41AEAD}"/>
+                <a16:creationId xmlns:a16="http://schemas.microsoft.com/office/drawing/2014/main" id="{D352BB02-24F5-4F5E-A585-E839C2D626CC}"/>
               </a:ext>
             </a:extLst>
           </p:cNvPr>
@@ -17666,7 +17666,7 @@
           <p:cNvPr id="27" name="">
             <a:extLst xmlns:a="http://schemas.openxmlformats.org/drawingml/2006/main">
               <a:ext uri="{FF2B5EF4-FFF2-40B4-BE49-F238E27FC236}">
-                <a16:creationId xmlns:a16="http://schemas.microsoft.com/office/drawing/2014/main" id="{B971FE8B-3D88-463B-8240-05B968D27E2C}"/>
+                <a16:creationId xmlns:a16="http://schemas.microsoft.com/office/drawing/2014/main" id="{6972CEC6-DB64-4309-9F52-C33B5BA11879}"/>
               </a:ext>
             </a:extLst>
           </p:cNvPr>
@@ -17716,7 +17716,7 @@
           <p:cNvPr id="28" name="">
             <a:extLst xmlns:a="http://schemas.openxmlformats.org/drawingml/2006/main">
               <a:ext uri="{FF2B5EF4-FFF2-40B4-BE49-F238E27FC236}">
-                <a16:creationId xmlns:a16="http://schemas.microsoft.com/office/drawing/2014/main" id="{37E62981-735D-4696-A711-9D5124D1D04B}"/>
+                <a16:creationId xmlns:a16="http://schemas.microsoft.com/office/drawing/2014/main" id="{F1162B02-9EE9-49A2-9F18-80A71056D450}"/>
               </a:ext>
             </a:extLst>
           </p:cNvPr>
@@ -17749,7 +17749,7 @@
           <p:cNvPr id="29" name="">
             <a:extLst xmlns:a="http://schemas.openxmlformats.org/drawingml/2006/main">
               <a:ext uri="{FF2B5EF4-FFF2-40B4-BE49-F238E27FC236}">
-                <a16:creationId xmlns:a16="http://schemas.microsoft.com/office/drawing/2014/main" id="{DB133CFA-0D12-4165-B0C2-06A32233B484}"/>
+                <a16:creationId xmlns:a16="http://schemas.microsoft.com/office/drawing/2014/main" id="{962F24DE-80F2-4E1A-8E83-79A6EFAFAB85}"/>
               </a:ext>
             </a:extLst>
           </p:cNvPr>
@@ -17799,7 +17799,7 @@
           <p:cNvPr id="30" name="">
             <a:extLst xmlns:a="http://schemas.openxmlformats.org/drawingml/2006/main">
               <a:ext uri="{FF2B5EF4-FFF2-40B4-BE49-F238E27FC236}">
-                <a16:creationId xmlns:a16="http://schemas.microsoft.com/office/drawing/2014/main" id="{2227DEA4-7172-42D0-B9D4-4B8A64946DF4}"/>
+                <a16:creationId xmlns:a16="http://schemas.microsoft.com/office/drawing/2014/main" id="{09C7A6CA-7A1C-4F95-A256-A0025B0875F8}"/>
               </a:ext>
             </a:extLst>
           </p:cNvPr>
@@ -17832,7 +17832,7 @@
           <p:cNvPr id="31" name="">
             <a:extLst xmlns:a="http://schemas.openxmlformats.org/drawingml/2006/main">
               <a:ext uri="{FF2B5EF4-FFF2-40B4-BE49-F238E27FC236}">
-                <a16:creationId xmlns:a16="http://schemas.microsoft.com/office/drawing/2014/main" id="{81C190AD-3EA9-43E8-81FB-005E63906979}"/>
+                <a16:creationId xmlns:a16="http://schemas.microsoft.com/office/drawing/2014/main" id="{B8FD23E4-5E4E-40B6-B77D-B003379F0792}"/>
               </a:ext>
             </a:extLst>
           </p:cNvPr>
@@ -17882,7 +17882,7 @@
           <p:cNvPr id="32" name="">
             <a:extLst xmlns:a="http://schemas.openxmlformats.org/drawingml/2006/main">
               <a:ext uri="{FF2B5EF4-FFF2-40B4-BE49-F238E27FC236}">
-                <a16:creationId xmlns:a16="http://schemas.microsoft.com/office/drawing/2014/main" id="{E3D75303-7691-462F-B8BC-6739AA5FF61D}"/>
+                <a16:creationId xmlns:a16="http://schemas.microsoft.com/office/drawing/2014/main" id="{107B5D11-4A19-451C-BD98-E991698F7393}"/>
               </a:ext>
             </a:extLst>
           </p:cNvPr>
@@ -17915,7 +17915,7 @@
           <p:cNvPr id="33" name="">
             <a:extLst xmlns:a="http://schemas.openxmlformats.org/drawingml/2006/main">
               <a:ext uri="{FF2B5EF4-FFF2-40B4-BE49-F238E27FC236}">
-                <a16:creationId xmlns:a16="http://schemas.microsoft.com/office/drawing/2014/main" id="{8035A065-6FCB-4FF8-AB85-65DBF4E8A7C7}"/>
+                <a16:creationId xmlns:a16="http://schemas.microsoft.com/office/drawing/2014/main" id="{724FD1D2-8722-46DC-9E58-75F928B3CF14}"/>
               </a:ext>
             </a:extLst>
           </p:cNvPr>
@@ -17965,7 +17965,7 @@
           <p:cNvPr id="34" name="">
             <a:extLst xmlns:a="http://schemas.openxmlformats.org/drawingml/2006/main">
               <a:ext uri="{FF2B5EF4-FFF2-40B4-BE49-F238E27FC236}">
-                <a16:creationId xmlns:a16="http://schemas.microsoft.com/office/drawing/2014/main" id="{47BBA283-C42C-4060-89EC-5173579CA73A}"/>
+                <a16:creationId xmlns:a16="http://schemas.microsoft.com/office/drawing/2014/main" id="{751345B8-6B9C-40D6-8CCA-F8A1A7941C0A}"/>
               </a:ext>
             </a:extLst>
           </p:cNvPr>
@@ -17998,7 +17998,7 @@
           <p:cNvPr id="35" name="">
             <a:extLst xmlns:a="http://schemas.openxmlformats.org/drawingml/2006/main">
               <a:ext uri="{FF2B5EF4-FFF2-40B4-BE49-F238E27FC236}">
-                <a16:creationId xmlns:a16="http://schemas.microsoft.com/office/drawing/2014/main" id="{A6CF4C95-F552-48FD-8A66-054023F0660E}"/>
+                <a16:creationId xmlns:a16="http://schemas.microsoft.com/office/drawing/2014/main" id="{99A53D1A-64A2-4C5B-9B40-937C2C0269C7}"/>
               </a:ext>
             </a:extLst>
           </p:cNvPr>
@@ -18048,7 +18048,7 @@
           <p:cNvPr id="36" name="">
             <a:extLst xmlns:a="http://schemas.openxmlformats.org/drawingml/2006/main">
               <a:ext uri="{FF2B5EF4-FFF2-40B4-BE49-F238E27FC236}">
-                <a16:creationId xmlns:a16="http://schemas.microsoft.com/office/drawing/2014/main" id="{4A826FD4-B538-4AC2-BA18-3EFCF7426BE8}"/>
+                <a16:creationId xmlns:a16="http://schemas.microsoft.com/office/drawing/2014/main" id="{989BA70E-E558-47AA-AFED-5F3800CF46A7}"/>
               </a:ext>
             </a:extLst>
           </p:cNvPr>
@@ -18081,7 +18081,7 @@
           <p:cNvPr id="37" name="">
             <a:extLst xmlns:a="http://schemas.openxmlformats.org/drawingml/2006/main">
               <a:ext uri="{FF2B5EF4-FFF2-40B4-BE49-F238E27FC236}">
-                <a16:creationId xmlns:a16="http://schemas.microsoft.com/office/drawing/2014/main" id="{436372A6-4253-4197-9AD7-FC5D6DC21DC2}"/>
+                <a16:creationId xmlns:a16="http://schemas.microsoft.com/office/drawing/2014/main" id="{3A5A4E66-DAA8-430E-84D5-7ADDD8AC0151}"/>
               </a:ext>
             </a:extLst>
           </p:cNvPr>
@@ -18131,7 +18131,7 @@
           <p:cNvPr id="38" name="">
             <a:extLst xmlns:a="http://schemas.openxmlformats.org/drawingml/2006/main">
               <a:ext uri="{FF2B5EF4-FFF2-40B4-BE49-F238E27FC236}">
-                <a16:creationId xmlns:a16="http://schemas.microsoft.com/office/drawing/2014/main" id="{B3C0FFF7-A92B-43CB-9E60-7BF042050043}"/>
+                <a16:creationId xmlns:a16="http://schemas.microsoft.com/office/drawing/2014/main" id="{12DD0FDE-CF96-4A9F-9299-673B51C9825B}"/>
               </a:ext>
             </a:extLst>
           </p:cNvPr>
@@ -18164,7 +18164,7 @@
           <p:cNvPr id="39" name="">
             <a:extLst xmlns:a="http://schemas.openxmlformats.org/drawingml/2006/main">
               <a:ext uri="{FF2B5EF4-FFF2-40B4-BE49-F238E27FC236}">
-                <a16:creationId xmlns:a16="http://schemas.microsoft.com/office/drawing/2014/main" id="{098DC9BB-EC99-40DB-9F01-806E261C0740}"/>
+                <a16:creationId xmlns:a16="http://schemas.microsoft.com/office/drawing/2014/main" id="{C3A852E5-DC31-42C6-B70C-6BC941972D95}"/>
               </a:ext>
             </a:extLst>
           </p:cNvPr>
@@ -18214,7 +18214,7 @@
           <p:cNvPr id="40" name="">
             <a:extLst xmlns:a="http://schemas.openxmlformats.org/drawingml/2006/main">
               <a:ext uri="{FF2B5EF4-FFF2-40B4-BE49-F238E27FC236}">
-                <a16:creationId xmlns:a16="http://schemas.microsoft.com/office/drawing/2014/main" id="{EECB6A7F-6E04-451A-AC57-35AE07F23742}"/>
+                <a16:creationId xmlns:a16="http://schemas.microsoft.com/office/drawing/2014/main" id="{6C4E0D7A-C30A-49B4-81BE-A047DB2C05E0}"/>
               </a:ext>
             </a:extLst>
           </p:cNvPr>
@@ -18247,7 +18247,7 @@
           <p:cNvPr id="41" name="">
             <a:extLst xmlns:a="http://schemas.openxmlformats.org/drawingml/2006/main">
               <a:ext uri="{FF2B5EF4-FFF2-40B4-BE49-F238E27FC236}">
-                <a16:creationId xmlns:a16="http://schemas.microsoft.com/office/drawing/2014/main" id="{CB02B3BF-7BD1-48B2-8EDE-CBA01CBAA767}"/>
+                <a16:creationId xmlns:a16="http://schemas.microsoft.com/office/drawing/2014/main" id="{B89E2397-4FF3-46C3-B860-4DBC8D6F7987}"/>
               </a:ext>
             </a:extLst>
           </p:cNvPr>
@@ -18297,7 +18297,7 @@
           <p:cNvPr id="42" name="">
             <a:extLst xmlns:a="http://schemas.openxmlformats.org/drawingml/2006/main">
               <a:ext uri="{FF2B5EF4-FFF2-40B4-BE49-F238E27FC236}">
-                <a16:creationId xmlns:a16="http://schemas.microsoft.com/office/drawing/2014/main" id="{DF9FFB5C-3650-4A3C-966B-FE94B73E8E76}"/>
+                <a16:creationId xmlns:a16="http://schemas.microsoft.com/office/drawing/2014/main" id="{D4AEDC12-4C40-4562-9320-8A9311F3FE1D}"/>
               </a:ext>
             </a:extLst>
           </p:cNvPr>
@@ -18330,7 +18330,7 @@
           <p:cNvPr id="43" name="">
             <a:extLst xmlns:a="http://schemas.openxmlformats.org/drawingml/2006/main">
               <a:ext uri="{FF2B5EF4-FFF2-40B4-BE49-F238E27FC236}">
-                <a16:creationId xmlns:a16="http://schemas.microsoft.com/office/drawing/2014/main" id="{8B4346CC-5BDE-4BEE-86B8-EF3180114942}"/>
+                <a16:creationId xmlns:a16="http://schemas.microsoft.com/office/drawing/2014/main" id="{D943C504-2237-47F0-824C-176579095251}"/>
               </a:ext>
             </a:extLst>
           </p:cNvPr>
@@ -18380,7 +18380,7 @@
           <p:cNvPr id="44" name="">
             <a:extLst xmlns:a="http://schemas.openxmlformats.org/drawingml/2006/main">
               <a:ext uri="{FF2B5EF4-FFF2-40B4-BE49-F238E27FC236}">
-                <a16:creationId xmlns:a16="http://schemas.microsoft.com/office/drawing/2014/main" id="{B657651C-850F-4534-AA20-429A081E1182}"/>
+                <a16:creationId xmlns:a16="http://schemas.microsoft.com/office/drawing/2014/main" id="{09E88C1F-1C49-4C29-A12E-023A015E5C31}"/>
               </a:ext>
             </a:extLst>
           </p:cNvPr>
@@ -18413,7 +18413,7 @@
           <p:cNvPr id="45" name="">
             <a:extLst xmlns:a="http://schemas.openxmlformats.org/drawingml/2006/main">
               <a:ext uri="{FF2B5EF4-FFF2-40B4-BE49-F238E27FC236}">
-                <a16:creationId xmlns:a16="http://schemas.microsoft.com/office/drawing/2014/main" id="{F7FA5D68-8F88-4217-96FE-27158763BD79}"/>
+                <a16:creationId xmlns:a16="http://schemas.microsoft.com/office/drawing/2014/main" id="{CA2A6E4D-5EDE-4843-8579-AC7E782409F3}"/>
               </a:ext>
             </a:extLst>
           </p:cNvPr>
@@ -18463,7 +18463,7 @@
           <p:cNvPr id="46" name="">
             <a:extLst xmlns:a="http://schemas.openxmlformats.org/drawingml/2006/main">
               <a:ext uri="{FF2B5EF4-FFF2-40B4-BE49-F238E27FC236}">
-                <a16:creationId xmlns:a16="http://schemas.microsoft.com/office/drawing/2014/main" id="{28C88ECC-8990-4072-B069-F9846B89A8C9}"/>
+                <a16:creationId xmlns:a16="http://schemas.microsoft.com/office/drawing/2014/main" id="{D53B3AA5-905D-4A1F-8216-4C886328730C}"/>
               </a:ext>
             </a:extLst>
           </p:cNvPr>
@@ -18496,7 +18496,7 @@
           <p:cNvPr id="47" name="">
             <a:extLst xmlns:a="http://schemas.openxmlformats.org/drawingml/2006/main">
               <a:ext uri="{FF2B5EF4-FFF2-40B4-BE49-F238E27FC236}">
-                <a16:creationId xmlns:a16="http://schemas.microsoft.com/office/drawing/2014/main" id="{0CB8E100-C74D-4A5F-93B4-DD34BAE6D4E6}"/>
+                <a16:creationId xmlns:a16="http://schemas.microsoft.com/office/drawing/2014/main" id="{B98B6720-8AA0-4C77-B814-0BD3480B235C}"/>
               </a:ext>
             </a:extLst>
           </p:cNvPr>
@@ -18546,7 +18546,7 @@
           <p:cNvPr id="48" name="">
             <a:extLst xmlns:a="http://schemas.openxmlformats.org/drawingml/2006/main">
               <a:ext uri="{FF2B5EF4-FFF2-40B4-BE49-F238E27FC236}">
-                <a16:creationId xmlns:a16="http://schemas.microsoft.com/office/drawing/2014/main" id="{719B3716-1FC6-42A2-B91B-0974EB529CE9}"/>
+                <a16:creationId xmlns:a16="http://schemas.microsoft.com/office/drawing/2014/main" id="{CCB1B44C-7342-40F1-B2FA-3663E550FBFF}"/>
               </a:ext>
             </a:extLst>
           </p:cNvPr>
@@ -18579,7 +18579,7 @@
           <p:cNvPr id="49" name="">
             <a:extLst xmlns:a="http://schemas.openxmlformats.org/drawingml/2006/main">
               <a:ext uri="{FF2B5EF4-FFF2-40B4-BE49-F238E27FC236}">
-                <a16:creationId xmlns:a16="http://schemas.microsoft.com/office/drawing/2014/main" id="{3742BAD7-4B15-4383-8585-9FAC9F0FAD59}"/>
+                <a16:creationId xmlns:a16="http://schemas.microsoft.com/office/drawing/2014/main" id="{2DD2081E-2A38-4F48-BCB1-F1A718397E5A}"/>
               </a:ext>
             </a:extLst>
           </p:cNvPr>
@@ -18629,7 +18629,7 @@
           <p:cNvPr id="50" name="">
             <a:extLst xmlns:a="http://schemas.openxmlformats.org/drawingml/2006/main">
               <a:ext uri="{FF2B5EF4-FFF2-40B4-BE49-F238E27FC236}">
-                <a16:creationId xmlns:a16="http://schemas.microsoft.com/office/drawing/2014/main" id="{09C53F0F-D219-40DF-8E05-88045AE2387A}"/>
+                <a16:creationId xmlns:a16="http://schemas.microsoft.com/office/drawing/2014/main" id="{9263757C-E609-4A3D-AC1C-A148D27E1370}"/>
               </a:ext>
             </a:extLst>
           </p:cNvPr>
@@ -18662,7 +18662,7 @@
           <p:cNvPr id="51" name="">
             <a:extLst xmlns:a="http://schemas.openxmlformats.org/drawingml/2006/main">
               <a:ext uri="{FF2B5EF4-FFF2-40B4-BE49-F238E27FC236}">
-                <a16:creationId xmlns:a16="http://schemas.microsoft.com/office/drawing/2014/main" id="{33F0D192-90A9-4318-8DCD-7C8A1935FDE5}"/>
+                <a16:creationId xmlns:a16="http://schemas.microsoft.com/office/drawing/2014/main" id="{45E5E088-29DF-45C9-A1E6-5B742EF16F15}"/>
               </a:ext>
             </a:extLst>
           </p:cNvPr>
@@ -18712,7 +18712,7 @@
           <p:cNvPr id="52" name="">
             <a:extLst xmlns:a="http://schemas.openxmlformats.org/drawingml/2006/main">
               <a:ext uri="{FF2B5EF4-FFF2-40B4-BE49-F238E27FC236}">
-                <a16:creationId xmlns:a16="http://schemas.microsoft.com/office/drawing/2014/main" id="{BF17617B-BC22-4A87-95DC-223A82DB2DF5}"/>
+                <a16:creationId xmlns:a16="http://schemas.microsoft.com/office/drawing/2014/main" id="{597345AA-2FB0-42D6-BE04-EE49E74816B0}"/>
               </a:ext>
             </a:extLst>
           </p:cNvPr>
@@ -18745,7 +18745,7 @@
           <p:cNvPr id="53" name="">
             <a:extLst xmlns:a="http://schemas.openxmlformats.org/drawingml/2006/main">
               <a:ext uri="{FF2B5EF4-FFF2-40B4-BE49-F238E27FC236}">
-                <a16:creationId xmlns:a16="http://schemas.microsoft.com/office/drawing/2014/main" id="{6194AEA0-579E-4EE4-A480-78DAF7D1E416}"/>
+                <a16:creationId xmlns:a16="http://schemas.microsoft.com/office/drawing/2014/main" id="{3697A935-C698-476B-BBAE-40353704CA54}"/>
               </a:ext>
             </a:extLst>
           </p:cNvPr>
@@ -18795,7 +18795,7 @@
           <p:cNvPr id="54" name="">
             <a:extLst xmlns:a="http://schemas.openxmlformats.org/drawingml/2006/main">
               <a:ext uri="{FF2B5EF4-FFF2-40B4-BE49-F238E27FC236}">
-                <a16:creationId xmlns:a16="http://schemas.microsoft.com/office/drawing/2014/main" id="{5B371CF3-FF35-4E07-99A6-66AD4BE13794}"/>
+                <a16:creationId xmlns:a16="http://schemas.microsoft.com/office/drawing/2014/main" id="{DE3A531B-6DC5-4178-B697-E2E9F581571D}"/>
               </a:ext>
             </a:extLst>
           </p:cNvPr>
@@ -18828,7 +18828,7 @@
           <p:cNvPr id="55" name="">
             <a:extLst xmlns:a="http://schemas.openxmlformats.org/drawingml/2006/main">
               <a:ext uri="{FF2B5EF4-FFF2-40B4-BE49-F238E27FC236}">
-                <a16:creationId xmlns:a16="http://schemas.microsoft.com/office/drawing/2014/main" id="{E6D75C12-74F1-4C8B-BAB7-4BF5EE22CB3B}"/>
+                <a16:creationId xmlns:a16="http://schemas.microsoft.com/office/drawing/2014/main" id="{A3CBA81C-7BC8-4E10-821F-944AB0C36DA3}"/>
               </a:ext>
             </a:extLst>
           </p:cNvPr>
@@ -18878,7 +18878,7 @@
           <p:cNvPr id="56" name="">
             <a:extLst xmlns:a="http://schemas.openxmlformats.org/drawingml/2006/main">
               <a:ext uri="{FF2B5EF4-FFF2-40B4-BE49-F238E27FC236}">
-                <a16:creationId xmlns:a16="http://schemas.microsoft.com/office/drawing/2014/main" id="{1473D961-12BB-4BD6-8054-3B502D74DA2D}"/>
+                <a16:creationId xmlns:a16="http://schemas.microsoft.com/office/drawing/2014/main" id="{51080145-E91E-4A0D-93A7-5DB3D51C0B97}"/>
               </a:ext>
             </a:extLst>
           </p:cNvPr>
@@ -18911,7 +18911,7 @@
           <p:cNvPr id="57" name="">
             <a:extLst xmlns:a="http://schemas.openxmlformats.org/drawingml/2006/main">
               <a:ext uri="{FF2B5EF4-FFF2-40B4-BE49-F238E27FC236}">
-                <a16:creationId xmlns:a16="http://schemas.microsoft.com/office/drawing/2014/main" id="{759C85C0-AE1A-45F1-9A43-B0D97E388743}"/>
+                <a16:creationId xmlns:a16="http://schemas.microsoft.com/office/drawing/2014/main" id="{20130922-A2A9-4713-91EE-ED58E9B68608}"/>
               </a:ext>
             </a:extLst>
           </p:cNvPr>
@@ -18961,7 +18961,7 @@
           <p:cNvPr id="58" name="">
             <a:extLst xmlns:a="http://schemas.openxmlformats.org/drawingml/2006/main">
               <a:ext uri="{FF2B5EF4-FFF2-40B4-BE49-F238E27FC236}">
-                <a16:creationId xmlns:a16="http://schemas.microsoft.com/office/drawing/2014/main" id="{DDFE430E-3694-4C0F-9F53-9CD8820A1541}"/>
+                <a16:creationId xmlns:a16="http://schemas.microsoft.com/office/drawing/2014/main" id="{70C50387-83B3-4174-9EC0-CAEC6537B987}"/>
               </a:ext>
             </a:extLst>
           </p:cNvPr>
@@ -19011,7 +19011,7 @@
           <p:cNvPr id="59" name="">
             <a:extLst xmlns:a="http://schemas.openxmlformats.org/drawingml/2006/main">
               <a:ext uri="{FF2B5EF4-FFF2-40B4-BE49-F238E27FC236}">
-                <a16:creationId xmlns:a16="http://schemas.microsoft.com/office/drawing/2014/main" id="{D23D2AF3-D89C-4966-88B2-C90602F3D689}"/>
+                <a16:creationId xmlns:a16="http://schemas.microsoft.com/office/drawing/2014/main" id="{B6A1F393-BFF1-4886-82C5-624E1B268CDF}"/>
               </a:ext>
             </a:extLst>
           </p:cNvPr>
@@ -19059,7 +19059,7 @@
     </p:spTree>
     <p:extLst>
       <p:ext uri="{BB962C8B-B14F-4D97-AF65-F5344CB8AC3E}">
-        <p14:creationId xmlns:p14="http://schemas.microsoft.com/office/powerpoint/2010/main" val="1061783108"/>
+        <p14:creationId xmlns:p14="http://schemas.microsoft.com/office/powerpoint/2010/main" val="402097755"/>
       </p:ext>
     </p:extLst>
   </p:cSld>
@@ -19090,7 +19090,7 @@
           <p:cNvPr id="1" name="">
             <a:extLst xmlns:a="http://schemas.openxmlformats.org/drawingml/2006/main">
               <a:ext uri="{FF2B5EF4-FFF2-40B4-BE49-F238E27FC236}">
-                <a16:creationId xmlns:a16="http://schemas.microsoft.com/office/drawing/2014/main" id="{5C5B03E1-3377-4DDB-B41A-1CA7E7FF3EF1}"/>
+                <a16:creationId xmlns:a16="http://schemas.microsoft.com/office/drawing/2014/main" id="{C0E7A92C-B3B5-474B-BFE7-D967FCD6CA7F}"/>
               </a:ext>
             </a:extLst>
           </p:cNvPr>
@@ -19140,7 +19140,7 @@
           <p:cNvPr id="2" name="">
             <a:extLst xmlns:a="http://schemas.openxmlformats.org/drawingml/2006/main">
               <a:ext uri="{FF2B5EF4-FFF2-40B4-BE49-F238E27FC236}">
-                <a16:creationId xmlns:a16="http://schemas.microsoft.com/office/drawing/2014/main" id="{7E6D1DE6-1C07-4D6F-AA6B-935ACD6B4047}"/>
+                <a16:creationId xmlns:a16="http://schemas.microsoft.com/office/drawing/2014/main" id="{16CDF82A-A716-4ED7-9086-058ABD0730F8}"/>
               </a:ext>
             </a:extLst>
           </p:cNvPr>
@@ -19190,7 +19190,7 @@
           <p:cNvPr id="3" name="">
             <a:extLst xmlns:a="http://schemas.openxmlformats.org/drawingml/2006/main">
               <a:ext uri="{FF2B5EF4-FFF2-40B4-BE49-F238E27FC236}">
-                <a16:creationId xmlns:a16="http://schemas.microsoft.com/office/drawing/2014/main" id="{FBD04161-77DB-43DD-B1C9-52954EBD025A}"/>
+                <a16:creationId xmlns:a16="http://schemas.microsoft.com/office/drawing/2014/main" id="{B315B902-D4ED-4B7B-998E-B04D02505D3F}"/>
               </a:ext>
             </a:extLst>
           </p:cNvPr>
@@ -19221,7 +19221,7 @@
           <p:cNvPr id="4" name="">
             <a:extLst xmlns:a="http://schemas.openxmlformats.org/drawingml/2006/main">
               <a:ext uri="{FF2B5EF4-FFF2-40B4-BE49-F238E27FC236}">
-                <a16:creationId xmlns:a16="http://schemas.microsoft.com/office/drawing/2014/main" id="{A8B39122-6230-4F89-98F3-B4AEDC536F58}"/>
+                <a16:creationId xmlns:a16="http://schemas.microsoft.com/office/drawing/2014/main" id="{7FAD9DA2-FCC1-4F18-90B9-FFE3B24B67D2}"/>
               </a:ext>
             </a:extLst>
           </p:cNvPr>
@@ -19292,7 +19292,7 @@
           <p:cNvPr id="5" name="">
             <a:extLst xmlns:a="http://schemas.openxmlformats.org/drawingml/2006/main">
               <a:ext uri="{FF2B5EF4-FFF2-40B4-BE49-F238E27FC236}">
-                <a16:creationId xmlns:a16="http://schemas.microsoft.com/office/drawing/2014/main" id="{7B8ECE30-11C9-4371-A383-05CEDFD04236}"/>
+                <a16:creationId xmlns:a16="http://schemas.microsoft.com/office/drawing/2014/main" id="{FA99F171-19B5-43DE-9CD0-EB477E7D55FF}"/>
               </a:ext>
             </a:extLst>
           </p:cNvPr>
@@ -19363,7 +19363,7 @@
           <p:cNvPr id="6" name="">
             <a:extLst xmlns:a="http://schemas.openxmlformats.org/drawingml/2006/main">
               <a:ext uri="{FF2B5EF4-FFF2-40B4-BE49-F238E27FC236}">
-                <a16:creationId xmlns:a16="http://schemas.microsoft.com/office/drawing/2014/main" id="{940D2047-6391-4F3E-8F6B-B6C88BCBFBF3}"/>
+                <a16:creationId xmlns:a16="http://schemas.microsoft.com/office/drawing/2014/main" id="{7157E7A6-BDAE-4032-8F3A-B75BCCAD241E}"/>
               </a:ext>
             </a:extLst>
           </p:cNvPr>
@@ -19434,7 +19434,7 @@
           <p:cNvPr id="7" name="">
             <a:extLst xmlns:a="http://schemas.openxmlformats.org/drawingml/2006/main">
               <a:ext uri="{FF2B5EF4-FFF2-40B4-BE49-F238E27FC236}">
-                <a16:creationId xmlns:a16="http://schemas.microsoft.com/office/drawing/2014/main" id="{DDFCD608-E363-4655-B905-06F098F565A9}"/>
+                <a16:creationId xmlns:a16="http://schemas.microsoft.com/office/drawing/2014/main" id="{E3AC6354-809D-42BA-A770-93843D7DA1F8}"/>
               </a:ext>
             </a:extLst>
           </p:cNvPr>
@@ -19505,7 +19505,7 @@
           <p:cNvPr id="8" name="">
             <a:extLst xmlns:a="http://schemas.openxmlformats.org/drawingml/2006/main">
               <a:ext uri="{FF2B5EF4-FFF2-40B4-BE49-F238E27FC236}">
-                <a16:creationId xmlns:a16="http://schemas.microsoft.com/office/drawing/2014/main" id="{9E3742DE-7992-4122-9088-104455AF919F}"/>
+                <a16:creationId xmlns:a16="http://schemas.microsoft.com/office/drawing/2014/main" id="{7CA905A6-3703-481F-8674-06C75592C980}"/>
               </a:ext>
             </a:extLst>
           </p:cNvPr>
@@ -19576,7 +19576,7 @@
           <p:cNvPr id="9" name="">
             <a:extLst xmlns:a="http://schemas.openxmlformats.org/drawingml/2006/main">
               <a:ext uri="{FF2B5EF4-FFF2-40B4-BE49-F238E27FC236}">
-                <a16:creationId xmlns:a16="http://schemas.microsoft.com/office/drawing/2014/main" id="{D2A5E681-FC27-4BD7-9F43-359ADDCAE45B}"/>
+                <a16:creationId xmlns:a16="http://schemas.microsoft.com/office/drawing/2014/main" id="{ADF77F52-3ED7-4845-8EF6-26F6C00055C5}"/>
               </a:ext>
             </a:extLst>
           </p:cNvPr>
@@ -19772,7 +19772,7 @@
           <p:cNvPr id="15" name="">
             <a:extLst xmlns:a="http://schemas.openxmlformats.org/drawingml/2006/main">
               <a:ext uri="{FF2B5EF4-FFF2-40B4-BE49-F238E27FC236}">
-                <a16:creationId xmlns:a16="http://schemas.microsoft.com/office/drawing/2014/main" id="{2DB458B4-CC2B-4FDC-81D5-0B29B5D831B3}"/>
+                <a16:creationId xmlns:a16="http://schemas.microsoft.com/office/drawing/2014/main" id="{062BC4DC-5132-4169-9FB6-5F1372C3A355}"/>
               </a:ext>
             </a:extLst>
           </p:cNvPr>
@@ -19822,7 +19822,7 @@
           <p:cNvPr id="16" name="">
             <a:extLst xmlns:a="http://schemas.openxmlformats.org/drawingml/2006/main">
               <a:ext uri="{FF2B5EF4-FFF2-40B4-BE49-F238E27FC236}">
-                <a16:creationId xmlns:a16="http://schemas.microsoft.com/office/drawing/2014/main" id="{9D86510A-4D40-4F40-9950-6DD0DE83ADC3}"/>
+                <a16:creationId xmlns:a16="http://schemas.microsoft.com/office/drawing/2014/main" id="{F07B7D5A-29AF-45B1-8F51-549B10C79555}"/>
               </a:ext>
             </a:extLst>
           </p:cNvPr>
@@ -19872,7 +19872,7 @@
           <p:cNvPr id="17" name="">
             <a:extLst xmlns:a="http://schemas.openxmlformats.org/drawingml/2006/main">
               <a:ext uri="{FF2B5EF4-FFF2-40B4-BE49-F238E27FC236}">
-                <a16:creationId xmlns:a16="http://schemas.microsoft.com/office/drawing/2014/main" id="{D8821683-2EFF-46C4-8B8D-2C039C1E9DA3}"/>
+                <a16:creationId xmlns:a16="http://schemas.microsoft.com/office/drawing/2014/main" id="{042D937B-CE00-408F-8191-35A2B2D34B10}"/>
               </a:ext>
             </a:extLst>
           </p:cNvPr>
@@ -19920,7 +19920,7 @@
     </p:spTree>
     <p:extLst>
       <p:ext uri="{BB962C8B-B14F-4D97-AF65-F5344CB8AC3E}">
-        <p14:creationId xmlns:p14="http://schemas.microsoft.com/office/powerpoint/2010/main" val="1371403229"/>
+        <p14:creationId xmlns:p14="http://schemas.microsoft.com/office/powerpoint/2010/main" val="1521818209"/>
       </p:ext>
     </p:extLst>
   </p:cSld>
@@ -19951,7 +19951,7 @@
           <p:cNvPr id="1" name="">
             <a:extLst xmlns:a="http://schemas.openxmlformats.org/drawingml/2006/main">
               <a:ext uri="{FF2B5EF4-FFF2-40B4-BE49-F238E27FC236}">
-                <a16:creationId xmlns:a16="http://schemas.microsoft.com/office/drawing/2014/main" id="{15F5884F-3F39-4715-82C0-D4C5213A5EA8}"/>
+                <a16:creationId xmlns:a16="http://schemas.microsoft.com/office/drawing/2014/main" id="{1CA2CD2D-229B-4494-A859-BD9F8188FE95}"/>
               </a:ext>
             </a:extLst>
           </p:cNvPr>
@@ -20001,7 +20001,7 @@
           <p:cNvPr id="2" name="">
             <a:extLst xmlns:a="http://schemas.openxmlformats.org/drawingml/2006/main">
               <a:ext uri="{FF2B5EF4-FFF2-40B4-BE49-F238E27FC236}">
-                <a16:creationId xmlns:a16="http://schemas.microsoft.com/office/drawing/2014/main" id="{69426468-4BD9-4A5D-980D-BCC454CEC235}"/>
+                <a16:creationId xmlns:a16="http://schemas.microsoft.com/office/drawing/2014/main" id="{CBF610EF-7F23-4EDA-954A-8D1121CD1141}"/>
               </a:ext>
             </a:extLst>
           </p:cNvPr>
@@ -20051,7 +20051,7 @@
           <p:cNvPr id="3" name="">
             <a:extLst xmlns:a="http://schemas.openxmlformats.org/drawingml/2006/main">
               <a:ext uri="{FF2B5EF4-FFF2-40B4-BE49-F238E27FC236}">
-                <a16:creationId xmlns:a16="http://schemas.microsoft.com/office/drawing/2014/main" id="{6D9E5FE9-8052-4E5A-8324-B46566E07CC3}"/>
+                <a16:creationId xmlns:a16="http://schemas.microsoft.com/office/drawing/2014/main" id="{AA51B817-A9B1-4131-A944-CECF5B1B2F32}"/>
               </a:ext>
             </a:extLst>
           </p:cNvPr>
@@ -20082,7 +20082,7 @@
           <p:cNvPr id="4" name="">
             <a:extLst xmlns:a="http://schemas.openxmlformats.org/drawingml/2006/main">
               <a:ext uri="{FF2B5EF4-FFF2-40B4-BE49-F238E27FC236}">
-                <a16:creationId xmlns:a16="http://schemas.microsoft.com/office/drawing/2014/main" id="{2C351EA5-551F-4508-9C86-65EC1AE9D7C5}"/>
+                <a16:creationId xmlns:a16="http://schemas.microsoft.com/office/drawing/2014/main" id="{BEF90814-2C41-4A2A-8FD6-212DE90DA8B2}"/>
               </a:ext>
             </a:extLst>
           </p:cNvPr>
@@ -20115,7 +20115,7 @@
           <p:cNvPr id="5" name="">
             <a:extLst xmlns:a="http://schemas.openxmlformats.org/drawingml/2006/main">
               <a:ext uri="{FF2B5EF4-FFF2-40B4-BE49-F238E27FC236}">
-                <a16:creationId xmlns:a16="http://schemas.microsoft.com/office/drawing/2014/main" id="{6D41B7D0-6E74-4F9C-A3A7-CC498D9CC7B3}"/>
+                <a16:creationId xmlns:a16="http://schemas.microsoft.com/office/drawing/2014/main" id="{4D5AA0E3-042B-4B4F-AF93-18D6401CFB3D}"/>
               </a:ext>
             </a:extLst>
           </p:cNvPr>
@@ -20165,7 +20165,7 @@
           <p:cNvPr id="6" name="">
             <a:extLst xmlns:a="http://schemas.openxmlformats.org/drawingml/2006/main">
               <a:ext uri="{FF2B5EF4-FFF2-40B4-BE49-F238E27FC236}">
-                <a16:creationId xmlns:a16="http://schemas.microsoft.com/office/drawing/2014/main" id="{E4961B95-67F7-4EE1-9505-872C849D7655}"/>
+                <a16:creationId xmlns:a16="http://schemas.microsoft.com/office/drawing/2014/main" id="{756CC97C-D7B3-4839-A4EB-FB6970759134}"/>
               </a:ext>
             </a:extLst>
           </p:cNvPr>
@@ -20198,7 +20198,7 @@
           <p:cNvPr id="7" name="">
             <a:extLst xmlns:a="http://schemas.openxmlformats.org/drawingml/2006/main">
               <a:ext uri="{FF2B5EF4-FFF2-40B4-BE49-F238E27FC236}">
-                <a16:creationId xmlns:a16="http://schemas.microsoft.com/office/drawing/2014/main" id="{07A89048-3E48-46CE-8593-D11A27784CE8}"/>
+                <a16:creationId xmlns:a16="http://schemas.microsoft.com/office/drawing/2014/main" id="{ACC723B9-67A4-441B-A349-09B18873CDC2}"/>
               </a:ext>
             </a:extLst>
           </p:cNvPr>
@@ -20248,7 +20248,7 @@
           <p:cNvPr id="8" name="">
             <a:extLst xmlns:a="http://schemas.openxmlformats.org/drawingml/2006/main">
               <a:ext uri="{FF2B5EF4-FFF2-40B4-BE49-F238E27FC236}">
-                <a16:creationId xmlns:a16="http://schemas.microsoft.com/office/drawing/2014/main" id="{9B9619E9-02ED-4825-96C1-93E8FF2F821C}"/>
+                <a16:creationId xmlns:a16="http://schemas.microsoft.com/office/drawing/2014/main" id="{1297949B-01FE-4F8B-B0EE-1DDBD1732D59}"/>
               </a:ext>
             </a:extLst>
           </p:cNvPr>
@@ -20281,7 +20281,7 @@
           <p:cNvPr id="9" name="">
             <a:extLst xmlns:a="http://schemas.openxmlformats.org/drawingml/2006/main">
               <a:ext uri="{FF2B5EF4-FFF2-40B4-BE49-F238E27FC236}">
-                <a16:creationId xmlns:a16="http://schemas.microsoft.com/office/drawing/2014/main" id="{5F64841B-8E01-4907-A350-EA3D3C03604E}"/>
+                <a16:creationId xmlns:a16="http://schemas.microsoft.com/office/drawing/2014/main" id="{8BD839E1-74CF-4A77-8824-5A36C3264F62}"/>
               </a:ext>
             </a:extLst>
           </p:cNvPr>
@@ -20331,7 +20331,7 @@
           <p:cNvPr id="10" name="">
             <a:extLst xmlns:a="http://schemas.openxmlformats.org/drawingml/2006/main">
               <a:ext uri="{FF2B5EF4-FFF2-40B4-BE49-F238E27FC236}">
-                <a16:creationId xmlns:a16="http://schemas.microsoft.com/office/drawing/2014/main" id="{DBD42013-0813-4EB8-B08B-B6F45E73D56D}"/>
+                <a16:creationId xmlns:a16="http://schemas.microsoft.com/office/drawing/2014/main" id="{912FF913-85F6-4D8D-9314-C97DE79875ED}"/>
               </a:ext>
             </a:extLst>
           </p:cNvPr>
@@ -20364,7 +20364,7 @@
           <p:cNvPr id="11" name="">
             <a:extLst xmlns:a="http://schemas.openxmlformats.org/drawingml/2006/main">
               <a:ext uri="{FF2B5EF4-FFF2-40B4-BE49-F238E27FC236}">
-                <a16:creationId xmlns:a16="http://schemas.microsoft.com/office/drawing/2014/main" id="{0B203D11-4666-4B32-BCF1-3FF7BCE9CA79}"/>
+                <a16:creationId xmlns:a16="http://schemas.microsoft.com/office/drawing/2014/main" id="{EB60F473-DFC6-4D24-A9C7-5B140FA2A648}"/>
               </a:ext>
             </a:extLst>
           </p:cNvPr>
@@ -20414,7 +20414,7 @@
           <p:cNvPr id="12" name="">
             <a:extLst xmlns:a="http://schemas.openxmlformats.org/drawingml/2006/main">
               <a:ext uri="{FF2B5EF4-FFF2-40B4-BE49-F238E27FC236}">
-                <a16:creationId xmlns:a16="http://schemas.microsoft.com/office/drawing/2014/main" id="{180278F4-9774-4B81-823E-2A6E7DDCC57B}"/>
+                <a16:creationId xmlns:a16="http://schemas.microsoft.com/office/drawing/2014/main" id="{5656DD4D-AE49-4672-83F6-8CCB0C990A89}"/>
               </a:ext>
             </a:extLst>
           </p:cNvPr>
@@ -20447,7 +20447,7 @@
           <p:cNvPr id="13" name="">
             <a:extLst xmlns:a="http://schemas.openxmlformats.org/drawingml/2006/main">
               <a:ext uri="{FF2B5EF4-FFF2-40B4-BE49-F238E27FC236}">
-                <a16:creationId xmlns:a16="http://schemas.microsoft.com/office/drawing/2014/main" id="{73A3BD14-CC42-4474-B948-C701C4971304}"/>
+                <a16:creationId xmlns:a16="http://schemas.microsoft.com/office/drawing/2014/main" id="{F7018168-87D4-42FD-8A83-C189740B929F}"/>
               </a:ext>
             </a:extLst>
           </p:cNvPr>
@@ -20497,7 +20497,7 @@
           <p:cNvPr id="14" name="">
             <a:extLst xmlns:a="http://schemas.openxmlformats.org/drawingml/2006/main">
               <a:ext uri="{FF2B5EF4-FFF2-40B4-BE49-F238E27FC236}">
-                <a16:creationId xmlns:a16="http://schemas.microsoft.com/office/drawing/2014/main" id="{72DB39CF-A231-453A-94EA-0F6D26DB614F}"/>
+                <a16:creationId xmlns:a16="http://schemas.microsoft.com/office/drawing/2014/main" id="{051F5281-9AD9-486B-A7C9-35B6C4E08EFC}"/>
               </a:ext>
             </a:extLst>
           </p:cNvPr>
@@ -20530,7 +20530,7 @@
           <p:cNvPr id="15" name="">
             <a:extLst xmlns:a="http://schemas.openxmlformats.org/drawingml/2006/main">
               <a:ext uri="{FF2B5EF4-FFF2-40B4-BE49-F238E27FC236}">
-                <a16:creationId xmlns:a16="http://schemas.microsoft.com/office/drawing/2014/main" id="{8CDB8D00-5661-4024-A57F-618757221F37}"/>
+                <a16:creationId xmlns:a16="http://schemas.microsoft.com/office/drawing/2014/main" id="{A3FB16A5-D539-4CA9-B0C5-0BFBBD90544F}"/>
               </a:ext>
             </a:extLst>
           </p:cNvPr>
@@ -20580,7 +20580,7 @@
           <p:cNvPr id="16" name="">
             <a:extLst xmlns:a="http://schemas.openxmlformats.org/drawingml/2006/main">
               <a:ext uri="{FF2B5EF4-FFF2-40B4-BE49-F238E27FC236}">
-                <a16:creationId xmlns:a16="http://schemas.microsoft.com/office/drawing/2014/main" id="{4F2E5E81-6384-41D4-B545-6193ACE4D45C}"/>
+                <a16:creationId xmlns:a16="http://schemas.microsoft.com/office/drawing/2014/main" id="{F801FD20-0AD0-43D6-B337-4316AEDFD6E2}"/>
               </a:ext>
             </a:extLst>
           </p:cNvPr>
@@ -20613,7 +20613,7 @@
           <p:cNvPr id="17" name="">
             <a:extLst xmlns:a="http://schemas.openxmlformats.org/drawingml/2006/main">
               <a:ext uri="{FF2B5EF4-FFF2-40B4-BE49-F238E27FC236}">
-                <a16:creationId xmlns:a16="http://schemas.microsoft.com/office/drawing/2014/main" id="{C9D5B8D4-6843-4A63-998B-7F2613047EA8}"/>
+                <a16:creationId xmlns:a16="http://schemas.microsoft.com/office/drawing/2014/main" id="{E3315BA3-2122-459B-96AB-6A3B7328A274}"/>
               </a:ext>
             </a:extLst>
           </p:cNvPr>
@@ -20663,7 +20663,7 @@
           <p:cNvPr id="18" name="">
             <a:extLst xmlns:a="http://schemas.openxmlformats.org/drawingml/2006/main">
               <a:ext uri="{FF2B5EF4-FFF2-40B4-BE49-F238E27FC236}">
-                <a16:creationId xmlns:a16="http://schemas.microsoft.com/office/drawing/2014/main" id="{91370772-B0C6-40C5-8D3B-5CFEE50F9CF6}"/>
+                <a16:creationId xmlns:a16="http://schemas.microsoft.com/office/drawing/2014/main" id="{81602668-6E2D-45B7-B521-5B0225DAE60E}"/>
               </a:ext>
             </a:extLst>
           </p:cNvPr>
@@ -20696,7 +20696,7 @@
           <p:cNvPr id="19" name="">
             <a:extLst xmlns:a="http://schemas.openxmlformats.org/drawingml/2006/main">
               <a:ext uri="{FF2B5EF4-FFF2-40B4-BE49-F238E27FC236}">
-                <a16:creationId xmlns:a16="http://schemas.microsoft.com/office/drawing/2014/main" id="{2AC82EAA-4FD5-446E-87C0-26A883BAB0A0}"/>
+                <a16:creationId xmlns:a16="http://schemas.microsoft.com/office/drawing/2014/main" id="{D1636CAB-BB09-4941-81BE-E7E9D7BB7485}"/>
               </a:ext>
             </a:extLst>
           </p:cNvPr>
@@ -20746,7 +20746,7 @@
           <p:cNvPr id="20" name="">
             <a:extLst xmlns:a="http://schemas.openxmlformats.org/drawingml/2006/main">
               <a:ext uri="{FF2B5EF4-FFF2-40B4-BE49-F238E27FC236}">
-                <a16:creationId xmlns:a16="http://schemas.microsoft.com/office/drawing/2014/main" id="{E78D2172-8AB1-4A15-A3BB-C463DCC31DA5}"/>
+                <a16:creationId xmlns:a16="http://schemas.microsoft.com/office/drawing/2014/main" id="{FA5C98D0-8818-4139-838A-70DA8B1D777A}"/>
               </a:ext>
             </a:extLst>
           </p:cNvPr>
@@ -20779,7 +20779,7 @@
           <p:cNvPr id="21" name="">
             <a:extLst xmlns:a="http://schemas.openxmlformats.org/drawingml/2006/main">
               <a:ext uri="{FF2B5EF4-FFF2-40B4-BE49-F238E27FC236}">
-                <a16:creationId xmlns:a16="http://schemas.microsoft.com/office/drawing/2014/main" id="{5393B257-364F-4DD8-A990-84F073721B42}"/>
+                <a16:creationId xmlns:a16="http://schemas.microsoft.com/office/drawing/2014/main" id="{4737BC82-9D74-4CE0-B603-06983F7AD9F3}"/>
               </a:ext>
             </a:extLst>
           </p:cNvPr>
@@ -20829,7 +20829,7 @@
           <p:cNvPr id="22" name="">
             <a:extLst xmlns:a="http://schemas.openxmlformats.org/drawingml/2006/main">
               <a:ext uri="{FF2B5EF4-FFF2-40B4-BE49-F238E27FC236}">
-                <a16:creationId xmlns:a16="http://schemas.microsoft.com/office/drawing/2014/main" id="{0EEFE3CB-CF9C-4048-85A6-EB7CDAB8D3E8}"/>
+                <a16:creationId xmlns:a16="http://schemas.microsoft.com/office/drawing/2014/main" id="{E314A09E-951B-4A3D-ABCF-FFF1C0A9E9E4}"/>
               </a:ext>
             </a:extLst>
           </p:cNvPr>
@@ -20862,7 +20862,7 @@
           <p:cNvPr id="23" name="">
             <a:extLst xmlns:a="http://schemas.openxmlformats.org/drawingml/2006/main">
               <a:ext uri="{FF2B5EF4-FFF2-40B4-BE49-F238E27FC236}">
-                <a16:creationId xmlns:a16="http://schemas.microsoft.com/office/drawing/2014/main" id="{26882B5A-3AB5-4A44-A509-BA5F486F4CEA}"/>
+                <a16:creationId xmlns:a16="http://schemas.microsoft.com/office/drawing/2014/main" id="{3FDE403D-F00B-4CE5-9B52-DB17DDA432A1}"/>
               </a:ext>
             </a:extLst>
           </p:cNvPr>
@@ -20912,7 +20912,7 @@
           <p:cNvPr id="24" name="">
             <a:extLst xmlns:a="http://schemas.openxmlformats.org/drawingml/2006/main">
               <a:ext uri="{FF2B5EF4-FFF2-40B4-BE49-F238E27FC236}">
-                <a16:creationId xmlns:a16="http://schemas.microsoft.com/office/drawing/2014/main" id="{A6013BB7-0FBB-4FDD-B285-9B8B94164583}"/>
+                <a16:creationId xmlns:a16="http://schemas.microsoft.com/office/drawing/2014/main" id="{123F81F9-20F3-4381-94BE-658D925AC37C}"/>
               </a:ext>
             </a:extLst>
           </p:cNvPr>
@@ -20945,7 +20945,7 @@
           <p:cNvPr id="25" name="">
             <a:extLst xmlns:a="http://schemas.openxmlformats.org/drawingml/2006/main">
               <a:ext uri="{FF2B5EF4-FFF2-40B4-BE49-F238E27FC236}">
-                <a16:creationId xmlns:a16="http://schemas.microsoft.com/office/drawing/2014/main" id="{CAEF327D-161F-4B83-B5CF-8BC96BD9550C}"/>
+                <a16:creationId xmlns:a16="http://schemas.microsoft.com/office/drawing/2014/main" id="{67BBDB14-0A69-4F49-AF6B-B17BC8DD0F5A}"/>
               </a:ext>
             </a:extLst>
           </p:cNvPr>
@@ -20995,7 +20995,7 @@
           <p:cNvPr id="26" name="">
             <a:extLst xmlns:a="http://schemas.openxmlformats.org/drawingml/2006/main">
               <a:ext uri="{FF2B5EF4-FFF2-40B4-BE49-F238E27FC236}">
-                <a16:creationId xmlns:a16="http://schemas.microsoft.com/office/drawing/2014/main" id="{33607EF0-1EC5-4A6B-B63D-30407BDA86F3}"/>
+                <a16:creationId xmlns:a16="http://schemas.microsoft.com/office/drawing/2014/main" id="{8031F9EF-A768-41B8-902E-A932BF81F45C}"/>
               </a:ext>
             </a:extLst>
           </p:cNvPr>
@@ -21028,7 +21028,7 @@
           <p:cNvPr id="27" name="">
             <a:extLst xmlns:a="http://schemas.openxmlformats.org/drawingml/2006/main">
               <a:ext uri="{FF2B5EF4-FFF2-40B4-BE49-F238E27FC236}">
-                <a16:creationId xmlns:a16="http://schemas.microsoft.com/office/drawing/2014/main" id="{D6CABEF5-0097-48A8-816B-45A40082215C}"/>
+                <a16:creationId xmlns:a16="http://schemas.microsoft.com/office/drawing/2014/main" id="{01C2A823-10D7-42C2-89BA-3FCD70DF1E91}"/>
               </a:ext>
             </a:extLst>
           </p:cNvPr>
@@ -21078,7 +21078,7 @@
           <p:cNvPr id="28" name="">
             <a:extLst xmlns:a="http://schemas.openxmlformats.org/drawingml/2006/main">
               <a:ext uri="{FF2B5EF4-FFF2-40B4-BE49-F238E27FC236}">
-                <a16:creationId xmlns:a16="http://schemas.microsoft.com/office/drawing/2014/main" id="{146CAC05-C259-4AA9-ACCA-F1FB552F5725}"/>
+                <a16:creationId xmlns:a16="http://schemas.microsoft.com/office/drawing/2014/main" id="{30586641-6454-4897-8DF4-6805F477BE28}"/>
               </a:ext>
             </a:extLst>
           </p:cNvPr>
@@ -21111,7 +21111,7 @@
           <p:cNvPr id="29" name="">
             <a:extLst xmlns:a="http://schemas.openxmlformats.org/drawingml/2006/main">
               <a:ext uri="{FF2B5EF4-FFF2-40B4-BE49-F238E27FC236}">
-                <a16:creationId xmlns:a16="http://schemas.microsoft.com/office/drawing/2014/main" id="{E2176426-4476-404B-B1E2-A440F1C7B889}"/>
+                <a16:creationId xmlns:a16="http://schemas.microsoft.com/office/drawing/2014/main" id="{A1D6F9FB-0331-4F85-AD08-A8E265A5B88B}"/>
               </a:ext>
             </a:extLst>
           </p:cNvPr>
@@ -21161,7 +21161,7 @@
           <p:cNvPr id="30" name="">
             <a:extLst xmlns:a="http://schemas.openxmlformats.org/drawingml/2006/main">
               <a:ext uri="{FF2B5EF4-FFF2-40B4-BE49-F238E27FC236}">
-                <a16:creationId xmlns:a16="http://schemas.microsoft.com/office/drawing/2014/main" id="{113187FE-DF49-431A-B084-C29B0A403CA3}"/>
+                <a16:creationId xmlns:a16="http://schemas.microsoft.com/office/drawing/2014/main" id="{06A2DBB4-9525-4B7A-A425-29E24145650F}"/>
               </a:ext>
             </a:extLst>
           </p:cNvPr>
@@ -21194,7 +21194,7 @@
           <p:cNvPr id="31" name="">
             <a:extLst xmlns:a="http://schemas.openxmlformats.org/drawingml/2006/main">
               <a:ext uri="{FF2B5EF4-FFF2-40B4-BE49-F238E27FC236}">
-                <a16:creationId xmlns:a16="http://schemas.microsoft.com/office/drawing/2014/main" id="{7D16D96B-040C-4491-8E6F-4C7620A50860}"/>
+                <a16:creationId xmlns:a16="http://schemas.microsoft.com/office/drawing/2014/main" id="{920A5155-D6F2-4BE6-91F8-6813F2440D7D}"/>
               </a:ext>
             </a:extLst>
           </p:cNvPr>
@@ -21244,7 +21244,7 @@
           <p:cNvPr id="32" name="">
             <a:extLst xmlns:a="http://schemas.openxmlformats.org/drawingml/2006/main">
               <a:ext uri="{FF2B5EF4-FFF2-40B4-BE49-F238E27FC236}">
-                <a16:creationId xmlns:a16="http://schemas.microsoft.com/office/drawing/2014/main" id="{214A9472-0854-4540-BB73-08243F0FC34C}"/>
+                <a16:creationId xmlns:a16="http://schemas.microsoft.com/office/drawing/2014/main" id="{96ED271A-FDE6-4F34-93A3-E95787F5D460}"/>
               </a:ext>
             </a:extLst>
           </p:cNvPr>
@@ -21277,7 +21277,7 @@
           <p:cNvPr id="33" name="">
             <a:extLst xmlns:a="http://schemas.openxmlformats.org/drawingml/2006/main">
               <a:ext uri="{FF2B5EF4-FFF2-40B4-BE49-F238E27FC236}">
-                <a16:creationId xmlns:a16="http://schemas.microsoft.com/office/drawing/2014/main" id="{750A6C93-2611-4D68-8D8C-9473C7E966FD}"/>
+                <a16:creationId xmlns:a16="http://schemas.microsoft.com/office/drawing/2014/main" id="{D3EEED1A-27EB-407E-BE73-7EE4D8D26DE2}"/>
               </a:ext>
             </a:extLst>
           </p:cNvPr>
@@ -21327,7 +21327,7 @@
           <p:cNvPr id="34" name="">
             <a:extLst xmlns:a="http://schemas.openxmlformats.org/drawingml/2006/main">
               <a:ext uri="{FF2B5EF4-FFF2-40B4-BE49-F238E27FC236}">
-                <a16:creationId xmlns:a16="http://schemas.microsoft.com/office/drawing/2014/main" id="{4AD753EC-360C-4DB9-BC3C-A0C3B48653A0}"/>
+                <a16:creationId xmlns:a16="http://schemas.microsoft.com/office/drawing/2014/main" id="{75841B2E-6A9E-4F11-BD63-6A28D41CC2B7}"/>
               </a:ext>
             </a:extLst>
           </p:cNvPr>
@@ -21360,7 +21360,7 @@
           <p:cNvPr id="35" name="">
             <a:extLst xmlns:a="http://schemas.openxmlformats.org/drawingml/2006/main">
               <a:ext uri="{FF2B5EF4-FFF2-40B4-BE49-F238E27FC236}">
-                <a16:creationId xmlns:a16="http://schemas.microsoft.com/office/drawing/2014/main" id="{99EED246-BD27-4140-A0BE-73F8F805507C}"/>
+                <a16:creationId xmlns:a16="http://schemas.microsoft.com/office/drawing/2014/main" id="{C8F8BCBE-5F23-4B65-AF9A-EA833ACFDFB6}"/>
               </a:ext>
             </a:extLst>
           </p:cNvPr>
@@ -21400,7 +21400,7 @@
                   <a:srgbClr val="020618"/>
                 </a:solidFill>
               </a:rPr>
-              <a:t>Pendientes final</a:t>
+              <a:t>Extension productiva</a:t>
             </a:r>
           </a:p>
         </p:txBody>
@@ -21410,7 +21410,7 @@
           <p:cNvPr id="36" name="">
             <a:extLst xmlns:a="http://schemas.openxmlformats.org/drawingml/2006/main">
               <a:ext uri="{FF2B5EF4-FFF2-40B4-BE49-F238E27FC236}">
-                <a16:creationId xmlns:a16="http://schemas.microsoft.com/office/drawing/2014/main" id="{1CF550CE-C967-48D1-8ACB-892B60874324}"/>
+                <a16:creationId xmlns:a16="http://schemas.microsoft.com/office/drawing/2014/main" id="{7773FC94-5F7A-411F-ABBA-B9EE82EB1E87}"/>
               </a:ext>
             </a:extLst>
           </p:cNvPr>
@@ -21443,7 +21443,7 @@
           <p:cNvPr id="37" name="">
             <a:extLst xmlns:a="http://schemas.openxmlformats.org/drawingml/2006/main">
               <a:ext uri="{FF2B5EF4-FFF2-40B4-BE49-F238E27FC236}">
-                <a16:creationId xmlns:a16="http://schemas.microsoft.com/office/drawing/2014/main" id="{62AEF034-CA3B-4467-A28F-9608648E7A80}"/>
+                <a16:creationId xmlns:a16="http://schemas.microsoft.com/office/drawing/2014/main" id="{F12863FA-D8D7-4C29-93A8-0E681CBBBA1E}"/>
               </a:ext>
             </a:extLst>
           </p:cNvPr>
@@ -21483,7 +21483,7 @@
                   <a:srgbClr val="020618"/>
                 </a:solidFill>
               </a:rPr>
-              <a:t>UI/E2E + APIs de carga</a:t>
+              <a:t>UI/E2E + carga</a:t>
             </a:r>
           </a:p>
         </p:txBody>
@@ -21493,7 +21493,7 @@
           <p:cNvPr id="38" name="">
             <a:extLst xmlns:a="http://schemas.openxmlformats.org/drawingml/2006/main">
               <a:ext uri="{FF2B5EF4-FFF2-40B4-BE49-F238E27FC236}">
-                <a16:creationId xmlns:a16="http://schemas.microsoft.com/office/drawing/2014/main" id="{A80C3E87-C124-4B8B-B2EF-B042D2DF0E20}"/>
+                <a16:creationId xmlns:a16="http://schemas.microsoft.com/office/drawing/2014/main" id="{2F26B48F-193A-4270-B778-D5BBA4B3821B}"/>
               </a:ext>
             </a:extLst>
           </p:cNvPr>
@@ -21526,7 +21526,7 @@
           <p:cNvPr id="39" name="">
             <a:extLst xmlns:a="http://schemas.openxmlformats.org/drawingml/2006/main">
               <a:ext uri="{FF2B5EF4-FFF2-40B4-BE49-F238E27FC236}">
-                <a16:creationId xmlns:a16="http://schemas.microsoft.com/office/drawing/2014/main" id="{26502B0D-B8CC-4FF1-A82F-797B26EBEE85}"/>
+                <a16:creationId xmlns:a16="http://schemas.microsoft.com/office/drawing/2014/main" id="{F4E3F826-02C4-4249-B6B8-FE22948CA344}"/>
               </a:ext>
             </a:extLst>
           </p:cNvPr>
@@ -21566,7 +21566,7 @@
                   <a:srgbClr val="020618"/>
                 </a:solidFill>
               </a:rPr>
-              <a:t>Playwright/Appium/k6/Grafana por definir</a:t>
+              <a:t>Appium/Maestro/k6/Grafana como robustez futura</a:t>
             </a:r>
           </a:p>
         </p:txBody>
@@ -21576,7 +21576,7 @@
           <p:cNvPr id="40" name="">
             <a:extLst xmlns:a="http://schemas.openxmlformats.org/drawingml/2006/main">
               <a:ext uri="{FF2B5EF4-FFF2-40B4-BE49-F238E27FC236}">
-                <a16:creationId xmlns:a16="http://schemas.microsoft.com/office/drawing/2014/main" id="{0E3B5CC2-0DCA-4D54-909A-E1178FF4D074}"/>
+                <a16:creationId xmlns:a16="http://schemas.microsoft.com/office/drawing/2014/main" id="{D03B628C-E5A2-473F-B979-43031B5BA575}"/>
               </a:ext>
             </a:extLst>
           </p:cNvPr>
@@ -21626,7 +21626,7 @@
           <p:cNvPr id="41" name="">
             <a:extLst xmlns:a="http://schemas.openxmlformats.org/drawingml/2006/main">
               <a:ext uri="{FF2B5EF4-FFF2-40B4-BE49-F238E27FC236}">
-                <a16:creationId xmlns:a16="http://schemas.microsoft.com/office/drawing/2014/main" id="{2F58C9B7-E593-4E1F-98B0-89910E94FC62}"/>
+                <a16:creationId xmlns:a16="http://schemas.microsoft.com/office/drawing/2014/main" id="{9C507080-E479-43F3-BA1D-3D80D08F119B}"/>
               </a:ext>
             </a:extLst>
           </p:cNvPr>
@@ -21674,7 +21674,7 @@
     </p:spTree>
     <p:extLst>
       <p:ext uri="{BB962C8B-B14F-4D97-AF65-F5344CB8AC3E}">
-        <p14:creationId xmlns:p14="http://schemas.microsoft.com/office/powerpoint/2010/main" val="1181086288"/>
+        <p14:creationId xmlns:p14="http://schemas.microsoft.com/office/powerpoint/2010/main" val="623605712"/>
       </p:ext>
     </p:extLst>
   </p:cSld>
@@ -21705,7 +21705,7 @@
           <p:cNvPr id="1" name="">
             <a:extLst xmlns:a="http://schemas.openxmlformats.org/drawingml/2006/main">
               <a:ext uri="{FF2B5EF4-FFF2-40B4-BE49-F238E27FC236}">
-                <a16:creationId xmlns:a16="http://schemas.microsoft.com/office/drawing/2014/main" id="{5F08017F-0559-404E-9C82-9074FFAE6120}"/>
+                <a16:creationId xmlns:a16="http://schemas.microsoft.com/office/drawing/2014/main" id="{4D602131-0752-4A41-9283-10AC937A9225}"/>
               </a:ext>
             </a:extLst>
           </p:cNvPr>
@@ -21755,7 +21755,7 @@
           <p:cNvPr id="2" name="">
             <a:extLst xmlns:a="http://schemas.openxmlformats.org/drawingml/2006/main">
               <a:ext uri="{FF2B5EF4-FFF2-40B4-BE49-F238E27FC236}">
-                <a16:creationId xmlns:a16="http://schemas.microsoft.com/office/drawing/2014/main" id="{1006AF3E-DC2B-4238-9C5D-19E7F4EBBBA2}"/>
+                <a16:creationId xmlns:a16="http://schemas.microsoft.com/office/drawing/2014/main" id="{040B51F6-50A6-4EEE-B167-46378949E38B}"/>
               </a:ext>
             </a:extLst>
           </p:cNvPr>
@@ -21805,7 +21805,7 @@
           <p:cNvPr id="3" name="">
             <a:extLst xmlns:a="http://schemas.openxmlformats.org/drawingml/2006/main">
               <a:ext uri="{FF2B5EF4-FFF2-40B4-BE49-F238E27FC236}">
-                <a16:creationId xmlns:a16="http://schemas.microsoft.com/office/drawing/2014/main" id="{FF1F5660-D896-4C43-858F-6F10D74374A1}"/>
+                <a16:creationId xmlns:a16="http://schemas.microsoft.com/office/drawing/2014/main" id="{D8594682-1047-444D-9B88-19EE0B1D7850}"/>
               </a:ext>
             </a:extLst>
           </p:cNvPr>
@@ -21836,7 +21836,7 @@
           <p:cNvPr id="4" name="">
             <a:extLst xmlns:a="http://schemas.openxmlformats.org/drawingml/2006/main">
               <a:ext uri="{FF2B5EF4-FFF2-40B4-BE49-F238E27FC236}">
-                <a16:creationId xmlns:a16="http://schemas.microsoft.com/office/drawing/2014/main" id="{8074691D-CB22-4EE7-B4D7-A177BA7616FA}"/>
+                <a16:creationId xmlns:a16="http://schemas.microsoft.com/office/drawing/2014/main" id="{1F9BE2ED-70D2-4DF5-B3EB-B0905E0FDD7C}"/>
               </a:ext>
             </a:extLst>
           </p:cNvPr>
@@ -21869,7 +21869,7 @@
           <p:cNvPr id="5" name="">
             <a:extLst xmlns:a="http://schemas.openxmlformats.org/drawingml/2006/main">
               <a:ext uri="{FF2B5EF4-FFF2-40B4-BE49-F238E27FC236}">
-                <a16:creationId xmlns:a16="http://schemas.microsoft.com/office/drawing/2014/main" id="{EBD82AE7-007D-4EDC-936E-E0EDD375F19E}"/>
+                <a16:creationId xmlns:a16="http://schemas.microsoft.com/office/drawing/2014/main" id="{B6EB330E-3E7D-4E72-903F-DBDDF336B04F}"/>
               </a:ext>
             </a:extLst>
           </p:cNvPr>
@@ -21919,7 +21919,7 @@
           <p:cNvPr id="6" name="">
             <a:extLst xmlns:a="http://schemas.openxmlformats.org/drawingml/2006/main">
               <a:ext uri="{FF2B5EF4-FFF2-40B4-BE49-F238E27FC236}">
-                <a16:creationId xmlns:a16="http://schemas.microsoft.com/office/drawing/2014/main" id="{E884F455-415B-45E1-AC6E-11703FECBE3A}"/>
+                <a16:creationId xmlns:a16="http://schemas.microsoft.com/office/drawing/2014/main" id="{9E82D31F-89E5-480E-84BD-6809AC20238F}"/>
               </a:ext>
             </a:extLst>
           </p:cNvPr>
@@ -21969,7 +21969,7 @@
           <p:cNvPr id="7" name="">
             <a:extLst xmlns:a="http://schemas.openxmlformats.org/drawingml/2006/main">
               <a:ext uri="{FF2B5EF4-FFF2-40B4-BE49-F238E27FC236}">
-                <a16:creationId xmlns:a16="http://schemas.microsoft.com/office/drawing/2014/main" id="{D1BBC259-2221-4090-B326-D1C636D9BC82}"/>
+                <a16:creationId xmlns:a16="http://schemas.microsoft.com/office/drawing/2014/main" id="{43B4084F-B206-4D61-9110-B0726AAF36CE}"/>
               </a:ext>
             </a:extLst>
           </p:cNvPr>
@@ -22002,7 +22002,7 @@
           <p:cNvPr id="8" name="">
             <a:extLst xmlns:a="http://schemas.openxmlformats.org/drawingml/2006/main">
               <a:ext uri="{FF2B5EF4-FFF2-40B4-BE49-F238E27FC236}">
-                <a16:creationId xmlns:a16="http://schemas.microsoft.com/office/drawing/2014/main" id="{96E4787A-5B87-4CF3-AF11-CC7FD26E9933}"/>
+                <a16:creationId xmlns:a16="http://schemas.microsoft.com/office/drawing/2014/main" id="{11456F9A-2DBB-449D-BDB9-E3CAF3F018B1}"/>
               </a:ext>
             </a:extLst>
           </p:cNvPr>
@@ -22052,7 +22052,7 @@
           <p:cNvPr id="9" name="">
             <a:extLst xmlns:a="http://schemas.openxmlformats.org/drawingml/2006/main">
               <a:ext uri="{FF2B5EF4-FFF2-40B4-BE49-F238E27FC236}">
-                <a16:creationId xmlns:a16="http://schemas.microsoft.com/office/drawing/2014/main" id="{4823B9BD-A2B8-4812-A021-EC6F390DFDEE}"/>
+                <a16:creationId xmlns:a16="http://schemas.microsoft.com/office/drawing/2014/main" id="{D3E1F550-1FFF-42F0-AAD0-0E1A4EBE5A31}"/>
               </a:ext>
             </a:extLst>
           </p:cNvPr>
@@ -22102,7 +22102,7 @@
           <p:cNvPr id="10" name="">
             <a:extLst xmlns:a="http://schemas.openxmlformats.org/drawingml/2006/main">
               <a:ext uri="{FF2B5EF4-FFF2-40B4-BE49-F238E27FC236}">
-                <a16:creationId xmlns:a16="http://schemas.microsoft.com/office/drawing/2014/main" id="{34B2F1BB-C802-4395-AA82-E0566E13CA06}"/>
+                <a16:creationId xmlns:a16="http://schemas.microsoft.com/office/drawing/2014/main" id="{DF5755AE-61AF-4654-8C2A-41B5B53729FA}"/>
               </a:ext>
             </a:extLst>
           </p:cNvPr>
@@ -22135,7 +22135,7 @@
           <p:cNvPr id="11" name="">
             <a:extLst xmlns:a="http://schemas.openxmlformats.org/drawingml/2006/main">
               <a:ext uri="{FF2B5EF4-FFF2-40B4-BE49-F238E27FC236}">
-                <a16:creationId xmlns:a16="http://schemas.microsoft.com/office/drawing/2014/main" id="{0E97C57B-94EB-42A8-B9DC-4DDC42760751}"/>
+                <a16:creationId xmlns:a16="http://schemas.microsoft.com/office/drawing/2014/main" id="{D5116CF9-7DF9-411F-97B3-BEF63704988E}"/>
               </a:ext>
             </a:extLst>
           </p:cNvPr>
@@ -22185,7 +22185,7 @@
           <p:cNvPr id="12" name="">
             <a:extLst xmlns:a="http://schemas.openxmlformats.org/drawingml/2006/main">
               <a:ext uri="{FF2B5EF4-FFF2-40B4-BE49-F238E27FC236}">
-                <a16:creationId xmlns:a16="http://schemas.microsoft.com/office/drawing/2014/main" id="{6AA853F1-E31E-47E7-BB0A-3E2FF3308E0C}"/>
+                <a16:creationId xmlns:a16="http://schemas.microsoft.com/office/drawing/2014/main" id="{82413C5D-DAC2-4043-B141-83425337F310}"/>
               </a:ext>
             </a:extLst>
           </p:cNvPr>
@@ -22235,7 +22235,7 @@
           <p:cNvPr id="13" name="">
             <a:extLst xmlns:a="http://schemas.openxmlformats.org/drawingml/2006/main">
               <a:ext uri="{FF2B5EF4-FFF2-40B4-BE49-F238E27FC236}">
-                <a16:creationId xmlns:a16="http://schemas.microsoft.com/office/drawing/2014/main" id="{91879195-B5C6-47EA-9AF4-D670322592AA}"/>
+                <a16:creationId xmlns:a16="http://schemas.microsoft.com/office/drawing/2014/main" id="{7C0B01D4-7252-4432-BB3E-65711D3FBBB3}"/>
               </a:ext>
             </a:extLst>
           </p:cNvPr>
@@ -22268,7 +22268,7 @@
           <p:cNvPr id="14" name="">
             <a:extLst xmlns:a="http://schemas.openxmlformats.org/drawingml/2006/main">
               <a:ext uri="{FF2B5EF4-FFF2-40B4-BE49-F238E27FC236}">
-                <a16:creationId xmlns:a16="http://schemas.microsoft.com/office/drawing/2014/main" id="{FB7BA580-2406-4BF3-9A23-B754780CA210}"/>
+                <a16:creationId xmlns:a16="http://schemas.microsoft.com/office/drawing/2014/main" id="{925CE979-9D5C-498B-A7FB-8DB168557111}"/>
               </a:ext>
             </a:extLst>
           </p:cNvPr>
@@ -22298,17 +22298,17 @@
             <a:pPr algn="l">
               <a:defRPr sz="3300" b="1">
                 <a:solidFill>
-                  <a:srgbClr val="F54900"/>
+                  <a:srgbClr val="45556C"/>
                 </a:solidFill>
               </a:defRPr>
             </a:pPr>
             <a:r>
               <a:rPr sz="3300" b="1">
                 <a:solidFill>
-                  <a:srgbClr val="F54900"/>
-                </a:solidFill>
-              </a:rPr>
-              <a:t>pendiente</a:t>
+                  <a:srgbClr val="45556C"/>
+                </a:solidFill>
+              </a:rPr>
+              <a:t>Extra</a:t>
             </a:r>
           </a:p>
         </p:txBody>
@@ -22318,7 +22318,7 @@
           <p:cNvPr id="15" name="">
             <a:extLst xmlns:a="http://schemas.openxmlformats.org/drawingml/2006/main">
               <a:ext uri="{FF2B5EF4-FFF2-40B4-BE49-F238E27FC236}">
-                <a16:creationId xmlns:a16="http://schemas.microsoft.com/office/drawing/2014/main" id="{07FFEEE0-8A8F-4A25-A02E-B4BB0D31CDC0}"/>
+                <a16:creationId xmlns:a16="http://schemas.microsoft.com/office/drawing/2014/main" id="{8AB3F83C-0F74-43E9-B589-B4F8A2357589}"/>
               </a:ext>
             </a:extLst>
           </p:cNvPr>
@@ -22358,7 +22358,7 @@
                   <a:srgbClr val="45556C"/>
                 </a:solidFill>
               </a:rPr>
-              <a:t>E2E final requerido</a:t>
+              <a:t>E2E/carga productiva</a:t>
             </a:r>
           </a:p>
         </p:txBody>
@@ -22368,7 +22368,7 @@
           <p:cNvPr id="16" name="">
             <a:extLst xmlns:a="http://schemas.openxmlformats.org/drawingml/2006/main">
               <a:ext uri="{FF2B5EF4-FFF2-40B4-BE49-F238E27FC236}">
-                <a16:creationId xmlns:a16="http://schemas.microsoft.com/office/drawing/2014/main" id="{945B58E4-67EB-489F-8C33-144DDBE4ACFD}"/>
+                <a16:creationId xmlns:a16="http://schemas.microsoft.com/office/drawing/2014/main" id="{DD235D09-7174-4A70-B7AD-A10C13B64176}"/>
               </a:ext>
             </a:extLst>
           </p:cNvPr>
@@ -22486,7 +22486,7 @@
           <p:cNvPr id="17" name="">
             <a:extLst xmlns:a="http://schemas.openxmlformats.org/drawingml/2006/main">
               <a:ext uri="{FF2B5EF4-FFF2-40B4-BE49-F238E27FC236}">
-                <a16:creationId xmlns:a16="http://schemas.microsoft.com/office/drawing/2014/main" id="{A15AB26A-7C9A-4110-A44C-1A1438B26767}"/>
+                <a16:creationId xmlns:a16="http://schemas.microsoft.com/office/drawing/2014/main" id="{C1FE94E6-1B81-43C5-AEBB-4FBE61B6F1E9}"/>
               </a:ext>
             </a:extLst>
           </p:cNvPr>
@@ -22536,7 +22536,7 @@
           <p:cNvPr id="18" name="">
             <a:extLst xmlns:a="http://schemas.openxmlformats.org/drawingml/2006/main">
               <a:ext uri="{FF2B5EF4-FFF2-40B4-BE49-F238E27FC236}">
-                <a16:creationId xmlns:a16="http://schemas.microsoft.com/office/drawing/2014/main" id="{1C333C68-7334-4FC7-8818-E1509D978BF0}"/>
+                <a16:creationId xmlns:a16="http://schemas.microsoft.com/office/drawing/2014/main" id="{3F26A1F7-93B8-440C-9B5E-2CFD32281000}"/>
               </a:ext>
             </a:extLst>
           </p:cNvPr>
@@ -22584,7 +22584,7 @@
     </p:spTree>
     <p:extLst>
       <p:ext uri="{BB962C8B-B14F-4D97-AF65-F5344CB8AC3E}">
-        <p14:creationId xmlns:p14="http://schemas.microsoft.com/office/powerpoint/2010/main" val="1228159677"/>
+        <p14:creationId xmlns:p14="http://schemas.microsoft.com/office/powerpoint/2010/main" val="1829582628"/>
       </p:ext>
     </p:extLst>
   </p:cSld>
@@ -22615,7 +22615,7 @@
           <p:cNvPr id="1" name="">
             <a:extLst xmlns:a="http://schemas.openxmlformats.org/drawingml/2006/main">
               <a:ext uri="{FF2B5EF4-FFF2-40B4-BE49-F238E27FC236}">
-                <a16:creationId xmlns:a16="http://schemas.microsoft.com/office/drawing/2014/main" id="{00C1144B-4C72-4881-B1AF-45FEEE613A7D}"/>
+                <a16:creationId xmlns:a16="http://schemas.microsoft.com/office/drawing/2014/main" id="{4953A9B9-99E9-4BE8-9266-90C539C386C8}"/>
               </a:ext>
             </a:extLst>
           </p:cNvPr>
@@ -22665,7 +22665,7 @@
           <p:cNvPr id="2" name="">
             <a:extLst xmlns:a="http://schemas.openxmlformats.org/drawingml/2006/main">
               <a:ext uri="{FF2B5EF4-FFF2-40B4-BE49-F238E27FC236}">
-                <a16:creationId xmlns:a16="http://schemas.microsoft.com/office/drawing/2014/main" id="{5DCFE0ED-269A-48B3-8B6B-2DFB264ABC15}"/>
+                <a16:creationId xmlns:a16="http://schemas.microsoft.com/office/drawing/2014/main" id="{B121B8D3-280D-4D0B-B1BE-9532ECF32B5D}"/>
               </a:ext>
             </a:extLst>
           </p:cNvPr>
@@ -22715,7 +22715,7 @@
           <p:cNvPr id="3" name="">
             <a:extLst xmlns:a="http://schemas.openxmlformats.org/drawingml/2006/main">
               <a:ext uri="{FF2B5EF4-FFF2-40B4-BE49-F238E27FC236}">
-                <a16:creationId xmlns:a16="http://schemas.microsoft.com/office/drawing/2014/main" id="{F4633907-D121-4EDD-BEDB-3D02F2B29EF3}"/>
+                <a16:creationId xmlns:a16="http://schemas.microsoft.com/office/drawing/2014/main" id="{E12E6E80-4793-4192-B006-F5175B7F3147}"/>
               </a:ext>
             </a:extLst>
           </p:cNvPr>
@@ -22746,7 +22746,7 @@
           <p:cNvPr id="4" name="">
             <a:extLst xmlns:a="http://schemas.openxmlformats.org/drawingml/2006/main">
               <a:ext uri="{FF2B5EF4-FFF2-40B4-BE49-F238E27FC236}">
-                <a16:creationId xmlns:a16="http://schemas.microsoft.com/office/drawing/2014/main" id="{B1E1EFF4-C23B-44A2-A837-61E204D9818C}"/>
+                <a16:creationId xmlns:a16="http://schemas.microsoft.com/office/drawing/2014/main" id="{562ADDDD-F605-4CB0-9397-379B632086B6}"/>
               </a:ext>
             </a:extLst>
           </p:cNvPr>
@@ -22779,7 +22779,7 @@
           <p:cNvPr id="5" name="">
             <a:extLst xmlns:a="http://schemas.openxmlformats.org/drawingml/2006/main">
               <a:ext uri="{FF2B5EF4-FFF2-40B4-BE49-F238E27FC236}">
-                <a16:creationId xmlns:a16="http://schemas.microsoft.com/office/drawing/2014/main" id="{ECCA112B-0A47-4102-BE82-462ABDD8AFC7}"/>
+                <a16:creationId xmlns:a16="http://schemas.microsoft.com/office/drawing/2014/main" id="{262E9071-D774-4307-AD52-E050D79011AA}"/>
               </a:ext>
             </a:extLst>
           </p:cNvPr>
@@ -22829,7 +22829,7 @@
           <p:cNvPr id="6" name="">
             <a:extLst xmlns:a="http://schemas.openxmlformats.org/drawingml/2006/main">
               <a:ext uri="{FF2B5EF4-FFF2-40B4-BE49-F238E27FC236}">
-                <a16:creationId xmlns:a16="http://schemas.microsoft.com/office/drawing/2014/main" id="{7ECD20A5-81EB-407B-9EBD-5E0E6BF54263}"/>
+                <a16:creationId xmlns:a16="http://schemas.microsoft.com/office/drawing/2014/main" id="{9538805B-3C1F-4FB1-B740-FB85B0C005D6}"/>
               </a:ext>
             </a:extLst>
           </p:cNvPr>
@@ -22862,7 +22862,7 @@
           <p:cNvPr id="7" name="">
             <a:extLst xmlns:a="http://schemas.openxmlformats.org/drawingml/2006/main">
               <a:ext uri="{FF2B5EF4-FFF2-40B4-BE49-F238E27FC236}">
-                <a16:creationId xmlns:a16="http://schemas.microsoft.com/office/drawing/2014/main" id="{C768ACE6-B966-42F5-A51A-E1E9CF1D399E}"/>
+                <a16:creationId xmlns:a16="http://schemas.microsoft.com/office/drawing/2014/main" id="{298D8453-5B8B-48ED-B823-247CD69C8D1C}"/>
               </a:ext>
             </a:extLst>
           </p:cNvPr>
@@ -22912,7 +22912,7 @@
           <p:cNvPr id="8" name="">
             <a:extLst xmlns:a="http://schemas.openxmlformats.org/drawingml/2006/main">
               <a:ext uri="{FF2B5EF4-FFF2-40B4-BE49-F238E27FC236}">
-                <a16:creationId xmlns:a16="http://schemas.microsoft.com/office/drawing/2014/main" id="{5D8E148B-D447-47D6-98F1-BA1F8650F002}"/>
+                <a16:creationId xmlns:a16="http://schemas.microsoft.com/office/drawing/2014/main" id="{A98B2C67-C320-4808-8BA4-3BE60F0C7D62}"/>
               </a:ext>
             </a:extLst>
           </p:cNvPr>
@@ -22945,7 +22945,7 @@
           <p:cNvPr id="9" name="">
             <a:extLst xmlns:a="http://schemas.openxmlformats.org/drawingml/2006/main">
               <a:ext uri="{FF2B5EF4-FFF2-40B4-BE49-F238E27FC236}">
-                <a16:creationId xmlns:a16="http://schemas.microsoft.com/office/drawing/2014/main" id="{BD192B5A-A141-4C80-8B94-487DCBF5135C}"/>
+                <a16:creationId xmlns:a16="http://schemas.microsoft.com/office/drawing/2014/main" id="{B91ED91A-CAAD-45AE-ABD3-EF5B3ABCCE0E}"/>
               </a:ext>
             </a:extLst>
           </p:cNvPr>
@@ -22995,7 +22995,7 @@
           <p:cNvPr id="10" name="">
             <a:extLst xmlns:a="http://schemas.openxmlformats.org/drawingml/2006/main">
               <a:ext uri="{FF2B5EF4-FFF2-40B4-BE49-F238E27FC236}">
-                <a16:creationId xmlns:a16="http://schemas.microsoft.com/office/drawing/2014/main" id="{DD49C66A-A811-427A-91BB-91F2BCBBE520}"/>
+                <a16:creationId xmlns:a16="http://schemas.microsoft.com/office/drawing/2014/main" id="{C09C6A23-BEA3-4CBF-8702-BC84E2C80C51}"/>
               </a:ext>
             </a:extLst>
           </p:cNvPr>
@@ -23028,7 +23028,7 @@
           <p:cNvPr id="11" name="">
             <a:extLst xmlns:a="http://schemas.openxmlformats.org/drawingml/2006/main">
               <a:ext uri="{FF2B5EF4-FFF2-40B4-BE49-F238E27FC236}">
-                <a16:creationId xmlns:a16="http://schemas.microsoft.com/office/drawing/2014/main" id="{8EE60B1F-6CDA-4E63-B77D-FA0882DDD38A}"/>
+                <a16:creationId xmlns:a16="http://schemas.microsoft.com/office/drawing/2014/main" id="{A32914A2-5FC8-44A5-9941-0F268F70A135}"/>
               </a:ext>
             </a:extLst>
           </p:cNvPr>
@@ -23078,7 +23078,7 @@
           <p:cNvPr id="12" name="">
             <a:extLst xmlns:a="http://schemas.openxmlformats.org/drawingml/2006/main">
               <a:ext uri="{FF2B5EF4-FFF2-40B4-BE49-F238E27FC236}">
-                <a16:creationId xmlns:a16="http://schemas.microsoft.com/office/drawing/2014/main" id="{E23F4B67-7D37-4679-A2C7-1DA604331037}"/>
+                <a16:creationId xmlns:a16="http://schemas.microsoft.com/office/drawing/2014/main" id="{0B8A4136-7E69-4B20-A3CE-C3A8FA3C9082}"/>
               </a:ext>
             </a:extLst>
           </p:cNvPr>
@@ -23111,7 +23111,7 @@
           <p:cNvPr id="13" name="">
             <a:extLst xmlns:a="http://schemas.openxmlformats.org/drawingml/2006/main">
               <a:ext uri="{FF2B5EF4-FFF2-40B4-BE49-F238E27FC236}">
-                <a16:creationId xmlns:a16="http://schemas.microsoft.com/office/drawing/2014/main" id="{F3913247-C36B-4090-8388-9409F10E55EE}"/>
+                <a16:creationId xmlns:a16="http://schemas.microsoft.com/office/drawing/2014/main" id="{94681B21-FC38-434B-BE4F-C910D840F642}"/>
               </a:ext>
             </a:extLst>
           </p:cNvPr>
@@ -23161,7 +23161,7 @@
           <p:cNvPr id="14" name="">
             <a:extLst xmlns:a="http://schemas.openxmlformats.org/drawingml/2006/main">
               <a:ext uri="{FF2B5EF4-FFF2-40B4-BE49-F238E27FC236}">
-                <a16:creationId xmlns:a16="http://schemas.microsoft.com/office/drawing/2014/main" id="{2E186275-84BA-4FC2-84B2-6C9C5B0DB7F4}"/>
+                <a16:creationId xmlns:a16="http://schemas.microsoft.com/office/drawing/2014/main" id="{6C4F07FB-6D3A-4650-8127-F7FD2E7D485F}"/>
               </a:ext>
             </a:extLst>
           </p:cNvPr>
@@ -23194,7 +23194,7 @@
           <p:cNvPr id="15" name="">
             <a:extLst xmlns:a="http://schemas.openxmlformats.org/drawingml/2006/main">
               <a:ext uri="{FF2B5EF4-FFF2-40B4-BE49-F238E27FC236}">
-                <a16:creationId xmlns:a16="http://schemas.microsoft.com/office/drawing/2014/main" id="{65BFB6BE-63E4-49B0-B8E3-143CB104DF28}"/>
+                <a16:creationId xmlns:a16="http://schemas.microsoft.com/office/drawing/2014/main" id="{CD59CFC7-B828-4E95-BEF5-7FBEEF8129CE}"/>
               </a:ext>
             </a:extLst>
           </p:cNvPr>
@@ -23244,7 +23244,7 @@
           <p:cNvPr id="16" name="">
             <a:extLst xmlns:a="http://schemas.openxmlformats.org/drawingml/2006/main">
               <a:ext uri="{FF2B5EF4-FFF2-40B4-BE49-F238E27FC236}">
-                <a16:creationId xmlns:a16="http://schemas.microsoft.com/office/drawing/2014/main" id="{5FFF0BBC-A6F5-4B23-8055-A0ED020DD997}"/>
+                <a16:creationId xmlns:a16="http://schemas.microsoft.com/office/drawing/2014/main" id="{5978CA5E-1576-4C36-92C8-4458418283F5}"/>
               </a:ext>
             </a:extLst>
           </p:cNvPr>
@@ -23277,7 +23277,7 @@
           <p:cNvPr id="17" name="">
             <a:extLst xmlns:a="http://schemas.openxmlformats.org/drawingml/2006/main">
               <a:ext uri="{FF2B5EF4-FFF2-40B4-BE49-F238E27FC236}">
-                <a16:creationId xmlns:a16="http://schemas.microsoft.com/office/drawing/2014/main" id="{8879013F-EA8E-4709-BD33-2E682DECDE42}"/>
+                <a16:creationId xmlns:a16="http://schemas.microsoft.com/office/drawing/2014/main" id="{69DBFE9D-E877-4575-B56F-6FB8424DC7AE}"/>
               </a:ext>
             </a:extLst>
           </p:cNvPr>
@@ -23327,7 +23327,7 @@
           <p:cNvPr id="18" name="">
             <a:extLst xmlns:a="http://schemas.openxmlformats.org/drawingml/2006/main">
               <a:ext uri="{FF2B5EF4-FFF2-40B4-BE49-F238E27FC236}">
-                <a16:creationId xmlns:a16="http://schemas.microsoft.com/office/drawing/2014/main" id="{8224F161-1462-47F6-B765-23647F034E80}"/>
+                <a16:creationId xmlns:a16="http://schemas.microsoft.com/office/drawing/2014/main" id="{F8B1FF40-83AF-4934-939E-B813936AD646}"/>
               </a:ext>
             </a:extLst>
           </p:cNvPr>
@@ -23360,7 +23360,7 @@
           <p:cNvPr id="19" name="">
             <a:extLst xmlns:a="http://schemas.openxmlformats.org/drawingml/2006/main">
               <a:ext uri="{FF2B5EF4-FFF2-40B4-BE49-F238E27FC236}">
-                <a16:creationId xmlns:a16="http://schemas.microsoft.com/office/drawing/2014/main" id="{F35CC19A-2B06-49E1-BF51-BE736EF9967E}"/>
+                <a16:creationId xmlns:a16="http://schemas.microsoft.com/office/drawing/2014/main" id="{D703AD59-405F-426B-BEC6-A821B0DD0177}"/>
               </a:ext>
             </a:extLst>
           </p:cNvPr>
@@ -23410,7 +23410,7 @@
           <p:cNvPr id="20" name="">
             <a:extLst xmlns:a="http://schemas.openxmlformats.org/drawingml/2006/main">
               <a:ext uri="{FF2B5EF4-FFF2-40B4-BE49-F238E27FC236}">
-                <a16:creationId xmlns:a16="http://schemas.microsoft.com/office/drawing/2014/main" id="{9DBB967B-1071-46A4-B77B-85B2534C91A4}"/>
+                <a16:creationId xmlns:a16="http://schemas.microsoft.com/office/drawing/2014/main" id="{F5A34C7A-55F7-4B78-A836-2D4B5DEBA2C7}"/>
               </a:ext>
             </a:extLst>
           </p:cNvPr>
@@ -23443,7 +23443,7 @@
           <p:cNvPr id="21" name="">
             <a:extLst xmlns:a="http://schemas.openxmlformats.org/drawingml/2006/main">
               <a:ext uri="{FF2B5EF4-FFF2-40B4-BE49-F238E27FC236}">
-                <a16:creationId xmlns:a16="http://schemas.microsoft.com/office/drawing/2014/main" id="{29500BF8-5A09-4F50-9E0D-637D6F05458F}"/>
+                <a16:creationId xmlns:a16="http://schemas.microsoft.com/office/drawing/2014/main" id="{62DB0BDA-78C6-4C58-A263-9882E010EB55}"/>
               </a:ext>
             </a:extLst>
           </p:cNvPr>
@@ -23493,7 +23493,7 @@
           <p:cNvPr id="22" name="">
             <a:extLst xmlns:a="http://schemas.openxmlformats.org/drawingml/2006/main">
               <a:ext uri="{FF2B5EF4-FFF2-40B4-BE49-F238E27FC236}">
-                <a16:creationId xmlns:a16="http://schemas.microsoft.com/office/drawing/2014/main" id="{91CF867A-DF01-4118-A74F-F7016439C406}"/>
+                <a16:creationId xmlns:a16="http://schemas.microsoft.com/office/drawing/2014/main" id="{43A40F46-39B8-4C5F-AF14-6298D6E9D61F}"/>
               </a:ext>
             </a:extLst>
           </p:cNvPr>
@@ -23526,7 +23526,7 @@
           <p:cNvPr id="23" name="">
             <a:extLst xmlns:a="http://schemas.openxmlformats.org/drawingml/2006/main">
               <a:ext uri="{FF2B5EF4-FFF2-40B4-BE49-F238E27FC236}">
-                <a16:creationId xmlns:a16="http://schemas.microsoft.com/office/drawing/2014/main" id="{0302E796-01E8-41FC-9CBC-938036DF8532}"/>
+                <a16:creationId xmlns:a16="http://schemas.microsoft.com/office/drawing/2014/main" id="{A81C1823-DE6C-4EDC-9729-E29114193EE2}"/>
               </a:ext>
             </a:extLst>
           </p:cNvPr>
@@ -23576,7 +23576,7 @@
           <p:cNvPr id="24" name="">
             <a:extLst xmlns:a="http://schemas.openxmlformats.org/drawingml/2006/main">
               <a:ext uri="{FF2B5EF4-FFF2-40B4-BE49-F238E27FC236}">
-                <a16:creationId xmlns:a16="http://schemas.microsoft.com/office/drawing/2014/main" id="{8C0D246E-C50F-4F55-8F2A-52FFE948C066}"/>
+                <a16:creationId xmlns:a16="http://schemas.microsoft.com/office/drawing/2014/main" id="{E95CE443-E274-4357-BFE1-B8D61A83445C}"/>
               </a:ext>
             </a:extLst>
           </p:cNvPr>
@@ -23609,7 +23609,7 @@
           <p:cNvPr id="25" name="">
             <a:extLst xmlns:a="http://schemas.openxmlformats.org/drawingml/2006/main">
               <a:ext uri="{FF2B5EF4-FFF2-40B4-BE49-F238E27FC236}">
-                <a16:creationId xmlns:a16="http://schemas.microsoft.com/office/drawing/2014/main" id="{FA5F1162-098E-43AF-B166-7696753341D8}"/>
+                <a16:creationId xmlns:a16="http://schemas.microsoft.com/office/drawing/2014/main" id="{15B3FF05-D5A1-4585-8912-2B84F0C52B58}"/>
               </a:ext>
             </a:extLst>
           </p:cNvPr>
@@ -23659,7 +23659,7 @@
           <p:cNvPr id="26" name="">
             <a:extLst xmlns:a="http://schemas.openxmlformats.org/drawingml/2006/main">
               <a:ext uri="{FF2B5EF4-FFF2-40B4-BE49-F238E27FC236}">
-                <a16:creationId xmlns:a16="http://schemas.microsoft.com/office/drawing/2014/main" id="{2361BCC9-A409-4C6D-9962-837E33D7C867}"/>
+                <a16:creationId xmlns:a16="http://schemas.microsoft.com/office/drawing/2014/main" id="{A7649F9A-A1D3-49C2-A76E-F8E2723B5ABA}"/>
               </a:ext>
             </a:extLst>
           </p:cNvPr>
@@ -23692,7 +23692,7 @@
           <p:cNvPr id="27" name="">
             <a:extLst xmlns:a="http://schemas.openxmlformats.org/drawingml/2006/main">
               <a:ext uri="{FF2B5EF4-FFF2-40B4-BE49-F238E27FC236}">
-                <a16:creationId xmlns:a16="http://schemas.microsoft.com/office/drawing/2014/main" id="{8DEE2DAA-0A43-4E7A-B015-FF33B62B9653}"/>
+                <a16:creationId xmlns:a16="http://schemas.microsoft.com/office/drawing/2014/main" id="{3DC9CDC7-EE61-4F1F-AFA5-9D16EB00F379}"/>
               </a:ext>
             </a:extLst>
           </p:cNvPr>
@@ -23742,7 +23742,7 @@
           <p:cNvPr id="28" name="">
             <a:extLst xmlns:a="http://schemas.openxmlformats.org/drawingml/2006/main">
               <a:ext uri="{FF2B5EF4-FFF2-40B4-BE49-F238E27FC236}">
-                <a16:creationId xmlns:a16="http://schemas.microsoft.com/office/drawing/2014/main" id="{0F238E5B-C960-4A31-9CAA-AAEB8C66B4C1}"/>
+                <a16:creationId xmlns:a16="http://schemas.microsoft.com/office/drawing/2014/main" id="{09AFBCE5-6706-4699-AF6E-883A6AB424E4}"/>
               </a:ext>
             </a:extLst>
           </p:cNvPr>
@@ -23775,7 +23775,7 @@
           <p:cNvPr id="29" name="">
             <a:extLst xmlns:a="http://schemas.openxmlformats.org/drawingml/2006/main">
               <a:ext uri="{FF2B5EF4-FFF2-40B4-BE49-F238E27FC236}">
-                <a16:creationId xmlns:a16="http://schemas.microsoft.com/office/drawing/2014/main" id="{70311B82-BBF9-4881-A20E-53CF4FB8F594}"/>
+                <a16:creationId xmlns:a16="http://schemas.microsoft.com/office/drawing/2014/main" id="{B85B883A-8DA2-445C-8625-E57E2FF3EC30}"/>
               </a:ext>
             </a:extLst>
           </p:cNvPr>
@@ -23825,7 +23825,7 @@
           <p:cNvPr id="30" name="">
             <a:extLst xmlns:a="http://schemas.openxmlformats.org/drawingml/2006/main">
               <a:ext uri="{FF2B5EF4-FFF2-40B4-BE49-F238E27FC236}">
-                <a16:creationId xmlns:a16="http://schemas.microsoft.com/office/drawing/2014/main" id="{49D9B8E7-D27B-4A69-9347-58B4CE72D1A3}"/>
+                <a16:creationId xmlns:a16="http://schemas.microsoft.com/office/drawing/2014/main" id="{170EEBA7-8A90-44A2-9FDC-A3A7E7F73BF4}"/>
               </a:ext>
             </a:extLst>
           </p:cNvPr>
@@ -23858,7 +23858,7 @@
           <p:cNvPr id="31" name="">
             <a:extLst xmlns:a="http://schemas.openxmlformats.org/drawingml/2006/main">
               <a:ext uri="{FF2B5EF4-FFF2-40B4-BE49-F238E27FC236}">
-                <a16:creationId xmlns:a16="http://schemas.microsoft.com/office/drawing/2014/main" id="{CF602423-BF7B-4133-8587-D218592D04B1}"/>
+                <a16:creationId xmlns:a16="http://schemas.microsoft.com/office/drawing/2014/main" id="{39DC1C81-6F50-410B-9A17-2D3D35F0A013}"/>
               </a:ext>
             </a:extLst>
           </p:cNvPr>
@@ -23908,7 +23908,7 @@
           <p:cNvPr id="32" name="">
             <a:extLst xmlns:a="http://schemas.openxmlformats.org/drawingml/2006/main">
               <a:ext uri="{FF2B5EF4-FFF2-40B4-BE49-F238E27FC236}">
-                <a16:creationId xmlns:a16="http://schemas.microsoft.com/office/drawing/2014/main" id="{F07D1BA9-28A9-4D82-A7BB-2D351CBAC0D1}"/>
+                <a16:creationId xmlns:a16="http://schemas.microsoft.com/office/drawing/2014/main" id="{C482E69D-9447-4DF6-8D4C-725144C22E90}"/>
               </a:ext>
             </a:extLst>
           </p:cNvPr>
@@ -23941,7 +23941,7 @@
           <p:cNvPr id="33" name="">
             <a:extLst xmlns:a="http://schemas.openxmlformats.org/drawingml/2006/main">
               <a:ext uri="{FF2B5EF4-FFF2-40B4-BE49-F238E27FC236}">
-                <a16:creationId xmlns:a16="http://schemas.microsoft.com/office/drawing/2014/main" id="{9AFAFD92-C6C9-4817-8945-2D0D3D64DF15}"/>
+                <a16:creationId xmlns:a16="http://schemas.microsoft.com/office/drawing/2014/main" id="{1D295817-9443-44DD-8740-B6A732DE353D}"/>
               </a:ext>
             </a:extLst>
           </p:cNvPr>
@@ -23991,7 +23991,7 @@
           <p:cNvPr id="34" name="">
             <a:extLst xmlns:a="http://schemas.openxmlformats.org/drawingml/2006/main">
               <a:ext uri="{FF2B5EF4-FFF2-40B4-BE49-F238E27FC236}">
-                <a16:creationId xmlns:a16="http://schemas.microsoft.com/office/drawing/2014/main" id="{B0213544-0197-4C13-8DAB-A687947608DF}"/>
+                <a16:creationId xmlns:a16="http://schemas.microsoft.com/office/drawing/2014/main" id="{A92D442E-6DB7-48C6-A309-8C17365E84E8}"/>
               </a:ext>
             </a:extLst>
           </p:cNvPr>
@@ -24041,7 +24041,7 @@
           <p:cNvPr id="35" name="">
             <a:extLst xmlns:a="http://schemas.openxmlformats.org/drawingml/2006/main">
               <a:ext uri="{FF2B5EF4-FFF2-40B4-BE49-F238E27FC236}">
-                <a16:creationId xmlns:a16="http://schemas.microsoft.com/office/drawing/2014/main" id="{5DB58899-0A9B-4158-A67D-B4E3BA8A64D8}"/>
+                <a16:creationId xmlns:a16="http://schemas.microsoft.com/office/drawing/2014/main" id="{2D60E599-BE83-42BB-83F0-C1EF44174BEA}"/>
               </a:ext>
             </a:extLst>
           </p:cNvPr>
@@ -24091,7 +24091,7 @@
           <p:cNvPr id="36" name="">
             <a:extLst xmlns:a="http://schemas.openxmlformats.org/drawingml/2006/main">
               <a:ext uri="{FF2B5EF4-FFF2-40B4-BE49-F238E27FC236}">
-                <a16:creationId xmlns:a16="http://schemas.microsoft.com/office/drawing/2014/main" id="{73CF5C08-C4CE-4E08-8389-DA23B285E5D9}"/>
+                <a16:creationId xmlns:a16="http://schemas.microsoft.com/office/drawing/2014/main" id="{9ABE3BC0-D390-4E2D-B428-39C190EB742F}"/>
               </a:ext>
             </a:extLst>
           </p:cNvPr>
@@ -24139,7 +24139,7 @@
     </p:spTree>
     <p:extLst>
       <p:ext uri="{BB962C8B-B14F-4D97-AF65-F5344CB8AC3E}">
-        <p14:creationId xmlns:p14="http://schemas.microsoft.com/office/powerpoint/2010/main" val="1892343294"/>
+        <p14:creationId xmlns:p14="http://schemas.microsoft.com/office/powerpoint/2010/main" val="1937954166"/>
       </p:ext>
     </p:extLst>
   </p:cSld>
@@ -24170,7 +24170,7 @@
           <p:cNvPr id="1" name="">
             <a:extLst xmlns:a="http://schemas.openxmlformats.org/drawingml/2006/main">
               <a:ext uri="{FF2B5EF4-FFF2-40B4-BE49-F238E27FC236}">
-                <a16:creationId xmlns:a16="http://schemas.microsoft.com/office/drawing/2014/main" id="{23057FBD-F1BF-4DAD-82F6-2C7C31B5B9B5}"/>
+                <a16:creationId xmlns:a16="http://schemas.microsoft.com/office/drawing/2014/main" id="{43ECA080-060F-4D81-BC13-262071CF0C36}"/>
               </a:ext>
             </a:extLst>
           </p:cNvPr>
@@ -24220,7 +24220,7 @@
           <p:cNvPr id="2" name="">
             <a:extLst xmlns:a="http://schemas.openxmlformats.org/drawingml/2006/main">
               <a:ext uri="{FF2B5EF4-FFF2-40B4-BE49-F238E27FC236}">
-                <a16:creationId xmlns:a16="http://schemas.microsoft.com/office/drawing/2014/main" id="{C2AD4201-4477-4DC1-93CA-74D9EEB24246}"/>
+                <a16:creationId xmlns:a16="http://schemas.microsoft.com/office/drawing/2014/main" id="{A05AE2AC-13A5-4BD4-A684-1318BC9F5030}"/>
               </a:ext>
             </a:extLst>
           </p:cNvPr>
@@ -24270,7 +24270,7 @@
           <p:cNvPr id="3" name="">
             <a:extLst xmlns:a="http://schemas.openxmlformats.org/drawingml/2006/main">
               <a:ext uri="{FF2B5EF4-FFF2-40B4-BE49-F238E27FC236}">
-                <a16:creationId xmlns:a16="http://schemas.microsoft.com/office/drawing/2014/main" id="{5C29A24D-7866-4617-B6C3-1F353370C9AE}"/>
+                <a16:creationId xmlns:a16="http://schemas.microsoft.com/office/drawing/2014/main" id="{F5DB0F1A-4C55-4356-9FA3-F6A9AE516B8B}"/>
               </a:ext>
             </a:extLst>
           </p:cNvPr>
@@ -24301,7 +24301,7 @@
           <p:cNvPr id="4" name="">
             <a:extLst xmlns:a="http://schemas.openxmlformats.org/drawingml/2006/main">
               <a:ext uri="{FF2B5EF4-FFF2-40B4-BE49-F238E27FC236}">
-                <a16:creationId xmlns:a16="http://schemas.microsoft.com/office/drawing/2014/main" id="{EB3CE307-6760-400E-92F0-52520B7082E6}"/>
+                <a16:creationId xmlns:a16="http://schemas.microsoft.com/office/drawing/2014/main" id="{B5BAA667-D102-424A-958C-5ACC28818B20}"/>
               </a:ext>
             </a:extLst>
           </p:cNvPr>
@@ -24334,7 +24334,7 @@
           <p:cNvPr id="5" name="">
             <a:extLst xmlns:a="http://schemas.openxmlformats.org/drawingml/2006/main">
               <a:ext uri="{FF2B5EF4-FFF2-40B4-BE49-F238E27FC236}">
-                <a16:creationId xmlns:a16="http://schemas.microsoft.com/office/drawing/2014/main" id="{F0B10F07-314F-44CF-8038-525C6B742AD6}"/>
+                <a16:creationId xmlns:a16="http://schemas.microsoft.com/office/drawing/2014/main" id="{99BDD3E1-93C7-400B-AD9D-70C282D8BEDA}"/>
               </a:ext>
             </a:extLst>
           </p:cNvPr>
@@ -24486,7 +24486,7 @@
           <p:cNvPr id="6" name="">
             <a:extLst xmlns:a="http://schemas.openxmlformats.org/drawingml/2006/main">
               <a:ext uri="{FF2B5EF4-FFF2-40B4-BE49-F238E27FC236}">
-                <a16:creationId xmlns:a16="http://schemas.microsoft.com/office/drawing/2014/main" id="{61BA7F2E-A4A8-45F3-8C18-053027BF1E8E}"/>
+                <a16:creationId xmlns:a16="http://schemas.microsoft.com/office/drawing/2014/main" id="{03AE61C3-5E7C-4641-AC11-977BF65B6450}"/>
               </a:ext>
             </a:extLst>
           </p:cNvPr>
@@ -24519,7 +24519,7 @@
           <p:cNvPr id="7" name="">
             <a:extLst xmlns:a="http://schemas.openxmlformats.org/drawingml/2006/main">
               <a:ext uri="{FF2B5EF4-FFF2-40B4-BE49-F238E27FC236}">
-                <a16:creationId xmlns:a16="http://schemas.microsoft.com/office/drawing/2014/main" id="{1D61163D-2270-4673-83FB-068DACFCD5A6}"/>
+                <a16:creationId xmlns:a16="http://schemas.microsoft.com/office/drawing/2014/main" id="{D5089D29-8534-44ED-94E0-FA7979A66610}"/>
               </a:ext>
             </a:extLst>
           </p:cNvPr>
@@ -24569,7 +24569,7 @@
           <p:cNvPr id="8" name="">
             <a:extLst xmlns:a="http://schemas.openxmlformats.org/drawingml/2006/main">
               <a:ext uri="{FF2B5EF4-FFF2-40B4-BE49-F238E27FC236}">
-                <a16:creationId xmlns:a16="http://schemas.microsoft.com/office/drawing/2014/main" id="{510BDD79-38C8-4ACB-8C7E-1A782BC815CD}"/>
+                <a16:creationId xmlns:a16="http://schemas.microsoft.com/office/drawing/2014/main" id="{6D1AE4EF-B602-4EA6-BB6D-81375CD44526}"/>
               </a:ext>
             </a:extLst>
           </p:cNvPr>
@@ -24670,7 +24670,7 @@
           <p:cNvPr id="9" name="">
             <a:extLst xmlns:a="http://schemas.openxmlformats.org/drawingml/2006/main">
               <a:ext uri="{FF2B5EF4-FFF2-40B4-BE49-F238E27FC236}">
-                <a16:creationId xmlns:a16="http://schemas.microsoft.com/office/drawing/2014/main" id="{46493BB1-C0A0-4BA4-B9AA-E77615717F59}"/>
+                <a16:creationId xmlns:a16="http://schemas.microsoft.com/office/drawing/2014/main" id="{B5D0D140-9D3E-46F2-A2DC-F83DD3B46407}"/>
               </a:ext>
             </a:extLst>
           </p:cNvPr>
@@ -24720,7 +24720,7 @@
           <p:cNvPr id="10" name="">
             <a:extLst xmlns:a="http://schemas.openxmlformats.org/drawingml/2006/main">
               <a:ext uri="{FF2B5EF4-FFF2-40B4-BE49-F238E27FC236}">
-                <a16:creationId xmlns:a16="http://schemas.microsoft.com/office/drawing/2014/main" id="{72F1B534-B3EC-4E47-B039-6F3E42D15ACE}"/>
+                <a16:creationId xmlns:a16="http://schemas.microsoft.com/office/drawing/2014/main" id="{16FF3E3E-0DF7-4F5F-A9D9-93CA28F8B762}"/>
               </a:ext>
             </a:extLst>
           </p:cNvPr>
@@ -24770,7 +24770,7 @@
           <p:cNvPr id="11" name="">
             <a:extLst xmlns:a="http://schemas.openxmlformats.org/drawingml/2006/main">
               <a:ext uri="{FF2B5EF4-FFF2-40B4-BE49-F238E27FC236}">
-                <a16:creationId xmlns:a16="http://schemas.microsoft.com/office/drawing/2014/main" id="{CE240660-BE49-4705-87D4-00912206BA68}"/>
+                <a16:creationId xmlns:a16="http://schemas.microsoft.com/office/drawing/2014/main" id="{EA51364B-2FAC-4398-A592-38CE4CE8B574}"/>
               </a:ext>
             </a:extLst>
           </p:cNvPr>
@@ -24818,7 +24818,7 @@
     </p:spTree>
     <p:extLst>
       <p:ext uri="{BB962C8B-B14F-4D97-AF65-F5344CB8AC3E}">
-        <p14:creationId xmlns:p14="http://schemas.microsoft.com/office/powerpoint/2010/main" val="835725839"/>
+        <p14:creationId xmlns:p14="http://schemas.microsoft.com/office/powerpoint/2010/main" val="237166881"/>
       </p:ext>
     </p:extLst>
   </p:cSld>
